--- a/slide/slide-A-iam-audit.pptx
+++ b/slide/slide-A-iam-audit.pptx
@@ -14,11 +14,9 @@
     <p:sldId id="262" r:id="rId8"/>
     <p:sldId id="263" r:id="rId9"/>
     <p:sldId id="264" r:id="rId10"/>
-    <p:sldId id="265" r:id="rId11"/>
-    <p:sldId id="266" r:id="rId12"/>
   </p:sldIdLst>
   <p:notesMasterIdLst>
-    <p:notesMasterId r:id="rId13"/>
+    <p:notesMasterId r:id="rId11"/>
   </p:notesMasterIdLst>
   <p:sldSz cx="12192000" cy="6858000"/>
   <p:notesSz cx="6858000" cy="12192000"/>
@@ -512,7 +510,7 @@
           <a:p>
             <a:r>
               <a:rPr lang="en-US" dirty="0"/>
-              <a:t>L'appendice raccoglie gli argomenti a cui le lezioni rimandano. Servono quando il progetto cresce, quando lavorano più persone o più account, o quando qualcosa viene negato e bisogna capire perché, o chi ha fatto cosa. Le sezioni sono indipendenti: si possono vedere una alla volta.</a:t>
+              <a:t>L'appendice raccoglie gli argomenti a cui le lezioni rimandano. Servono quando il progetto cresce, quando lavorano più persone o più account, o quando qualcosa viene negato e bisogna capire perché, o chi ha fatto cosa. Le sezioni sono indipendenti: si possono vedere una alla volta. CloudTrail e gli AccessDenied hanno una lezione tutta loro, la 12.</a:t>
             </a:r>
             <a:endParaRPr lang="en-US" dirty="0"/>
           </a:p>
@@ -536,182 +534,6 @@
             <a:fld id="{F7021451-1387-4CA6-816F-3879F97B5CBC}" type="slidenum">
               <a:rPr lang="en-US"/>
               <a:t>1</a:t>
-            </a:fld>
-            <a:endParaRPr lang="en-US"/>
-          </a:p>
-        </p:txBody>
-      </p:sp>
-    </p:spTree>
-    <p:extLst>
-      <p:ext uri="{BB962C8B-B14F-4D97-AF65-F5344CB8AC3E}">
-        <p14:creationId xmlns:p14="http://schemas.microsoft.com/office/powerpoint/2010/main" val="1024086991"/>
-      </p:ext>
-    </p:extLst>
-  </p:cSld>
-  <p:clrMapOvr>
-    <a:masterClrMapping/>
-  </p:clrMapOvr>
-</p:notes>
-</file>
-
-<file path=ppt/notesSlides/notesSlide10.xml><?xml version="1.0" encoding="utf-8"?>
-<p:notes xmlns:a="http://schemas.openxmlformats.org/drawingml/2006/main" xmlns:r="http://schemas.openxmlformats.org/officeDocument/2006/relationships" xmlns:p="http://schemas.openxmlformats.org/presentationml/2006/main">
-  <p:cSld>
-    <p:spTree>
-      <p:nvGrpSpPr>
-        <p:cNvPr id="1" name=""/>
-        <p:cNvGrpSpPr/>
-        <p:nvPr/>
-      </p:nvGrpSpPr>
-      <p:grpSpPr>
-        <a:xfrm>
-          <a:off x="0" y="0"/>
-          <a:ext cx="0" cy="0"/>
-          <a:chOff x="0" y="0"/>
-          <a:chExt cx="0" cy="0"/>
-        </a:xfrm>
-      </p:grpSpPr>
-      <p:sp>
-        <p:nvSpPr>
-          <p:cNvPr id="2" name="Slide Image Placeholder 1"/>
-          <p:cNvSpPr>
-            <a:spLocks noGrp="1" noRot="1" noChangeAspect="1"/>
-          </p:cNvSpPr>
-          <p:nvPr>
-            <p:ph type="sldImg"/>
-          </p:nvPr>
-        </p:nvSpPr>
-        <p:spPr/>
-      </p:sp>
-      <p:sp>
-        <p:nvSpPr>
-          <p:cNvPr id="3" name="Notes Placeholder 2"/>
-          <p:cNvSpPr>
-            <a:spLocks noGrp="1"/>
-          </p:cNvSpPr>
-          <p:nvPr>
-            <p:ph type="body" idx="1"/>
-          </p:nvPr>
-        </p:nvSpPr>
-        <p:spPr/>
-        <p:txBody>
-          <a:bodyPr/>
-          <a:lstStyle/>
-          <a:p>
-            <a:r>
-              <a:rPr lang="en-US" dirty="0"/>
-              <a:t>L'esercizio completo è nell'appendice. Uno: apply. Due: dal server, list-secrets viene negato; lo trovate in CloudTrail. Tre: stop-instances dal server dà un messaggio codificato; lo decodificate dal vostro computer. Quattro: il Policy simulator dice denied per ListBucket e allowed per GetObject. Cinque: il trail scrive nel bucket. Sei: gli allarmi arrivano anche con la chiave vostra. Sette: create il vostro utente nel database ed entrate con un token. Otto: pulizia; la chiave KMS resta in attesa di cancellazione per 30 giorni.</a:t>
-            </a:r>
-            <a:endParaRPr lang="en-US" dirty="0"/>
-          </a:p>
-        </p:txBody>
-      </p:sp>
-      <p:sp>
-        <p:nvSpPr>
-          <p:cNvPr id="4" name="Slide Number Placeholder 3"/>
-          <p:cNvSpPr>
-            <a:spLocks noGrp="1"/>
-          </p:cNvSpPr>
-          <p:nvPr>
-            <p:ph type="sldNum" sz="quarter" idx="10"/>
-          </p:nvPr>
-        </p:nvSpPr>
-        <p:spPr/>
-        <p:txBody>
-          <a:bodyPr/>
-          <a:lstStyle/>
-          <a:p>
-            <a:fld id="{F7021451-1387-4CA6-816F-3879F97B5CBC}" type="slidenum">
-              <a:rPr lang="en-US"/>
-              <a:t>10</a:t>
-            </a:fld>
-            <a:endParaRPr lang="en-US"/>
-          </a:p>
-        </p:txBody>
-      </p:sp>
-    </p:spTree>
-    <p:extLst>
-      <p:ext uri="{BB962C8B-B14F-4D97-AF65-F5344CB8AC3E}">
-        <p14:creationId xmlns:p14="http://schemas.microsoft.com/office/powerpoint/2010/main" val="1024086991"/>
-      </p:ext>
-    </p:extLst>
-  </p:cSld>
-  <p:clrMapOvr>
-    <a:masterClrMapping/>
-  </p:clrMapOvr>
-</p:notes>
-</file>
-
-<file path=ppt/notesSlides/notesSlide11.xml><?xml version="1.0" encoding="utf-8"?>
-<p:notes xmlns:a="http://schemas.openxmlformats.org/drawingml/2006/main" xmlns:r="http://schemas.openxmlformats.org/officeDocument/2006/relationships" xmlns:p="http://schemas.openxmlformats.org/presentationml/2006/main">
-  <p:cSld>
-    <p:spTree>
-      <p:nvGrpSpPr>
-        <p:cNvPr id="1" name=""/>
-        <p:cNvGrpSpPr/>
-        <p:nvPr/>
-      </p:nvGrpSpPr>
-      <p:grpSpPr>
-        <a:xfrm>
-          <a:off x="0" y="0"/>
-          <a:ext cx="0" cy="0"/>
-          <a:chOff x="0" y="0"/>
-          <a:chExt cx="0" cy="0"/>
-        </a:xfrm>
-      </p:grpSpPr>
-      <p:sp>
-        <p:nvSpPr>
-          <p:cNvPr id="2" name="Slide Image Placeholder 1"/>
-          <p:cNvSpPr>
-            <a:spLocks noGrp="1" noRot="1" noChangeAspect="1"/>
-          </p:cNvSpPr>
-          <p:nvPr>
-            <p:ph type="sldImg"/>
-          </p:nvPr>
-        </p:nvSpPr>
-        <p:spPr/>
-      </p:sp>
-      <p:sp>
-        <p:nvSpPr>
-          <p:cNvPr id="3" name="Notes Placeholder 2"/>
-          <p:cNvSpPr>
-            <a:spLocks noGrp="1"/>
-          </p:cNvSpPr>
-          <p:nvPr>
-            <p:ph type="body" idx="1"/>
-          </p:nvPr>
-        </p:nvSpPr>
-        <p:spPr/>
-        <p:txBody>
-          <a:bodyPr/>
-          <a:lstStyle/>
-          <a:p>
-            <a:r>
-              <a:rPr lang="en-US" dirty="0"/>
-              <a:t>Riassumendo. Il materiale di studio è l'appendice A. Con questa si chiude il corso: avete costruito, con un unico progetto Terraform, un'infrastruttura AWS completa, dalla rete al deploy, agli allarmi. Il passo successivo è provarla davvero, lezione per lezione, in un account di test.</a:t>
-            </a:r>
-            <a:endParaRPr lang="en-US" dirty="0"/>
-          </a:p>
-        </p:txBody>
-      </p:sp>
-      <p:sp>
-        <p:nvSpPr>
-          <p:cNvPr id="4" name="Slide Number Placeholder 3"/>
-          <p:cNvSpPr>
-            <a:spLocks noGrp="1"/>
-          </p:cNvSpPr>
-          <p:nvPr>
-            <p:ph type="sldNum" sz="quarter" idx="10"/>
-          </p:nvPr>
-        </p:nvSpPr>
-        <p:spPr/>
-        <p:txBody>
-          <a:bodyPr/>
-          <a:lstStyle/>
-          <a:p>
-            <a:fld id="{F7021451-1387-4CA6-816F-3879F97B5CBC}" type="slidenum">
-              <a:rPr lang="en-US"/>
-              <a:t>11</a:t>
             </a:fld>
             <a:endParaRPr lang="en-US"/>
           </a:p>
@@ -1040,7 +862,7 @@
           <a:p>
             <a:r>
               <a:rPr lang="en-US" dirty="0"/>
-              <a:t>Quattro passi. Uno: leggi tutto il messaggio, spesso dice già il motivo: nessun Allow, un Deny esplicito, una SCP, un boundary. Due: se è codificato, come fa EC2, si decodifica con sts decode-authorization-message. Tre: cercalo in CloudTrail, Event history: l'evento negato ha errorCode AccessDenied e dice chi, da dove e quando. Quattro: il Policy simulator di IAM, per provare la correzione prima di farla.</a:t>
+              <a:t>Una chiave tua serve per decidere chi la usa, per condividere uno snapshot con un altro account, per SNS cifrato con gli allarmi, e per vedere ogni suo uso in CloudTrail. La key policy parte sempre dallo stesso statement: l'account, root, può tutto. Non vuol dire che l'utente root la usi: vuol dire che da lì decidono le policy IAM dell'account. Senza, nemmeno l'amministratore potrebbe usarla. Poi si aggiungono i servizi: per gli allarmi CloudWatch e il service-linked role dell'Auto Scaling. La rotazione annuale la fa AWS da solo. Per RDS la chiave si sceglie solo alla creazione.</a:t>
             </a:r>
             <a:endParaRPr lang="en-US" dirty="0"/>
           </a:p>
@@ -1128,7 +950,7 @@
           <a:p>
             <a:r>
               <a:rPr lang="en-US" dirty="0"/>
-              <a:t>L'Event history c'è sempre, ma tiene 90 giorni e solo gli eventi di gestione. Un trail scrive tutto in un bucket S3, per quanto tempo vuoi, in tutte le regioni, con un file di firme ogni ora per dimostrare che nessuno ha toccato i log. E può registrare i data event, cioè le letture e scritture dei file: si pagano per numero, quindi solo dove contano. Noi sul bucket degli artefatti. Il bucket dei log ha una bucket policy che permette di scrivere solo al nostro trail.</a:t>
+              <a:t>Con un solo utente dbadmin, nei log del database risulta sempre dbadmin, e quando qualcuno se ne va bisogna cambiare la password a tutti. Con l'autenticazione IAM ogni persona ha il suo utente nel database, e invece della password usa un token generato con il suo login AWS, valido 15 minuti. Servono tre cose: l'opzione sul database, un utente con il ruolo rds_iam, e il permesso rds-db connect. L'applicazione può restare con la password di Secrets Manager: l'autenticazione IAM dà il meglio con le persone.</a:t>
             </a:r>
             <a:endParaRPr lang="en-US" dirty="0"/>
           </a:p>
@@ -1216,7 +1038,7 @@
           <a:p>
             <a:r>
               <a:rPr lang="en-US" dirty="0"/>
-              <a:t>Una chiave tua serve per decidere chi la usa, per condividere uno snapshot con un altro account, per SNS cifrato con gli allarmi, e per vedere ogni suo uso in CloudTrail. La key policy parte sempre dallo stesso statement: l'account, root, può tutto. Non vuol dire che l'utente root la usi: vuol dire che da lì decidono le policy IAM dell'account. Senza, nemmeno l'amministratore potrebbe usarla. Poi si aggiungono i servizi: per gli allarmi CloudWatch e il service-linked role dell'Auto Scaling. La rotazione annuale la fa AWS da solo. Per RDS la chiave si sceglie solo alla creazione.</a:t>
+              <a:t>Ogni pezzo tiene il suo registro, e nessuno da solo risponde. PostgreSQL dice: dbadmin, dall'indirizzo 10.20.10.7. Quell'indirizzo è il router Tailscale: quindi qualcuno in VPN. CloudTrail dice chi ha letto la password poco prima. I log di Tailscale, se il piano li include, dicono quale dispositivo. Con l'autenticazione IAM, la risposta sta già nel log di PostgreSQL: mario. È uno dei motivi migliori per usarla.</a:t>
             </a:r>
             <a:endParaRPr lang="en-US" dirty="0"/>
           </a:p>
@@ -1304,7 +1126,7 @@
           <a:p>
             <a:r>
               <a:rPr lang="en-US" dirty="0"/>
-              <a:t>Con un solo utente dbadmin, nei log del database risulta sempre dbadmin, e quando qualcuno se ne va bisogna cambiare la password a tutti. Con l'autenticazione IAM ogni persona ha il suo utente nel database, e invece della password usa un token generato con il suo login AWS, valido 15 minuti. Servono tre cose: l'opzione sul database, un utente con il ruolo rds_iam, e il permesso rds-db connect. L'applicazione può restare con la password di Secrets Manager: l'autenticazione IAM dà il meglio con le persone.</a:t>
+              <a:t>L'esercizio completo è nell'appendice. Uno: apply. Due: gli allarmi arrivano anche con la chiave vostra. Tre: create il vostro utente nel database ed entrate con un token. Quattro: pulizia; la chiave KMS resta in attesa di cancellazione per 30 giorni.</a:t>
             </a:r>
             <a:endParaRPr lang="en-US" dirty="0"/>
           </a:p>
@@ -1392,7 +1214,7 @@
           <a:p>
             <a:r>
               <a:rPr lang="en-US" dirty="0"/>
-              <a:t>Ogni pezzo tiene il suo registro, e nessuno da solo risponde. PostgreSQL dice: dbadmin, dall'indirizzo 10.20.10.7. Quell'indirizzo è il router Tailscale: quindi qualcuno in VPN. CloudTrail dice chi ha letto la password poco prima. I log di Tailscale, se il piano li include, dicono quale dispositivo. Con l'autenticazione IAM, la risposta sta già nel log di PostgreSQL: mario. È uno dei motivi migliori per usarla.</a:t>
+              <a:t>Riassumendo. Il materiale di studio è l'appendice A. Con questa si chiude il corso: avete costruito, con un unico progetto Terraform, un'infrastruttura AWS completa, dalla rete al deploy, agli allarmi. Il passo successivo è provarla davvero, lezione per lezione, in un account di test.</a:t>
             </a:r>
             <a:endParaRPr lang="en-US" dirty="0"/>
           </a:p>
@@ -2011,7 +1833,7 @@
                 <a:ea typeface="Calibri" pitchFamily="34" charset="-122"/>
                 <a:cs typeface="Calibri" pitchFamily="34" charset="-120"/>
               </a:rPr>
-              <a:t>Quando il progetto cresce: limiti, account diversi, AccessDenied, registri, chiavi tue, database senza password</a:t>
+              <a:t>Quando il progetto cresce: limiti, account diversi, chiavi tue, database senza password, log incrociati</a:t>
             </a:r>
             <a:endParaRPr lang="en-US" sz="2000" dirty="0"/>
           </a:p>
@@ -2053,1269 +1875,6 @@
               <a:t>Corso: Infrastruttura AWS con Terraform</a:t>
             </a:r>
             <a:endParaRPr lang="en-US" sz="1200" dirty="0"/>
-          </a:p>
-        </p:txBody>
-      </p:sp>
-    </p:spTree>
-  </p:cSld>
-  <p:clrMapOvr>
-    <a:masterClrMapping/>
-  </p:clrMapOvr>
-</p:sld>
-</file>
-
-<file path=ppt/slides/slide10.xml><?xml version="1.0" encoding="utf-8"?>
-<p:sld xmlns:a="http://schemas.openxmlformats.org/drawingml/2006/main" xmlns:r="http://schemas.openxmlformats.org/officeDocument/2006/relationships" xmlns:p="http://schemas.openxmlformats.org/presentationml/2006/main">
-  <p:cSld name="Slide 10">
-    <p:bg>
-      <p:bgPr>
-        <a:solidFill>
-          <a:srgbClr val="FFFFFF"/>
-        </a:solidFill>
-      </p:bgPr>
-    </p:bg>
-    <p:spTree>
-      <p:nvGrpSpPr>
-        <p:cNvPr id="1" name=""/>
-        <p:cNvGrpSpPr/>
-        <p:nvPr/>
-      </p:nvGrpSpPr>
-      <p:grpSpPr>
-        <a:xfrm>
-          <a:off x="0" y="0"/>
-          <a:ext cx="0" cy="0"/>
-          <a:chOff x="0" y="0"/>
-          <a:chExt cx="0" cy="0"/>
-        </a:xfrm>
-      </p:grpSpPr>
-      <p:sp>
-        <p:nvSpPr>
-          <p:cNvPr id="2" name="Text 0"/>
-          <p:cNvSpPr txBox="1"/>
-          <p:nvPr/>
-        </p:nvSpPr>
-        <p:spPr>
-          <a:xfrm>
-            <a:off x="548640" y="365760"/>
-            <a:ext cx="11094415" cy="777240"/>
-          </a:xfrm>
-          <a:prstGeom prst="rect">
-            <a:avLst/>
-          </a:prstGeom>
-          <a:noFill/>
-          <a:ln/>
-        </p:spPr>
-        <p:txBody>
-          <a:bodyPr wrap="square" lIns="0" tIns="0" rIns="0" bIns="0" rtlCol="0" anchor="ctr"/>
-          <a:lstStyle/>
-          <a:p>
-            <a:pPr indent="0" marL="0">
-              <a:buNone/>
-            </a:pPr>
-            <a:r>
-              <a:rPr lang="en-US" sz="3200" b="1" dirty="0">
-                <a:solidFill>
-                  <a:srgbClr val="22253A"/>
-                </a:solidFill>
-                <a:latin typeface="Calibri" pitchFamily="34" charset="0"/>
-                <a:ea typeface="Calibri" pitchFamily="34" charset="-122"/>
-                <a:cs typeface="Calibri" pitchFamily="34" charset="-120"/>
-              </a:rPr>
-              <a:t>Esercizio</a:t>
-            </a:r>
-            <a:endParaRPr lang="en-US" sz="3200" dirty="0"/>
-          </a:p>
-        </p:txBody>
-      </p:sp>
-      <p:sp>
-        <p:nvSpPr>
-          <p:cNvPr id="3" name="Text 1"/>
-          <p:cNvSpPr txBox="1"/>
-          <p:nvPr/>
-        </p:nvSpPr>
-        <p:spPr>
-          <a:xfrm>
-            <a:off x="548640" y="6400800"/>
-            <a:ext cx="7315200" cy="274320"/>
-          </a:xfrm>
-          <a:prstGeom prst="rect">
-            <a:avLst/>
-          </a:prstGeom>
-          <a:noFill/>
-          <a:ln/>
-        </p:spPr>
-        <p:txBody>
-          <a:bodyPr wrap="square" lIns="0" tIns="0" rIns="0" bIns="0" rtlCol="0" anchor="ctr"/>
-          <a:lstStyle/>
-          <a:p>
-            <a:pPr indent="0" marL="0">
-              <a:buNone/>
-            </a:pPr>
-            <a:r>
-              <a:rPr lang="en-US" sz="1000" dirty="0">
-                <a:solidFill>
-                  <a:srgbClr val="5F6478"/>
-                </a:solidFill>
-                <a:latin typeface="Calibri" pitchFamily="34" charset="0"/>
-                <a:ea typeface="Calibri" pitchFamily="34" charset="-122"/>
-                <a:cs typeface="Calibri" pitchFamily="34" charset="-120"/>
-              </a:rPr>
-              <a:t>Appendice A · IAM avanzato e audit</a:t>
-            </a:r>
-            <a:endParaRPr lang="en-US" sz="1000" dirty="0"/>
-          </a:p>
-        </p:txBody>
-      </p:sp>
-      <p:sp>
-        <p:nvSpPr>
-          <p:cNvPr id="5" name="Shape 2"/>
-          <p:cNvSpPr/>
-          <p:nvPr/>
-        </p:nvSpPr>
-        <p:spPr>
-          <a:xfrm>
-            <a:off x="548640" y="1417320"/>
-            <a:ext cx="594360" cy="594360"/>
-          </a:xfrm>
-          <a:prstGeom prst="ellipse">
-            <a:avLst/>
-          </a:prstGeom>
-          <a:solidFill>
-            <a:srgbClr val="5B3FD0"/>
-          </a:solidFill>
-          <a:ln w="12700">
-            <a:solidFill>
-              <a:srgbClr val="5B3FD0"/>
-            </a:solidFill>
-            <a:prstDash val="solid"/>
-          </a:ln>
-        </p:spPr>
-      </p:sp>
-      <p:sp>
-        <p:nvSpPr>
-          <p:cNvPr id="6" name="Text 3"/>
-          <p:cNvSpPr txBox="1"/>
-          <p:nvPr/>
-        </p:nvSpPr>
-        <p:spPr>
-          <a:xfrm>
-            <a:off x="548640" y="1417320"/>
-            <a:ext cx="594360" cy="594360"/>
-          </a:xfrm>
-          <a:prstGeom prst="rect">
-            <a:avLst/>
-          </a:prstGeom>
-          <a:noFill/>
-          <a:ln/>
-        </p:spPr>
-        <p:txBody>
-          <a:bodyPr wrap="square" lIns="0" tIns="0" rIns="0" bIns="0" rtlCol="0" anchor="ctr"/>
-          <a:lstStyle/>
-          <a:p>
-            <a:pPr algn="ctr" indent="0" marL="0">
-              <a:buNone/>
-            </a:pPr>
-            <a:r>
-              <a:rPr lang="en-US" sz="1800" b="1" dirty="0">
-                <a:solidFill>
-                  <a:srgbClr val="FFFFFF"/>
-                </a:solidFill>
-                <a:latin typeface="Calibri" pitchFamily="34" charset="0"/>
-                <a:ea typeface="Calibri" pitchFamily="34" charset="-122"/>
-                <a:cs typeface="Calibri" pitchFamily="34" charset="-120"/>
-              </a:rPr>
-              <a:t>1</a:t>
-            </a:r>
-            <a:endParaRPr lang="en-US" sz="1800" dirty="0"/>
-          </a:p>
-        </p:txBody>
-      </p:sp>
-      <p:sp>
-        <p:nvSpPr>
-          <p:cNvPr id="7" name="Text 4"/>
-          <p:cNvSpPr txBox="1"/>
-          <p:nvPr/>
-        </p:nvSpPr>
-        <p:spPr>
-          <a:xfrm>
-            <a:off x="1325880" y="1280160"/>
-            <a:ext cx="10225735" cy="868680"/>
-          </a:xfrm>
-          <a:prstGeom prst="rect">
-            <a:avLst/>
-          </a:prstGeom>
-          <a:noFill/>
-          <a:ln/>
-        </p:spPr>
-        <p:txBody>
-          <a:bodyPr wrap="square" lIns="0" tIns="0" rIns="0" bIns="0" rtlCol="0" anchor="ctr"/>
-          <a:lstStyle/>
-          <a:p>
-            <a:pPr indent="0" marL="0">
-              <a:buNone/>
-            </a:pPr>
-            <a:r>
-              <a:rPr lang="en-US" sz="1700" b="1" dirty="0">
-                <a:solidFill>
-                  <a:srgbClr val="22253A"/>
-                </a:solidFill>
-                <a:latin typeface="Calibri" pitchFamily="34" charset="0"/>
-                <a:ea typeface="Calibri" pitchFamily="34" charset="-122"/>
-                <a:cs typeface="Calibri" pitchFamily="34" charset="-120"/>
-              </a:rPr>
-              <a:t>terraform apply</a:t>
-            </a:r>
-            <a:endParaRPr lang="en-US" sz="1700" dirty="0"/>
-          </a:p>
-          <a:p>
-            <a:pPr indent="0" marL="0">
-              <a:buNone/>
-            </a:pPr>
-            <a:r>
-              <a:rPr lang="en-US" sz="1400" dirty="0">
-                <a:solidFill>
-                  <a:srgbClr val="5F6478"/>
-                </a:solidFill>
-                <a:latin typeface="Calibri" pitchFamily="34" charset="0"/>
-                <a:ea typeface="Calibri" pitchFamily="34" charset="-122"/>
-                <a:cs typeface="Calibri" pitchFamily="34" charset="-120"/>
-              </a:rPr>
-              <a:t>bucket e trail, chiave, topic e database modificati</a:t>
-            </a:r>
-            <a:endParaRPr lang="en-US" sz="1700" dirty="0"/>
-          </a:p>
-        </p:txBody>
-      </p:sp>
-      <p:sp>
-        <p:nvSpPr>
-          <p:cNvPr id="8" name="Shape 5"/>
-          <p:cNvSpPr/>
-          <p:nvPr/>
-        </p:nvSpPr>
-        <p:spPr>
-          <a:xfrm>
-            <a:off x="548640" y="2221992"/>
-            <a:ext cx="594360" cy="594360"/>
-          </a:xfrm>
-          <a:prstGeom prst="ellipse">
-            <a:avLst/>
-          </a:prstGeom>
-          <a:solidFill>
-            <a:srgbClr val="5B3FD0"/>
-          </a:solidFill>
-          <a:ln w="12700">
-            <a:solidFill>
-              <a:srgbClr val="5B3FD0"/>
-            </a:solidFill>
-            <a:prstDash val="solid"/>
-          </a:ln>
-        </p:spPr>
-      </p:sp>
-      <p:sp>
-        <p:nvSpPr>
-          <p:cNvPr id="9" name="Text 6"/>
-          <p:cNvSpPr txBox="1"/>
-          <p:nvPr/>
-        </p:nvSpPr>
-        <p:spPr>
-          <a:xfrm>
-            <a:off x="548640" y="2221992"/>
-            <a:ext cx="594360" cy="594360"/>
-          </a:xfrm>
-          <a:prstGeom prst="rect">
-            <a:avLst/>
-          </a:prstGeom>
-          <a:noFill/>
-          <a:ln/>
-        </p:spPr>
-        <p:txBody>
-          <a:bodyPr wrap="square" lIns="0" tIns="0" rIns="0" bIns="0" rtlCol="0" anchor="ctr"/>
-          <a:lstStyle/>
-          <a:p>
-            <a:pPr algn="ctr" indent="0" marL="0">
-              <a:buNone/>
-            </a:pPr>
-            <a:r>
-              <a:rPr lang="en-US" sz="1800" b="1" dirty="0">
-                <a:solidFill>
-                  <a:srgbClr val="FFFFFF"/>
-                </a:solidFill>
-                <a:latin typeface="Calibri" pitchFamily="34" charset="0"/>
-                <a:ea typeface="Calibri" pitchFamily="34" charset="-122"/>
-                <a:cs typeface="Calibri" pitchFamily="34" charset="-120"/>
-              </a:rPr>
-              <a:t>2</a:t>
-            </a:r>
-            <a:endParaRPr lang="en-US" sz="1800" dirty="0"/>
-          </a:p>
-        </p:txBody>
-      </p:sp>
-      <p:sp>
-        <p:nvSpPr>
-          <p:cNvPr id="10" name="Text 7"/>
-          <p:cNvSpPr txBox="1"/>
-          <p:nvPr/>
-        </p:nvSpPr>
-        <p:spPr>
-          <a:xfrm>
-            <a:off x="1325880" y="2084832"/>
-            <a:ext cx="10225735" cy="868680"/>
-          </a:xfrm>
-          <a:prstGeom prst="rect">
-            <a:avLst/>
-          </a:prstGeom>
-          <a:noFill/>
-          <a:ln/>
-        </p:spPr>
-        <p:txBody>
-          <a:bodyPr wrap="square" lIns="0" tIns="0" rIns="0" bIns="0" rtlCol="0" anchor="ctr"/>
-          <a:lstStyle/>
-          <a:p>
-            <a:pPr indent="0" marL="0">
-              <a:buNone/>
-            </a:pPr>
-            <a:r>
-              <a:rPr lang="en-US" sz="1700" b="1" dirty="0">
-                <a:solidFill>
-                  <a:srgbClr val="22253A"/>
-                </a:solidFill>
-                <a:latin typeface="Calibri" pitchFamily="34" charset="0"/>
-                <a:ea typeface="Calibri" pitchFamily="34" charset="-122"/>
-                <a:cs typeface="Calibri" pitchFamily="34" charset="-120"/>
-              </a:rPr>
-              <a:t>list-secrets dal server → CloudTrail</a:t>
-            </a:r>
-            <a:endParaRPr lang="en-US" sz="1700" dirty="0"/>
-          </a:p>
-          <a:p>
-            <a:pPr indent="0" marL="0">
-              <a:buNone/>
-            </a:pPr>
-            <a:r>
-              <a:rPr lang="en-US" sz="1400" dirty="0">
-                <a:solidFill>
-                  <a:srgbClr val="5F6478"/>
-                </a:solidFill>
-                <a:latin typeface="Calibri" pitchFamily="34" charset="0"/>
-                <a:ea typeface="Calibri" pitchFamily="34" charset="-122"/>
-                <a:cs typeface="Calibri" pitchFamily="34" charset="-120"/>
-              </a:rPr>
-              <a:t>AccessDenied: chi, da dove, quando</a:t>
-            </a:r>
-            <a:endParaRPr lang="en-US" sz="1700" dirty="0"/>
-          </a:p>
-        </p:txBody>
-      </p:sp>
-      <p:sp>
-        <p:nvSpPr>
-          <p:cNvPr id="11" name="Shape 8"/>
-          <p:cNvSpPr/>
-          <p:nvPr/>
-        </p:nvSpPr>
-        <p:spPr>
-          <a:xfrm>
-            <a:off x="548640" y="3026664"/>
-            <a:ext cx="594360" cy="594360"/>
-          </a:xfrm>
-          <a:prstGeom prst="ellipse">
-            <a:avLst/>
-          </a:prstGeom>
-          <a:solidFill>
-            <a:srgbClr val="5B3FD0"/>
-          </a:solidFill>
-          <a:ln w="12700">
-            <a:solidFill>
-              <a:srgbClr val="5B3FD0"/>
-            </a:solidFill>
-            <a:prstDash val="solid"/>
-          </a:ln>
-        </p:spPr>
-      </p:sp>
-      <p:sp>
-        <p:nvSpPr>
-          <p:cNvPr id="12" name="Text 9"/>
-          <p:cNvSpPr txBox="1"/>
-          <p:nvPr/>
-        </p:nvSpPr>
-        <p:spPr>
-          <a:xfrm>
-            <a:off x="548640" y="3026664"/>
-            <a:ext cx="594360" cy="594360"/>
-          </a:xfrm>
-          <a:prstGeom prst="rect">
-            <a:avLst/>
-          </a:prstGeom>
-          <a:noFill/>
-          <a:ln/>
-        </p:spPr>
-        <p:txBody>
-          <a:bodyPr wrap="square" lIns="0" tIns="0" rIns="0" bIns="0" rtlCol="0" anchor="ctr"/>
-          <a:lstStyle/>
-          <a:p>
-            <a:pPr algn="ctr" indent="0" marL="0">
-              <a:buNone/>
-            </a:pPr>
-            <a:r>
-              <a:rPr lang="en-US" sz="1800" b="1" dirty="0">
-                <a:solidFill>
-                  <a:srgbClr val="FFFFFF"/>
-                </a:solidFill>
-                <a:latin typeface="Calibri" pitchFamily="34" charset="0"/>
-                <a:ea typeface="Calibri" pitchFamily="34" charset="-122"/>
-                <a:cs typeface="Calibri" pitchFamily="34" charset="-120"/>
-              </a:rPr>
-              <a:t>3</a:t>
-            </a:r>
-            <a:endParaRPr lang="en-US" sz="1800" dirty="0"/>
-          </a:p>
-        </p:txBody>
-      </p:sp>
-      <p:sp>
-        <p:nvSpPr>
-          <p:cNvPr id="13" name="Text 10"/>
-          <p:cNvSpPr txBox="1"/>
-          <p:nvPr/>
-        </p:nvSpPr>
-        <p:spPr>
-          <a:xfrm>
-            <a:off x="1325880" y="2889504"/>
-            <a:ext cx="10225735" cy="868680"/>
-          </a:xfrm>
-          <a:prstGeom prst="rect">
-            <a:avLst/>
-          </a:prstGeom>
-          <a:noFill/>
-          <a:ln/>
-        </p:spPr>
-        <p:txBody>
-          <a:bodyPr wrap="square" lIns="0" tIns="0" rIns="0" bIns="0" rtlCol="0" anchor="ctr"/>
-          <a:lstStyle/>
-          <a:p>
-            <a:pPr indent="0" marL="0">
-              <a:buNone/>
-            </a:pPr>
-            <a:r>
-              <a:rPr lang="en-US" sz="1700" b="1" dirty="0">
-                <a:solidFill>
-                  <a:srgbClr val="22253A"/>
-                </a:solidFill>
-                <a:latin typeface="Calibri" pitchFamily="34" charset="0"/>
-                <a:ea typeface="Calibri" pitchFamily="34" charset="-122"/>
-                <a:cs typeface="Calibri" pitchFamily="34" charset="-120"/>
-              </a:rPr>
-              <a:t>stop-instances → decode-authorization-message</a:t>
-            </a:r>
-            <a:endParaRPr lang="en-US" sz="1700" dirty="0"/>
-          </a:p>
-          <a:p>
-            <a:pPr indent="0" marL="0">
-              <a:buNone/>
-            </a:pPr>
-            <a:r>
-              <a:rPr lang="en-US" sz="1400" dirty="0">
-                <a:solidFill>
-                  <a:srgbClr val="5F6478"/>
-                </a:solidFill>
-                <a:latin typeface="Calibri" pitchFamily="34" charset="0"/>
-                <a:ea typeface="Calibri" pitchFamily="34" charset="-122"/>
-                <a:cs typeface="Calibri" pitchFamily="34" charset="-120"/>
-              </a:rPr>
-              <a:t>il messaggio codificato, decodificato dal tuo computer</a:t>
-            </a:r>
-            <a:endParaRPr lang="en-US" sz="1700" dirty="0"/>
-          </a:p>
-        </p:txBody>
-      </p:sp>
-      <p:sp>
-        <p:nvSpPr>
-          <p:cNvPr id="14" name="Shape 11"/>
-          <p:cNvSpPr/>
-          <p:nvPr/>
-        </p:nvSpPr>
-        <p:spPr>
-          <a:xfrm>
-            <a:off x="548640" y="3831336"/>
-            <a:ext cx="594360" cy="594360"/>
-          </a:xfrm>
-          <a:prstGeom prst="ellipse">
-            <a:avLst/>
-          </a:prstGeom>
-          <a:solidFill>
-            <a:srgbClr val="5B3FD0"/>
-          </a:solidFill>
-          <a:ln w="12700">
-            <a:solidFill>
-              <a:srgbClr val="5B3FD0"/>
-            </a:solidFill>
-            <a:prstDash val="solid"/>
-          </a:ln>
-        </p:spPr>
-      </p:sp>
-      <p:sp>
-        <p:nvSpPr>
-          <p:cNvPr id="15" name="Text 12"/>
-          <p:cNvSpPr txBox="1"/>
-          <p:nvPr/>
-        </p:nvSpPr>
-        <p:spPr>
-          <a:xfrm>
-            <a:off x="548640" y="3831336"/>
-            <a:ext cx="594360" cy="594360"/>
-          </a:xfrm>
-          <a:prstGeom prst="rect">
-            <a:avLst/>
-          </a:prstGeom>
-          <a:noFill/>
-          <a:ln/>
-        </p:spPr>
-        <p:txBody>
-          <a:bodyPr wrap="square" lIns="0" tIns="0" rIns="0" bIns="0" rtlCol="0" anchor="ctr"/>
-          <a:lstStyle/>
-          <a:p>
-            <a:pPr algn="ctr" indent="0" marL="0">
-              <a:buNone/>
-            </a:pPr>
-            <a:r>
-              <a:rPr lang="en-US" sz="1800" b="1" dirty="0">
-                <a:solidFill>
-                  <a:srgbClr val="FFFFFF"/>
-                </a:solidFill>
-                <a:latin typeface="Calibri" pitchFamily="34" charset="0"/>
-                <a:ea typeface="Calibri" pitchFamily="34" charset="-122"/>
-                <a:cs typeface="Calibri" pitchFamily="34" charset="-120"/>
-              </a:rPr>
-              <a:t>4</a:t>
-            </a:r>
-            <a:endParaRPr lang="en-US" sz="1800" dirty="0"/>
-          </a:p>
-        </p:txBody>
-      </p:sp>
-      <p:sp>
-        <p:nvSpPr>
-          <p:cNvPr id="16" name="Text 13"/>
-          <p:cNvSpPr txBox="1"/>
-          <p:nvPr/>
-        </p:nvSpPr>
-        <p:spPr>
-          <a:xfrm>
-            <a:off x="1325880" y="3694176"/>
-            <a:ext cx="10225735" cy="868680"/>
-          </a:xfrm>
-          <a:prstGeom prst="rect">
-            <a:avLst/>
-          </a:prstGeom>
-          <a:noFill/>
-          <a:ln/>
-        </p:spPr>
-        <p:txBody>
-          <a:bodyPr wrap="square" lIns="0" tIns="0" rIns="0" bIns="0" rtlCol="0" anchor="ctr"/>
-          <a:lstStyle/>
-          <a:p>
-            <a:pPr indent="0" marL="0">
-              <a:buNone/>
-            </a:pPr>
-            <a:r>
-              <a:rPr lang="en-US" sz="1700" b="1" dirty="0">
-                <a:solidFill>
-                  <a:srgbClr val="22253A"/>
-                </a:solidFill>
-                <a:latin typeface="Calibri" pitchFamily="34" charset="0"/>
-                <a:ea typeface="Calibri" pitchFamily="34" charset="-122"/>
-                <a:cs typeface="Calibri" pitchFamily="34" charset="-120"/>
-              </a:rPr>
-              <a:t>Policy simulator</a:t>
-            </a:r>
-            <a:endParaRPr lang="en-US" sz="1700" dirty="0"/>
-          </a:p>
-          <a:p>
-            <a:pPr indent="0" marL="0">
-              <a:buNone/>
-            </a:pPr>
-            <a:r>
-              <a:rPr lang="en-US" sz="1400" dirty="0">
-                <a:solidFill>
-                  <a:srgbClr val="5F6478"/>
-                </a:solidFill>
-                <a:latin typeface="Calibri" pitchFamily="34" charset="0"/>
-                <a:ea typeface="Calibri" pitchFamily="34" charset="-122"/>
-                <a:cs typeface="Calibri" pitchFamily="34" charset="-120"/>
-              </a:rPr>
-              <a:t>ListBucket: denied · GetObject su deploy/: allowed</a:t>
-            </a:r>
-            <a:endParaRPr lang="en-US" sz="1700" dirty="0"/>
-          </a:p>
-        </p:txBody>
-      </p:sp>
-      <p:sp>
-        <p:nvSpPr>
-          <p:cNvPr id="17" name="Shape 14"/>
-          <p:cNvSpPr/>
-          <p:nvPr/>
-        </p:nvSpPr>
-        <p:spPr>
-          <a:xfrm>
-            <a:off x="548640" y="4636008"/>
-            <a:ext cx="594360" cy="594360"/>
-          </a:xfrm>
-          <a:prstGeom prst="ellipse">
-            <a:avLst/>
-          </a:prstGeom>
-          <a:solidFill>
-            <a:srgbClr val="5B3FD0"/>
-          </a:solidFill>
-          <a:ln w="12700">
-            <a:solidFill>
-              <a:srgbClr val="5B3FD0"/>
-            </a:solidFill>
-            <a:prstDash val="solid"/>
-          </a:ln>
-        </p:spPr>
-      </p:sp>
-      <p:sp>
-        <p:nvSpPr>
-          <p:cNvPr id="18" name="Text 15"/>
-          <p:cNvSpPr txBox="1"/>
-          <p:nvPr/>
-        </p:nvSpPr>
-        <p:spPr>
-          <a:xfrm>
-            <a:off x="548640" y="4636008"/>
-            <a:ext cx="594360" cy="594360"/>
-          </a:xfrm>
-          <a:prstGeom prst="rect">
-            <a:avLst/>
-          </a:prstGeom>
-          <a:noFill/>
-          <a:ln/>
-        </p:spPr>
-        <p:txBody>
-          <a:bodyPr wrap="square" lIns="0" tIns="0" rIns="0" bIns="0" rtlCol="0" anchor="ctr"/>
-          <a:lstStyle/>
-          <a:p>
-            <a:pPr algn="ctr" indent="0" marL="0">
-              <a:buNone/>
-            </a:pPr>
-            <a:r>
-              <a:rPr lang="en-US" sz="1800" b="1" dirty="0">
-                <a:solidFill>
-                  <a:srgbClr val="FFFFFF"/>
-                </a:solidFill>
-                <a:latin typeface="Calibri" pitchFamily="34" charset="0"/>
-                <a:ea typeface="Calibri" pitchFamily="34" charset="-122"/>
-                <a:cs typeface="Calibri" pitchFamily="34" charset="-120"/>
-              </a:rPr>
-              <a:t>5</a:t>
-            </a:r>
-            <a:endParaRPr lang="en-US" sz="1800" dirty="0"/>
-          </a:p>
-        </p:txBody>
-      </p:sp>
-      <p:sp>
-        <p:nvSpPr>
-          <p:cNvPr id="19" name="Text 16"/>
-          <p:cNvSpPr txBox="1"/>
-          <p:nvPr/>
-        </p:nvSpPr>
-        <p:spPr>
-          <a:xfrm>
-            <a:off x="1325880" y="4498848"/>
-            <a:ext cx="10225735" cy="868680"/>
-          </a:xfrm>
-          <a:prstGeom prst="rect">
-            <a:avLst/>
-          </a:prstGeom>
-          <a:noFill/>
-          <a:ln/>
-        </p:spPr>
-        <p:txBody>
-          <a:bodyPr wrap="square" lIns="0" tIns="0" rIns="0" bIns="0" rtlCol="0" anchor="ctr"/>
-          <a:lstStyle/>
-          <a:p>
-            <a:pPr indent="0" marL="0">
-              <a:buNone/>
-            </a:pPr>
-            <a:r>
-              <a:rPr lang="en-US" sz="1700" b="1" dirty="0">
-                <a:solidFill>
-                  <a:srgbClr val="22253A"/>
-                </a:solidFill>
-                <a:latin typeface="Calibri" pitchFamily="34" charset="0"/>
-                <a:ea typeface="Calibri" pitchFamily="34" charset="-122"/>
-                <a:cs typeface="Calibri" pitchFamily="34" charset="-120"/>
-              </a:rPr>
-              <a:t>Allarme forzato, chiave nostra</a:t>
-            </a:r>
-            <a:endParaRPr lang="en-US" sz="1700" dirty="0"/>
-          </a:p>
-          <a:p>
-            <a:pPr indent="0" marL="0">
-              <a:buNone/>
-            </a:pPr>
-            <a:r>
-              <a:rPr lang="en-US" sz="1400" dirty="0">
-                <a:solidFill>
-                  <a:srgbClr val="5F6478"/>
-                </a:solidFill>
-                <a:latin typeface="Calibri" pitchFamily="34" charset="0"/>
-                <a:ea typeface="Calibri" pitchFamily="34" charset="-122"/>
-                <a:cs typeface="Calibri" pitchFamily="34" charset="-120"/>
-              </a:rPr>
-              <a:t>la mail arriva; senza lo statement di CloudWatch, no</a:t>
-            </a:r>
-            <a:endParaRPr lang="en-US" sz="1700" dirty="0"/>
-          </a:p>
-        </p:txBody>
-      </p:sp>
-      <p:sp>
-        <p:nvSpPr>
-          <p:cNvPr id="20" name="Shape 17"/>
-          <p:cNvSpPr/>
-          <p:nvPr/>
-        </p:nvSpPr>
-        <p:spPr>
-          <a:xfrm>
-            <a:off x="548640" y="5440680"/>
-            <a:ext cx="594360" cy="594360"/>
-          </a:xfrm>
-          <a:prstGeom prst="ellipse">
-            <a:avLst/>
-          </a:prstGeom>
-          <a:solidFill>
-            <a:srgbClr val="5B3FD0"/>
-          </a:solidFill>
-          <a:ln w="12700">
-            <a:solidFill>
-              <a:srgbClr val="5B3FD0"/>
-            </a:solidFill>
-            <a:prstDash val="solid"/>
-          </a:ln>
-        </p:spPr>
-      </p:sp>
-      <p:sp>
-        <p:nvSpPr>
-          <p:cNvPr id="21" name="Text 18"/>
-          <p:cNvSpPr txBox="1"/>
-          <p:nvPr/>
-        </p:nvSpPr>
-        <p:spPr>
-          <a:xfrm>
-            <a:off x="548640" y="5440680"/>
-            <a:ext cx="594360" cy="594360"/>
-          </a:xfrm>
-          <a:prstGeom prst="rect">
-            <a:avLst/>
-          </a:prstGeom>
-          <a:noFill/>
-          <a:ln/>
-        </p:spPr>
-        <p:txBody>
-          <a:bodyPr wrap="square" lIns="0" tIns="0" rIns="0" bIns="0" rtlCol="0" anchor="ctr"/>
-          <a:lstStyle/>
-          <a:p>
-            <a:pPr algn="ctr" indent="0" marL="0">
-              <a:buNone/>
-            </a:pPr>
-            <a:r>
-              <a:rPr lang="en-US" sz="1800" b="1" dirty="0">
-                <a:solidFill>
-                  <a:srgbClr val="FFFFFF"/>
-                </a:solidFill>
-                <a:latin typeface="Calibri" pitchFamily="34" charset="0"/>
-                <a:ea typeface="Calibri" pitchFamily="34" charset="-122"/>
-                <a:cs typeface="Calibri" pitchFamily="34" charset="-120"/>
-              </a:rPr>
-              <a:t>6</a:t>
-            </a:r>
-            <a:endParaRPr lang="en-US" sz="1800" dirty="0"/>
-          </a:p>
-        </p:txBody>
-      </p:sp>
-      <p:sp>
-        <p:nvSpPr>
-          <p:cNvPr id="22" name="Text 19"/>
-          <p:cNvSpPr txBox="1"/>
-          <p:nvPr/>
-        </p:nvSpPr>
-        <p:spPr>
-          <a:xfrm>
-            <a:off x="1325880" y="5303520"/>
-            <a:ext cx="10225735" cy="868680"/>
-          </a:xfrm>
-          <a:prstGeom prst="rect">
-            <a:avLst/>
-          </a:prstGeom>
-          <a:noFill/>
-          <a:ln/>
-        </p:spPr>
-        <p:txBody>
-          <a:bodyPr wrap="square" lIns="0" tIns="0" rIns="0" bIns="0" rtlCol="0" anchor="ctr"/>
-          <a:lstStyle/>
-          <a:p>
-            <a:pPr indent="0" marL="0">
-              <a:buNone/>
-            </a:pPr>
-            <a:r>
-              <a:rPr lang="en-US" sz="1700" b="1" dirty="0">
-                <a:solidFill>
-                  <a:srgbClr val="22253A"/>
-                </a:solidFill>
-                <a:latin typeface="Calibri" pitchFamily="34" charset="0"/>
-                <a:ea typeface="Calibri" pitchFamily="34" charset="-122"/>
-                <a:cs typeface="Calibri" pitchFamily="34" charset="-120"/>
-              </a:rPr>
-              <a:t>Il tuo utente nel database</a:t>
-            </a:r>
-            <a:endParaRPr lang="en-US" sz="1700" dirty="0"/>
-          </a:p>
-          <a:p>
-            <a:pPr indent="0" marL="0">
-              <a:buNone/>
-            </a:pPr>
-            <a:r>
-              <a:rPr lang="en-US" sz="1400" dirty="0">
-                <a:solidFill>
-                  <a:srgbClr val="5F6478"/>
-                </a:solidFill>
-                <a:latin typeface="Calibri" pitchFamily="34" charset="0"/>
-                <a:ea typeface="Calibri" pitchFamily="34" charset="-122"/>
-                <a:cs typeface="Calibri" pitchFamily="34" charset="-120"/>
-              </a:rPr>
-              <a:t>CREATE USER mario · token · select current_user → mario</a:t>
-            </a:r>
-            <a:endParaRPr lang="en-US" sz="1700" dirty="0"/>
-          </a:p>
-        </p:txBody>
-      </p:sp>
-      <p:sp>
-        <p:nvSpPr>
-          <p:cNvPr id="25" name="Slide Number Placeholder 0"/>
-          <p:cNvSpPr>
-            <a:spLocks noGrp="1"/>
-          </p:cNvSpPr>
-          <p:nvPr>
-            <p:ph type="sldNum" sz="quarter" idx="4294967295"/>
-          </p:nvPr>
-        </p:nvSpPr>
-        <p:spPr>
-          <a:xfrm>
-            <a:off x="11155680" y="6400800"/>
-            <a:ext cx="548640" cy="274320"/>
-          </a:xfrm>
-          <a:prstGeom prst="rect">
-            <a:avLst/>
-          </a:prstGeom>
-          <a:extLst>
-            <a:ext uri="{C572A759-6A51-4108-AA02-DFA0A04FC94B}">
-              <ma14:wrappingTextBoxFlag xmlns:ma14="http://schemas.microsoft.com/office/mac/drawingml/2011/main" val="0"/>
-            </a:ext>
-          </a:extLst>
-        </p:spPr>
-        <p:txBody>
-          <a:bodyPr/>
-          <a:lstStyle>
-            <a:lvl1pPr>
-              <a:defRPr sz="1000">
-                <a:solidFill>
-                  <a:srgbClr val="5F6478"/>
-                </a:solidFill>
-                <a:latin typeface="Calibri"/>
-                <a:ea typeface="Calibri"/>
-                <a:cs typeface="Calibri"/>
-              </a:defRPr>
-            </a:lvl1pPr>
-          </a:lstStyle>
-          <a:p>
-            <a:pPr algn="r"/>
-            <a:fld id="{F7021451-1387-4CA6-816F-3879F97B5CBC}" type="slidenum">
-              <a:rPr b="0" lang="en-US"/>
-              <a:t>10</a:t>
-            </a:fld>
-            <a:endParaRPr lang="en-US"/>
-          </a:p>
-        </p:txBody>
-      </p:sp>
-    </p:spTree>
-  </p:cSld>
-  <p:clrMapOvr>
-    <a:masterClrMapping/>
-  </p:clrMapOvr>
-</p:sld>
-</file>
-
-<file path=ppt/slides/slide11.xml><?xml version="1.0" encoding="utf-8"?>
-<p:sld xmlns:a="http://schemas.openxmlformats.org/drawingml/2006/main" xmlns:r="http://schemas.openxmlformats.org/officeDocument/2006/relationships" xmlns:p="http://schemas.openxmlformats.org/presentationml/2006/main">
-  <p:cSld name="Slide 11">
-    <p:bg>
-      <p:bgPr>
-        <a:solidFill>
-          <a:srgbClr val="1B1F3B"/>
-        </a:solidFill>
-      </p:bgPr>
-    </p:bg>
-    <p:spTree>
-      <p:nvGrpSpPr>
-        <p:cNvPr id="1" name=""/>
-        <p:cNvGrpSpPr/>
-        <p:nvPr/>
-      </p:nvGrpSpPr>
-      <p:grpSpPr>
-        <a:xfrm>
-          <a:off x="0" y="0"/>
-          <a:ext cx="0" cy="0"/>
-          <a:chOff x="0" y="0"/>
-          <a:chExt cx="0" cy="0"/>
-        </a:xfrm>
-      </p:grpSpPr>
-      <p:sp>
-        <p:nvSpPr>
-          <p:cNvPr id="2" name="Text 0"/>
-          <p:cNvSpPr txBox="1"/>
-          <p:nvPr/>
-        </p:nvSpPr>
-        <p:spPr>
-          <a:xfrm>
-            <a:off x="548640" y="457200"/>
-            <a:ext cx="10972800" cy="822960"/>
-          </a:xfrm>
-          <a:prstGeom prst="rect">
-            <a:avLst/>
-          </a:prstGeom>
-          <a:noFill/>
-          <a:ln/>
-        </p:spPr>
-        <p:txBody>
-          <a:bodyPr wrap="square" lIns="0" tIns="0" rIns="0" bIns="0" rtlCol="0" anchor="ctr"/>
-          <a:lstStyle/>
-          <a:p>
-            <a:pPr indent="0" marL="0">
-              <a:buNone/>
-            </a:pPr>
-            <a:r>
-              <a:rPr lang="en-US" sz="3600" b="1" dirty="0">
-                <a:solidFill>
-                  <a:srgbClr val="FFFFFF"/>
-                </a:solidFill>
-                <a:latin typeface="Calibri" pitchFamily="34" charset="0"/>
-                <a:ea typeface="Calibri" pitchFamily="34" charset="-122"/>
-                <a:cs typeface="Calibri" pitchFamily="34" charset="-120"/>
-              </a:rPr>
-              <a:t>Riepilogo</a:t>
-            </a:r>
-            <a:endParaRPr lang="en-US" sz="3600" dirty="0"/>
-          </a:p>
-        </p:txBody>
-      </p:sp>
-      <p:sp>
-        <p:nvSpPr>
-          <p:cNvPr id="3" name="Text 1"/>
-          <p:cNvSpPr txBox="1"/>
-          <p:nvPr/>
-        </p:nvSpPr>
-        <p:spPr>
-          <a:xfrm>
-            <a:off x="548640" y="1463040"/>
-            <a:ext cx="6949440" cy="4206240"/>
-          </a:xfrm>
-          <a:prstGeom prst="rect">
-            <a:avLst/>
-          </a:prstGeom>
-          <a:noFill/>
-          <a:ln/>
-        </p:spPr>
-        <p:txBody>
-          <a:bodyPr wrap="square" lIns="0" tIns="0" rIns="0" bIns="0" rtlCol="0" anchor="t"/>
-          <a:lstStyle/>
-          <a:p>
-            <a:pPr marL="342900" indent="-342900">
-              <a:spcAft>
-                <a:spcPts val="1000"/>
-              </a:spcAft>
-              <a:buSzPct val="100000"/>
-              <a:buChar char="•"/>
-            </a:pPr>
-            <a:r>
-              <a:rPr lang="en-US" sz="1800" dirty="0">
-                <a:solidFill>
-                  <a:srgbClr val="E4E5F2"/>
-                </a:solidFill>
-                <a:latin typeface="Calibri" pitchFamily="34" charset="0"/>
-                <a:ea typeface="Calibri" pitchFamily="34" charset="-122"/>
-                <a:cs typeface="Calibri" pitchFamily="34" charset="-120"/>
-              </a:rPr>
-              <a:t>Condition key: "solo se…"; con le etichette, ABAC</a:t>
-            </a:r>
-            <a:endParaRPr lang="en-US" sz="1800" dirty="0"/>
-          </a:p>
-          <a:p>
-            <a:pPr marL="342900" indent="-342900">
-              <a:spcAft>
-                <a:spcPts val="1000"/>
-              </a:spcAft>
-              <a:buSzPct val="100000"/>
-              <a:buChar char="•"/>
-            </a:pPr>
-            <a:r>
-              <a:rPr lang="en-US" sz="1800" dirty="0">
-                <a:solidFill>
-                  <a:srgbClr val="E4E5F2"/>
-                </a:solidFill>
-                <a:latin typeface="Calibri" pitchFamily="34" charset="0"/>
-                <a:ea typeface="Calibri" pitchFamily="34" charset="-122"/>
-                <a:cs typeface="Calibri" pitchFamily="34" charset="-120"/>
-              </a:rPr>
-              <a:t>Boundary e SCP: tetti che tolgono, anche all'amministratore</a:t>
-            </a:r>
-            <a:endParaRPr lang="en-US" sz="1800" dirty="0"/>
-          </a:p>
-          <a:p>
-            <a:pPr marL="342900" indent="-342900">
-              <a:spcAft>
-                <a:spcPts val="1000"/>
-              </a:spcAft>
-              <a:buSzPct val="100000"/>
-              <a:buChar char="•"/>
-            </a:pPr>
-            <a:r>
-              <a:rPr lang="en-US" sz="1800" dirty="0">
-                <a:solidFill>
-                  <a:srgbClr val="E4E5F2"/>
-                </a:solidFill>
-                <a:latin typeface="Calibri" pitchFamily="34" charset="0"/>
-                <a:ea typeface="Calibri" pitchFamily="34" charset="-122"/>
-                <a:cs typeface="Calibri" pitchFamily="34" charset="-120"/>
-              </a:rPr>
-              <a:t>AccessDenied: messaggio, decodifica, CloudTrail, simulatore</a:t>
-            </a:r>
-            <a:endParaRPr lang="en-US" sz="1800" dirty="0"/>
-          </a:p>
-          <a:p>
-            <a:pPr marL="342900" indent="-342900">
-              <a:spcAft>
-                <a:spcPts val="1000"/>
-              </a:spcAft>
-              <a:buSzPct val="100000"/>
-              <a:buChar char="•"/>
-            </a:pPr>
-            <a:r>
-              <a:rPr lang="en-US" sz="1800" dirty="0">
-                <a:solidFill>
-                  <a:srgbClr val="E4E5F2"/>
-                </a:solidFill>
-                <a:latin typeface="Calibri" pitchFamily="34" charset="0"/>
-                <a:ea typeface="Calibri" pitchFamily="34" charset="-122"/>
-                <a:cs typeface="Calibri" pitchFamily="34" charset="-120"/>
-              </a:rPr>
-              <a:t>Un trail: tutto, tutte le regioni, firme, data event mirati</a:t>
-            </a:r>
-            <a:endParaRPr lang="en-US" sz="1800" dirty="0"/>
-          </a:p>
-          <a:p>
-            <a:pPr marL="342900" indent="-342900">
-              <a:spcAft>
-                <a:spcPts val="1000"/>
-              </a:spcAft>
-              <a:buSzPct val="100000"/>
-              <a:buChar char="•"/>
-            </a:pPr>
-            <a:r>
-              <a:rPr lang="en-US" sz="1800" dirty="0">
-                <a:solidFill>
-                  <a:srgbClr val="E4E5F2"/>
-                </a:solidFill>
-                <a:latin typeface="Calibri" pitchFamily="34" charset="0"/>
-                <a:ea typeface="Calibri" pitchFamily="34" charset="-122"/>
-                <a:cs typeface="Calibri" pitchFamily="34" charset="-120"/>
-              </a:rPr>
-              <a:t>Chiave KMS tua: key policy da root, poi i servizi</a:t>
-            </a:r>
-            <a:endParaRPr lang="en-US" sz="1800" dirty="0"/>
-          </a:p>
-          <a:p>
-            <a:pPr marL="342900" indent="-342900">
-              <a:spcAft>
-                <a:spcPts val="1000"/>
-              </a:spcAft>
-              <a:buSzPct val="100000"/>
-              <a:buChar char="•"/>
-            </a:pPr>
-            <a:r>
-              <a:rPr lang="en-US" sz="1800" dirty="0">
-                <a:solidFill>
-                  <a:srgbClr val="E4E5F2"/>
-                </a:solidFill>
-                <a:latin typeface="Calibri" pitchFamily="34" charset="0"/>
-                <a:ea typeface="Calibri" pitchFamily="34" charset="-122"/>
-                <a:cs typeface="Calibri" pitchFamily="34" charset="-120"/>
-              </a:rPr>
-              <a:t>Database con IAM: ogni persona col suo nome, token di 15 minuti</a:t>
-            </a:r>
-            <a:endParaRPr lang="en-US" sz="1800" dirty="0"/>
-          </a:p>
-        </p:txBody>
-      </p:sp>
-      <p:sp>
-        <p:nvSpPr>
-          <p:cNvPr id="4" name="Shape 2"/>
-          <p:cNvSpPr/>
-          <p:nvPr/>
-        </p:nvSpPr>
-        <p:spPr>
-          <a:xfrm>
-            <a:off x="7955280" y="1463040"/>
-            <a:ext cx="3685032" cy="2103120"/>
-          </a:xfrm>
-          <a:prstGeom prst="roundRect">
-            <a:avLst>
-              <a:gd name="adj" fmla="val 5217"/>
-            </a:avLst>
-          </a:prstGeom>
-          <a:solidFill>
-            <a:srgbClr val="2A2F55"/>
-          </a:solidFill>
-          <a:ln w="12700">
-            <a:solidFill>
-              <a:srgbClr val="2A2F55"/>
-            </a:solidFill>
-            <a:prstDash val="solid"/>
-          </a:ln>
-        </p:spPr>
-      </p:sp>
-      <p:sp>
-        <p:nvSpPr>
-          <p:cNvPr id="5" name="Text 3"/>
-          <p:cNvSpPr txBox="1"/>
-          <p:nvPr/>
-        </p:nvSpPr>
-        <p:spPr>
-          <a:xfrm>
-            <a:off x="8183880" y="1645920"/>
-            <a:ext cx="3291840" cy="1737360"/>
-          </a:xfrm>
-          <a:prstGeom prst="rect">
-            <a:avLst/>
-          </a:prstGeom>
-          <a:noFill/>
-          <a:ln/>
-        </p:spPr>
-        <p:txBody>
-          <a:bodyPr wrap="square" lIns="0" tIns="0" rIns="0" bIns="0" rtlCol="0" anchor="t"/>
-          <a:lstStyle/>
-          <a:p>
-            <a:pPr indent="0" marL="0">
-              <a:buNone/>
-            </a:pPr>
-            <a:r>
-              <a:rPr lang="en-US" sz="1600" b="1" dirty="0">
-                <a:solidFill>
-                  <a:srgbClr val="F28C28"/>
-                </a:solidFill>
-                <a:latin typeface="Calibri" pitchFamily="34" charset="0"/>
-                <a:ea typeface="Calibri" pitchFamily="34" charset="-122"/>
-                <a:cs typeface="Calibri" pitchFamily="34" charset="-120"/>
-              </a:rPr>
-              <a:t>Materiale di studio</a:t>
-            </a:r>
-            <a:endParaRPr lang="en-US" sz="1600" dirty="0"/>
-          </a:p>
-          <a:p>
-            <a:pPr indent="0" marL="0">
-              <a:buNone/>
-            </a:pPr>
-            <a:r>
-              <a:rPr lang="en-US" sz="1400" dirty="0">
-                <a:solidFill>
-                  <a:srgbClr val="FFFFFF"/>
-                </a:solidFill>
-                <a:latin typeface="Courier New" pitchFamily="34" charset="0"/>
-                <a:ea typeface="Courier New" pitchFamily="34" charset="-122"/>
-                <a:cs typeface="Courier New" pitchFamily="34" charset="-120"/>
-              </a:rPr>
-              <a:t>dispense/appendice-a-iam-audit.md</a:t>
-            </a:r>
-            <a:endParaRPr lang="en-US" sz="1600" dirty="0"/>
-          </a:p>
-        </p:txBody>
-      </p:sp>
-      <p:sp>
-        <p:nvSpPr>
-          <p:cNvPr id="6" name="Shape 4"/>
-          <p:cNvSpPr/>
-          <p:nvPr/>
-        </p:nvSpPr>
-        <p:spPr>
-          <a:xfrm>
-            <a:off x="7955280" y="3840480"/>
-            <a:ext cx="3685032" cy="1463040"/>
-          </a:xfrm>
-          <a:prstGeom prst="roundRect">
-            <a:avLst>
-              <a:gd name="adj" fmla="val 7500"/>
-            </a:avLst>
-          </a:prstGeom>
-          <a:solidFill>
-            <a:srgbClr val="5B3FD0"/>
-          </a:solidFill>
-          <a:ln w="12700">
-            <a:solidFill>
-              <a:srgbClr val="5B3FD0"/>
-            </a:solidFill>
-            <a:prstDash val="solid"/>
-          </a:ln>
-        </p:spPr>
-      </p:sp>
-      <p:sp>
-        <p:nvSpPr>
-          <p:cNvPr id="7" name="Text 5"/>
-          <p:cNvSpPr txBox="1"/>
-          <p:nvPr/>
-        </p:nvSpPr>
-        <p:spPr>
-          <a:xfrm>
-            <a:off x="8183880" y="4023360"/>
-            <a:ext cx="3291840" cy="1097280"/>
-          </a:xfrm>
-          <a:prstGeom prst="rect">
-            <a:avLst/>
-          </a:prstGeom>
-          <a:noFill/>
-          <a:ln/>
-        </p:spPr>
-        <p:txBody>
-          <a:bodyPr wrap="square" lIns="0" tIns="0" rIns="0" bIns="0" rtlCol="0" anchor="t"/>
-          <a:lstStyle/>
-          <a:p>
-            <a:pPr indent="0" marL="0">
-              <a:buNone/>
-            </a:pPr>
-            <a:r>
-              <a:rPr lang="en-US" sz="1400" b="1" dirty="0">
-                <a:solidFill>
-                  <a:srgbClr val="D9D2FF"/>
-                </a:solidFill>
-                <a:latin typeface="Calibri" pitchFamily="34" charset="0"/>
-                <a:ea typeface="Calibri" pitchFamily="34" charset="-122"/>
-                <a:cs typeface="Calibri" pitchFamily="34" charset="-120"/>
-              </a:rPr>
-              <a:t>Prossima lezione</a:t>
-            </a:r>
-            <a:endParaRPr lang="en-US" sz="1400" dirty="0"/>
-          </a:p>
-          <a:p>
-            <a:pPr indent="0" marL="0">
-              <a:buNone/>
-            </a:pPr>
-            <a:r>
-              <a:rPr lang="en-US" sz="1800" b="1" dirty="0">
-                <a:solidFill>
-                  <a:srgbClr val="FFFFFF"/>
-                </a:solidFill>
-                <a:latin typeface="Calibri" pitchFamily="34" charset="0"/>
-                <a:ea typeface="Calibri" pitchFamily="34" charset="-122"/>
-                <a:cs typeface="Calibri" pitchFamily="34" charset="-120"/>
-              </a:rPr>
-              <a:t>Fine del corso: buon lavoro!</a:t>
-            </a:r>
-            <a:endParaRPr lang="en-US" sz="1400" dirty="0"/>
           </a:p>
         </p:txBody>
       </p:sp>
@@ -6372,7 +4931,7 @@
                 <a:ea typeface="Calibri" pitchFamily="34" charset="-122"/>
                 <a:cs typeface="Calibri" pitchFamily="34" charset="-120"/>
               </a:rPr>
-              <a:t>Capire un AccessDenied in quattro passi</a:t>
+              <a:t>Una chiave KMS tua</a:t>
             </a:r>
             <a:endParaRPr lang="en-US" sz="3200" dirty="0"/>
           </a:p>
@@ -6425,8 +4984,35 @@
         </p:nvSpPr>
         <p:spPr>
           <a:xfrm>
-            <a:off x="548640" y="1508760"/>
-            <a:ext cx="594360" cy="594360"/>
+            <a:off x="548640" y="1371600"/>
+            <a:ext cx="5440680" cy="2377440"/>
+          </a:xfrm>
+          <a:prstGeom prst="roundRect">
+            <a:avLst>
+              <a:gd name="adj" fmla="val 4615"/>
+            </a:avLst>
+          </a:prstGeom>
+          <a:solidFill>
+            <a:srgbClr val="EEEAFB"/>
+          </a:solidFill>
+          <a:ln w="12700">
+            <a:solidFill>
+              <a:srgbClr val="EEEAFB"/>
+            </a:solidFill>
+            <a:prstDash val="solid"/>
+          </a:ln>
+        </p:spPr>
+      </p:sp>
+      <p:sp>
+        <p:nvSpPr>
+          <p:cNvPr id="6" name="Shape 3"/>
+          <p:cNvSpPr/>
+          <p:nvPr/>
+        </p:nvSpPr>
+        <p:spPr>
+          <a:xfrm>
+            <a:off x="777240" y="1600200"/>
+            <a:ext cx="548640" cy="548640"/>
           </a:xfrm>
           <a:prstGeom prst="ellipse">
             <a:avLst/>
@@ -6442,16 +5028,40 @@
           </a:ln>
         </p:spPr>
       </p:sp>
-      <p:sp>
-        <p:nvSpPr>
-          <p:cNvPr id="6" name="Text 3"/>
+      <p:pic>
+        <p:nvPicPr>
+          <p:cNvPr id="7" name="Image 0" descr="preencoded.png">    </p:cNvPr>
+          <p:cNvPicPr>
+            <a:picLocks noChangeAspect="1"/>
+          </p:cNvPicPr>
+          <p:nvPr/>
+        </p:nvPicPr>
+        <p:blipFill>
+          <a:blip r:embed="rId1"/>
+          <a:stretch>
+            <a:fillRect/>
+          </a:stretch>
+        </p:blipFill>
+        <p:spPr>
+          <a:xfrm>
+            <a:off x="914400" y="1737360"/>
+            <a:ext cx="274320" cy="274320"/>
+          </a:xfrm>
+          <a:prstGeom prst="rect">
+            <a:avLst/>
+          </a:prstGeom>
+        </p:spPr>
+      </p:pic>
+      <p:sp>
+        <p:nvSpPr>
+          <p:cNvPr id="8" name="Text 4"/>
           <p:cNvSpPr txBox="1"/>
           <p:nvPr/>
         </p:nvSpPr>
         <p:spPr>
           <a:xfrm>
-            <a:off x="548640" y="1508760"/>
-            <a:ext cx="594360" cy="594360"/>
+            <a:off x="1508760" y="1600200"/>
+            <a:ext cx="4251960" cy="548640"/>
           </a:xfrm>
           <a:prstGeom prst="rect">
             <a:avLst/>
@@ -6463,19 +5073,19 @@
           <a:bodyPr wrap="square" lIns="0" tIns="0" rIns="0" bIns="0" rtlCol="0" anchor="ctr"/>
           <a:lstStyle/>
           <a:p>
-            <a:pPr algn="ctr" indent="0" marL="0">
+            <a:pPr indent="0" marL="0">
               <a:buNone/>
             </a:pPr>
             <a:r>
               <a:rPr lang="en-US" sz="1800" b="1" dirty="0">
                 <a:solidFill>
-                  <a:srgbClr val="FFFFFF"/>
+                  <a:srgbClr val="22253A"/>
                 </a:solidFill>
                 <a:latin typeface="Calibri" pitchFamily="34" charset="0"/>
                 <a:ea typeface="Calibri" pitchFamily="34" charset="-122"/>
                 <a:cs typeface="Calibri" pitchFamily="34" charset="-120"/>
               </a:rPr>
-              <a:t>1</a:t>
+              <a:t>Quando serve</a:t>
             </a:r>
             <a:endParaRPr lang="en-US" sz="1800" dirty="0"/>
           </a:p>
@@ -6483,14 +5093,14 @@
       </p:sp>
       <p:sp>
         <p:nvSpPr>
-          <p:cNvPr id="7" name="Text 4"/>
+          <p:cNvPr id="9" name="Text 5"/>
           <p:cNvSpPr txBox="1"/>
           <p:nvPr/>
         </p:nvSpPr>
         <p:spPr>
           <a:xfrm>
-            <a:off x="1325880" y="1371600"/>
-            <a:ext cx="10225735" cy="868680"/>
+            <a:off x="777240" y="2286000"/>
+            <a:ext cx="4983480" cy="1280160"/>
           </a:xfrm>
           <a:prstGeom prst="rect">
             <a:avLst/>
@@ -6499,14 +5109,18 @@
           <a:ln/>
         </p:spPr>
         <p:txBody>
-          <a:bodyPr wrap="square" lIns="0" tIns="0" rIns="0" bIns="0" rtlCol="0" anchor="ctr"/>
+          <a:bodyPr wrap="square" lIns="0" tIns="0" rIns="0" bIns="0" rtlCol="0" anchor="t"/>
           <a:lstStyle/>
           <a:p>
-            <a:pPr indent="0" marL="0">
-              <a:buNone/>
-            </a:pPr>
-            <a:r>
-              <a:rPr lang="en-US" sz="1700" b="1" dirty="0">
+            <a:pPr marL="342900" indent="-342900">
+              <a:spcAft>
+                <a:spcPts val="600"/>
+              </a:spcAft>
+              <a:buSzPct val="100000"/>
+              <a:buChar char="•"/>
+            </a:pPr>
+            <a:r>
+              <a:rPr lang="en-US" sz="1500" dirty="0">
                 <a:solidFill>
                   <a:srgbClr val="22253A"/>
                 </a:solidFill>
@@ -6514,49 +5128,76 @@
                 <a:ea typeface="Calibri" pitchFamily="34" charset="-122"/>
                 <a:cs typeface="Calibri" pitchFamily="34" charset="-120"/>
               </a:rPr>
-              <a:t>Leggi tutto il messaggio</a:t>
-            </a:r>
-            <a:endParaRPr lang="en-US" sz="1700" dirty="0"/>
-          </a:p>
-          <a:p>
-            <a:pPr indent="0" marL="0">
-              <a:buNone/>
-            </a:pPr>
-            <a:r>
-              <a:rPr lang="en-US" sz="1400" dirty="0">
-                <a:solidFill>
-                  <a:srgbClr val="5F6478"/>
+              <a:t>decidere chi la usa (key policy)</a:t>
+            </a:r>
+            <a:endParaRPr lang="en-US" sz="1500" dirty="0"/>
+          </a:p>
+          <a:p>
+            <a:pPr marL="342900" indent="-342900">
+              <a:spcAft>
+                <a:spcPts val="600"/>
+              </a:spcAft>
+              <a:buSzPct val="100000"/>
+              <a:buChar char="•"/>
+            </a:pPr>
+            <a:r>
+              <a:rPr lang="en-US" sz="1500" dirty="0">
+                <a:solidFill>
+                  <a:srgbClr val="22253A"/>
                 </a:solidFill>
                 <a:latin typeface="Calibri" pitchFamily="34" charset="0"/>
                 <a:ea typeface="Calibri" pitchFamily="34" charset="-122"/>
                 <a:cs typeface="Calibri" pitchFamily="34" charset="-120"/>
               </a:rPr>
-              <a:t>"no identity-based policy allows" · "explicit deny" · "service control policy" · "permissions boundary"</a:t>
-            </a:r>
-            <a:endParaRPr lang="en-US" sz="1700" dirty="0"/>
-          </a:p>
-        </p:txBody>
-      </p:sp>
-      <p:sp>
-        <p:nvSpPr>
-          <p:cNvPr id="8" name="Shape 5"/>
+              <a:t>condividere snapshot con un altro account</a:t>
+            </a:r>
+            <a:endParaRPr lang="en-US" sz="1500" dirty="0"/>
+          </a:p>
+          <a:p>
+            <a:pPr marL="342900" indent="-342900">
+              <a:spcAft>
+                <a:spcPts val="600"/>
+              </a:spcAft>
+              <a:buSzPct val="100000"/>
+              <a:buChar char="•"/>
+            </a:pPr>
+            <a:r>
+              <a:rPr lang="en-US" sz="1500" dirty="0">
+                <a:solidFill>
+                  <a:srgbClr val="22253A"/>
+                </a:solidFill>
+                <a:latin typeface="Calibri" pitchFamily="34" charset="0"/>
+                <a:ea typeface="Calibri" pitchFamily="34" charset="-122"/>
+                <a:cs typeface="Calibri" pitchFamily="34" charset="-120"/>
+              </a:rPr>
+              <a:t>SNS cifrato con gli allarmi (lezione 10)</a:t>
+            </a:r>
+            <a:endParaRPr lang="en-US" sz="1500" dirty="0"/>
+          </a:p>
+        </p:txBody>
+      </p:sp>
+      <p:sp>
+        <p:nvSpPr>
+          <p:cNvPr id="10" name="Shape 6"/>
           <p:cNvSpPr/>
           <p:nvPr/>
         </p:nvSpPr>
         <p:spPr>
           <a:xfrm>
-            <a:off x="548640" y="2560320"/>
-            <a:ext cx="594360" cy="594360"/>
-          </a:xfrm>
-          <a:prstGeom prst="ellipse">
-            <a:avLst/>
+            <a:off x="6172200" y="1371600"/>
+            <a:ext cx="5468112" cy="2377440"/>
+          </a:xfrm>
+          <a:prstGeom prst="roundRect">
+            <a:avLst>
+              <a:gd name="adj" fmla="val 4615"/>
+            </a:avLst>
           </a:prstGeom>
           <a:solidFill>
-            <a:srgbClr val="5B3FD0"/>
+            <a:srgbClr val="FDF0E3"/>
           </a:solidFill>
           <a:ln w="12700">
             <a:solidFill>
-              <a:srgbClr val="5B3FD0"/>
+              <a:srgbClr val="FDF0E3"/>
             </a:solidFill>
             <a:prstDash val="solid"/>
           </a:ln>
@@ -6564,14 +5205,63 @@
       </p:sp>
       <p:sp>
         <p:nvSpPr>
-          <p:cNvPr id="9" name="Text 6"/>
+          <p:cNvPr id="11" name="Shape 7"/>
+          <p:cNvSpPr/>
+          <p:nvPr/>
+        </p:nvSpPr>
+        <p:spPr>
+          <a:xfrm>
+            <a:off x="6400800" y="1600200"/>
+            <a:ext cx="548640" cy="548640"/>
+          </a:xfrm>
+          <a:prstGeom prst="ellipse">
+            <a:avLst/>
+          </a:prstGeom>
+          <a:solidFill>
+            <a:srgbClr val="F28C28"/>
+          </a:solidFill>
+          <a:ln w="12700">
+            <a:solidFill>
+              <a:srgbClr val="F28C28"/>
+            </a:solidFill>
+            <a:prstDash val="solid"/>
+          </a:ln>
+        </p:spPr>
+      </p:sp>
+      <p:pic>
+        <p:nvPicPr>
+          <p:cNvPr id="12" name="Image 1" descr="preencoded.png">    </p:cNvPr>
+          <p:cNvPicPr>
+            <a:picLocks noChangeAspect="1"/>
+          </p:cNvPicPr>
+          <p:nvPr/>
+        </p:nvPicPr>
+        <p:blipFill>
+          <a:blip r:embed="rId2"/>
+          <a:stretch>
+            <a:fillRect/>
+          </a:stretch>
+        </p:blipFill>
+        <p:spPr>
+          <a:xfrm>
+            <a:off x="6537960" y="1737360"/>
+            <a:ext cx="274320" cy="274320"/>
+          </a:xfrm>
+          <a:prstGeom prst="rect">
+            <a:avLst/>
+          </a:prstGeom>
+        </p:spPr>
+      </p:pic>
+      <p:sp>
+        <p:nvSpPr>
+          <p:cNvPr id="13" name="Text 8"/>
           <p:cNvSpPr txBox="1"/>
           <p:nvPr/>
         </p:nvSpPr>
         <p:spPr>
           <a:xfrm>
-            <a:off x="548640" y="2560320"/>
-            <a:ext cx="594360" cy="594360"/>
+            <a:off x="7132320" y="1600200"/>
+            <a:ext cx="4279392" cy="548640"/>
           </a:xfrm>
           <a:prstGeom prst="rect">
             <a:avLst/>
@@ -6583,19 +5273,19 @@
           <a:bodyPr wrap="square" lIns="0" tIns="0" rIns="0" bIns="0" rtlCol="0" anchor="ctr"/>
           <a:lstStyle/>
           <a:p>
-            <a:pPr algn="ctr" indent="0" marL="0">
+            <a:pPr indent="0" marL="0">
               <a:buNone/>
             </a:pPr>
             <a:r>
               <a:rPr lang="en-US" sz="1800" b="1" dirty="0">
                 <a:solidFill>
-                  <a:srgbClr val="FFFFFF"/>
+                  <a:srgbClr val="22253A"/>
                 </a:solidFill>
                 <a:latin typeface="Calibri" pitchFamily="34" charset="0"/>
                 <a:ea typeface="Calibri" pitchFamily="34" charset="-122"/>
                 <a:cs typeface="Calibri" pitchFamily="34" charset="-120"/>
               </a:rPr>
-              <a:t>2</a:t>
+              <a:t>La key policy, sempre così</a:t>
             </a:r>
             <a:endParaRPr lang="en-US" sz="1800" dirty="0"/>
           </a:p>
@@ -6603,14 +5293,14 @@
       </p:sp>
       <p:sp>
         <p:nvSpPr>
-          <p:cNvPr id="10" name="Text 7"/>
+          <p:cNvPr id="14" name="Text 9"/>
           <p:cNvSpPr txBox="1"/>
           <p:nvPr/>
         </p:nvSpPr>
         <p:spPr>
           <a:xfrm>
-            <a:off x="1325880" y="2423160"/>
-            <a:ext cx="10225735" cy="868680"/>
+            <a:off x="6400800" y="2286000"/>
+            <a:ext cx="5010912" cy="1280160"/>
           </a:xfrm>
           <a:prstGeom prst="rect">
             <a:avLst/>
@@ -6619,14 +5309,18 @@
           <a:ln/>
         </p:spPr>
         <p:txBody>
-          <a:bodyPr wrap="square" lIns="0" tIns="0" rIns="0" bIns="0" rtlCol="0" anchor="ctr"/>
+          <a:bodyPr wrap="square" lIns="0" tIns="0" rIns="0" bIns="0" rtlCol="0" anchor="t"/>
           <a:lstStyle/>
           <a:p>
-            <a:pPr indent="0" marL="0">
-              <a:buNone/>
-            </a:pPr>
-            <a:r>
-              <a:rPr lang="en-US" sz="1700" b="1" dirty="0">
+            <a:pPr marL="342900" indent="-342900">
+              <a:spcAft>
+                <a:spcPts val="600"/>
+              </a:spcAft>
+              <a:buSzPct val="100000"/>
+              <a:buChar char="•"/>
+            </a:pPr>
+            <a:r>
+              <a:rPr lang="en-US" sz="1500" dirty="0">
                 <a:solidFill>
                   <a:srgbClr val="22253A"/>
                 </a:solidFill>
@@ -6634,49 +5328,76 @@
                 <a:ea typeface="Calibri" pitchFamily="34" charset="-122"/>
                 <a:cs typeface="Calibri" pitchFamily="34" charset="-120"/>
               </a:rPr>
-              <a:t>Codificato? Decodificalo</a:t>
-            </a:r>
-            <a:endParaRPr lang="en-US" sz="1700" dirty="0"/>
-          </a:p>
-          <a:p>
-            <a:pPr indent="0" marL="0">
-              <a:buNone/>
-            </a:pPr>
-            <a:r>
-              <a:rPr lang="en-US" sz="1400" dirty="0">
-                <a:solidFill>
-                  <a:srgbClr val="5F6478"/>
+              <a:t>1. l'account (root) può tutto → decide IAM</a:t>
+            </a:r>
+            <a:endParaRPr lang="en-US" sz="1500" dirty="0"/>
+          </a:p>
+          <a:p>
+            <a:pPr marL="342900" indent="-342900">
+              <a:spcAft>
+                <a:spcPts val="600"/>
+              </a:spcAft>
+              <a:buSzPct val="100000"/>
+              <a:buChar char="•"/>
+            </a:pPr>
+            <a:r>
+              <a:rPr lang="en-US" sz="1500" dirty="0">
+                <a:solidFill>
+                  <a:srgbClr val="22253A"/>
                 </a:solidFill>
                 <a:latin typeface="Calibri" pitchFamily="34" charset="0"/>
                 <a:ea typeface="Calibri" pitchFamily="34" charset="-122"/>
                 <a:cs typeface="Calibri" pitchFamily="34" charset="-120"/>
               </a:rPr>
-              <a:t>aws sts decode-authorization-message --encoded-message "…"</a:t>
-            </a:r>
-            <a:endParaRPr lang="en-US" sz="1700" dirty="0"/>
-          </a:p>
-        </p:txBody>
-      </p:sp>
-      <p:sp>
-        <p:nvSpPr>
-          <p:cNvPr id="11" name="Shape 8"/>
+              <a:t>2. i servizi che la usano (CloudWatch, Auto Scaling)</a:t>
+            </a:r>
+            <a:endParaRPr lang="en-US" sz="1500" dirty="0"/>
+          </a:p>
+          <a:p>
+            <a:pPr marL="342900" indent="-342900">
+              <a:spcAft>
+                <a:spcPts val="600"/>
+              </a:spcAft>
+              <a:buSzPct val="100000"/>
+              <a:buChar char="•"/>
+            </a:pPr>
+            <a:r>
+              <a:rPr lang="en-US" sz="1500" dirty="0">
+                <a:solidFill>
+                  <a:srgbClr val="22253A"/>
+                </a:solidFill>
+                <a:latin typeface="Calibri" pitchFamily="34" charset="0"/>
+                <a:ea typeface="Calibri" pitchFamily="34" charset="-122"/>
+                <a:cs typeface="Calibri" pitchFamily="34" charset="-120"/>
+              </a:rPr>
+              <a:t>senza la 1, nemmeno l'admin la usa</a:t>
+            </a:r>
+            <a:endParaRPr lang="en-US" sz="1500" dirty="0"/>
+          </a:p>
+        </p:txBody>
+      </p:sp>
+      <p:sp>
+        <p:nvSpPr>
+          <p:cNvPr id="15" name="Shape 10"/>
           <p:cNvSpPr/>
           <p:nvPr/>
         </p:nvSpPr>
         <p:spPr>
           <a:xfrm>
-            <a:off x="548640" y="3611880"/>
-            <a:ext cx="594360" cy="594360"/>
-          </a:xfrm>
-          <a:prstGeom prst="ellipse">
-            <a:avLst/>
+            <a:off x="548640" y="3977640"/>
+            <a:ext cx="11094415" cy="1463040"/>
+          </a:xfrm>
+          <a:prstGeom prst="roundRect">
+            <a:avLst>
+              <a:gd name="adj" fmla="val 5000"/>
+            </a:avLst>
           </a:prstGeom>
           <a:solidFill>
-            <a:srgbClr val="5B3FD0"/>
+            <a:srgbClr val="1E1E2E"/>
           </a:solidFill>
           <a:ln w="12700">
             <a:solidFill>
-              <a:srgbClr val="5B3FD0"/>
+              <a:srgbClr val="1E1E2E"/>
             </a:solidFill>
             <a:prstDash val="solid"/>
           </a:ln>
@@ -6684,14 +5405,14 @@
       </p:sp>
       <p:sp>
         <p:nvSpPr>
-          <p:cNvPr id="12" name="Text 9"/>
+          <p:cNvPr id="16" name="Text 11"/>
           <p:cNvSpPr txBox="1"/>
           <p:nvPr/>
         </p:nvSpPr>
         <p:spPr>
           <a:xfrm>
-            <a:off x="548640" y="3611880"/>
-            <a:ext cx="594360" cy="594360"/>
+            <a:off x="731520" y="4050792"/>
+            <a:ext cx="10728655" cy="274320"/>
           </a:xfrm>
           <a:prstGeom prst="rect">
             <a:avLst/>
@@ -6700,37 +5421,37 @@
           <a:ln/>
         </p:spPr>
         <p:txBody>
-          <a:bodyPr wrap="square" lIns="0" tIns="0" rIns="0" bIns="0" rtlCol="0" anchor="ctr"/>
+          <a:bodyPr wrap="square" lIns="0" tIns="0" rIns="0" bIns="0" rtlCol="0" anchor="t"/>
           <a:lstStyle/>
           <a:p>
-            <a:pPr algn="ctr" indent="0" marL="0">
+            <a:pPr indent="0" marL="0">
               <a:buNone/>
             </a:pPr>
             <a:r>
-              <a:rPr lang="en-US" sz="1800" b="1" dirty="0">
-                <a:solidFill>
-                  <a:srgbClr val="FFFFFF"/>
+              <a:rPr lang="en-US" sz="1300" b="1" dirty="0">
+                <a:solidFill>
+                  <a:srgbClr val="F2B880"/>
                 </a:solidFill>
                 <a:latin typeface="Calibri" pitchFamily="34" charset="0"/>
                 <a:ea typeface="Calibri" pitchFamily="34" charset="-122"/>
                 <a:cs typeface="Calibri" pitchFamily="34" charset="-120"/>
               </a:rPr>
-              <a:t>3</a:t>
-            </a:r>
-            <a:endParaRPr lang="en-US" sz="1800" dirty="0"/>
-          </a:p>
-        </p:txBody>
-      </p:sp>
-      <p:sp>
-        <p:nvSpPr>
-          <p:cNvPr id="13" name="Text 10"/>
+              <a:t>monitoring.tf</a:t>
+            </a:r>
+            <a:endParaRPr lang="en-US" sz="1300" dirty="0"/>
+          </a:p>
+        </p:txBody>
+      </p:sp>
+      <p:sp>
+        <p:nvSpPr>
+          <p:cNvPr id="17" name="Text 12"/>
           <p:cNvSpPr txBox="1"/>
           <p:nvPr/>
         </p:nvSpPr>
         <p:spPr>
           <a:xfrm>
-            <a:off x="1325880" y="3474720"/>
-            <a:ext cx="10225735" cy="868680"/>
+            <a:off x="731520" y="4389120"/>
+            <a:ext cx="10728655" cy="914400"/>
           </a:xfrm>
           <a:prstGeom prst="rect">
             <a:avLst/>
@@ -6739,198 +5460,126 @@
           <a:ln/>
         </p:spPr>
         <p:txBody>
+          <a:bodyPr wrap="square" lIns="0" tIns="0" rIns="0" bIns="0" rtlCol="0" anchor="t"/>
+          <a:lstStyle/>
+          <a:p>
+            <a:pPr indent="0" marL="0">
+              <a:buNone/>
+            </a:pPr>
+            <a:r>
+              <a:rPr lang="en-US" sz="1600" dirty="0">
+                <a:solidFill>
+                  <a:srgbClr val="E6E6F0"/>
+                </a:solidFill>
+                <a:latin typeface="Courier New" pitchFamily="34" charset="0"/>
+                <a:ea typeface="Courier New" pitchFamily="34" charset="-122"/>
+                <a:cs typeface="Courier New" pitchFamily="34" charset="-120"/>
+              </a:rPr>
+              <a:t>resource "aws_sns_topic" "alerts" {</a:t>
+            </a:r>
+            <a:endParaRPr lang="en-US" sz="1600" dirty="0"/>
+          </a:p>
+          <a:p>
+            <a:pPr indent="0" marL="0">
+              <a:buNone/>
+            </a:pPr>
+            <a:r>
+              <a:rPr lang="en-US" sz="1600" dirty="0">
+                <a:solidFill>
+                  <a:srgbClr val="E6E6F0"/>
+                </a:solidFill>
+                <a:latin typeface="Courier New" pitchFamily="34" charset="0"/>
+                <a:ea typeface="Courier New" pitchFamily="34" charset="-122"/>
+                <a:cs typeface="Courier New" pitchFamily="34" charset="-120"/>
+              </a:rPr>
+              <a:t>  name              = "${var.project}-alerts"</a:t>
+            </a:r>
+            <a:endParaRPr lang="en-US" sz="1600" dirty="0"/>
+          </a:p>
+          <a:p>
+            <a:pPr indent="0" marL="0">
+              <a:buNone/>
+            </a:pPr>
+            <a:r>
+              <a:rPr lang="en-US" sz="1600" dirty="0">
+                <a:solidFill>
+                  <a:srgbClr val="E6E6F0"/>
+                </a:solidFill>
+                <a:latin typeface="Courier New" pitchFamily="34" charset="0"/>
+                <a:ea typeface="Courier New" pitchFamily="34" charset="-122"/>
+                <a:cs typeface="Courier New" pitchFamily="34" charset="-120"/>
+              </a:rPr>
+              <a:t>  kms_master_key_id = aws_kms_alias.alerts.name     </a:t>
+            </a:r>
+            <a:pPr indent="0" marL="0">
+              <a:buNone/>
+            </a:pPr>
+            <a:r>
+              <a:rPr lang="en-US" sz="1600" dirty="0">
+                <a:solidFill>
+                  <a:srgbClr val="8FD694"/>
+                </a:solidFill>
+                <a:latin typeface="Courier New" pitchFamily="34" charset="0"/>
+                <a:ea typeface="Courier New" pitchFamily="34" charset="-122"/>
+                <a:cs typeface="Courier New" pitchFamily="34" charset="-120"/>
+              </a:rPr>
+              <a:t># la chiave nostra</a:t>
+            </a:r>
+            <a:endParaRPr lang="en-US" sz="1600" dirty="0"/>
+          </a:p>
+          <a:p>
+            <a:pPr indent="0" marL="0">
+              <a:buNone/>
+            </a:pPr>
+            <a:r>
+              <a:rPr lang="en-US" sz="1600" dirty="0">
+                <a:solidFill>
+                  <a:srgbClr val="E6E6F0"/>
+                </a:solidFill>
+                <a:latin typeface="Courier New" pitchFamily="34" charset="0"/>
+                <a:ea typeface="Courier New" pitchFamily="34" charset="-122"/>
+                <a:cs typeface="Courier New" pitchFamily="34" charset="-120"/>
+              </a:rPr>
+              <a:t>}</a:t>
+            </a:r>
+            <a:endParaRPr lang="en-US" sz="1600" dirty="0"/>
+          </a:p>
+        </p:txBody>
+      </p:sp>
+      <p:sp>
+        <p:nvSpPr>
+          <p:cNvPr id="18" name="Text 13"/>
+          <p:cNvSpPr txBox="1"/>
+          <p:nvPr/>
+        </p:nvSpPr>
+        <p:spPr>
+          <a:xfrm>
+            <a:off x="548640" y="5577840"/>
+            <a:ext cx="11094415" cy="548640"/>
+          </a:xfrm>
+          <a:prstGeom prst="rect">
+            <a:avLst/>
+          </a:prstGeom>
+          <a:noFill/>
+          <a:ln/>
+        </p:spPr>
+        <p:txBody>
           <a:bodyPr wrap="square" lIns="0" tIns="0" rIns="0" bIns="0" rtlCol="0" anchor="ctr"/>
           <a:lstStyle/>
           <a:p>
-            <a:pPr indent="0" marL="0">
+            <a:pPr algn="l" indent="0" marL="0">
               <a:buNone/>
             </a:pPr>
             <a:r>
-              <a:rPr lang="en-US" sz="1700" b="1" dirty="0">
-                <a:solidFill>
-                  <a:srgbClr val="22253A"/>
+              <a:rPr lang="en-US" sz="1500" i="1" dirty="0">
+                <a:solidFill>
+                  <a:srgbClr val="5F6478"/>
                 </a:solidFill>
                 <a:latin typeface="Calibri" pitchFamily="34" charset="0"/>
                 <a:ea typeface="Calibri" pitchFamily="34" charset="-122"/>
                 <a:cs typeface="Calibri" pitchFamily="34" charset="-120"/>
               </a:rPr>
-              <a:t>Trovalo in CloudTrail</a:t>
-            </a:r>
-            <a:endParaRPr lang="en-US" sz="1700" dirty="0"/>
-          </a:p>
-          <a:p>
-            <a:pPr indent="0" marL="0">
-              <a:buNone/>
-            </a:pPr>
-            <a:r>
-              <a:rPr lang="en-US" sz="1400" dirty="0">
-                <a:solidFill>
-                  <a:srgbClr val="5F6478"/>
-                </a:solidFill>
-                <a:latin typeface="Calibri" pitchFamily="34" charset="0"/>
-                <a:ea typeface="Calibri" pitchFamily="34" charset="-122"/>
-                <a:cs typeface="Calibri" pitchFamily="34" charset="-120"/>
-              </a:rPr>
-              <a:t>Event history · errorCode: AccessDenied · chi, da dove, quando</a:t>
-            </a:r>
-            <a:endParaRPr lang="en-US" sz="1700" dirty="0"/>
-          </a:p>
-        </p:txBody>
-      </p:sp>
-      <p:sp>
-        <p:nvSpPr>
-          <p:cNvPr id="14" name="Shape 11"/>
-          <p:cNvSpPr/>
-          <p:nvPr/>
-        </p:nvSpPr>
-        <p:spPr>
-          <a:xfrm>
-            <a:off x="548640" y="4663440"/>
-            <a:ext cx="594360" cy="594360"/>
-          </a:xfrm>
-          <a:prstGeom prst="ellipse">
-            <a:avLst/>
-          </a:prstGeom>
-          <a:solidFill>
-            <a:srgbClr val="5B3FD0"/>
-          </a:solidFill>
-          <a:ln w="12700">
-            <a:solidFill>
-              <a:srgbClr val="5B3FD0"/>
-            </a:solidFill>
-            <a:prstDash val="solid"/>
-          </a:ln>
-        </p:spPr>
-      </p:sp>
-      <p:sp>
-        <p:nvSpPr>
-          <p:cNvPr id="15" name="Text 12"/>
-          <p:cNvSpPr txBox="1"/>
-          <p:nvPr/>
-        </p:nvSpPr>
-        <p:spPr>
-          <a:xfrm>
-            <a:off x="548640" y="4663440"/>
-            <a:ext cx="594360" cy="594360"/>
-          </a:xfrm>
-          <a:prstGeom prst="rect">
-            <a:avLst/>
-          </a:prstGeom>
-          <a:noFill/>
-          <a:ln/>
-        </p:spPr>
-        <p:txBody>
-          <a:bodyPr wrap="square" lIns="0" tIns="0" rIns="0" bIns="0" rtlCol="0" anchor="ctr"/>
-          <a:lstStyle/>
-          <a:p>
-            <a:pPr algn="ctr" indent="0" marL="0">
-              <a:buNone/>
-            </a:pPr>
-            <a:r>
-              <a:rPr lang="en-US" sz="1800" b="1" dirty="0">
-                <a:solidFill>
-                  <a:srgbClr val="FFFFFF"/>
-                </a:solidFill>
-                <a:latin typeface="Calibri" pitchFamily="34" charset="0"/>
-                <a:ea typeface="Calibri" pitchFamily="34" charset="-122"/>
-                <a:cs typeface="Calibri" pitchFamily="34" charset="-120"/>
-              </a:rPr>
-              <a:t>4</a:t>
-            </a:r>
-            <a:endParaRPr lang="en-US" sz="1800" dirty="0"/>
-          </a:p>
-        </p:txBody>
-      </p:sp>
-      <p:sp>
-        <p:nvSpPr>
-          <p:cNvPr id="16" name="Text 13"/>
-          <p:cNvSpPr txBox="1"/>
-          <p:nvPr/>
-        </p:nvSpPr>
-        <p:spPr>
-          <a:xfrm>
-            <a:off x="1325880" y="4526280"/>
-            <a:ext cx="10225735" cy="868680"/>
-          </a:xfrm>
-          <a:prstGeom prst="rect">
-            <a:avLst/>
-          </a:prstGeom>
-          <a:noFill/>
-          <a:ln/>
-        </p:spPr>
-        <p:txBody>
-          <a:bodyPr wrap="square" lIns="0" tIns="0" rIns="0" bIns="0" rtlCol="0" anchor="ctr"/>
-          <a:lstStyle/>
-          <a:p>
-            <a:pPr indent="0" marL="0">
-              <a:buNone/>
-            </a:pPr>
-            <a:r>
-              <a:rPr lang="en-US" sz="1700" b="1" dirty="0">
-                <a:solidFill>
-                  <a:srgbClr val="22253A"/>
-                </a:solidFill>
-                <a:latin typeface="Calibri" pitchFamily="34" charset="0"/>
-                <a:ea typeface="Calibri" pitchFamily="34" charset="-122"/>
-                <a:cs typeface="Calibri" pitchFamily="34" charset="-120"/>
-              </a:rPr>
-              <a:t>Prova la correzione</a:t>
-            </a:r>
-            <a:endParaRPr lang="en-US" sz="1700" dirty="0"/>
-          </a:p>
-          <a:p>
-            <a:pPr indent="0" marL="0">
-              <a:buNone/>
-            </a:pPr>
-            <a:r>
-              <a:rPr lang="en-US" sz="1400" dirty="0">
-                <a:solidFill>
-                  <a:srgbClr val="5F6478"/>
-                </a:solidFill>
-                <a:latin typeface="Calibri" pitchFamily="34" charset="0"/>
-                <a:ea typeface="Calibri" pitchFamily="34" charset="-122"/>
-                <a:cs typeface="Calibri" pitchFamily="34" charset="-120"/>
-              </a:rPr>
-              <a:t>IAM → Policy simulator: allowed o denied, e quale policy decide</a:t>
-            </a:r>
-            <a:endParaRPr lang="en-US" sz="1700" dirty="0"/>
-          </a:p>
-        </p:txBody>
-      </p:sp>
-      <p:sp>
-        <p:nvSpPr>
-          <p:cNvPr id="17" name="Text 14"/>
-          <p:cNvSpPr txBox="1"/>
-          <p:nvPr/>
-        </p:nvSpPr>
-        <p:spPr>
-          <a:xfrm>
-            <a:off x="548640" y="5715000"/>
-            <a:ext cx="11094415" cy="457200"/>
-          </a:xfrm>
-          <a:prstGeom prst="rect">
-            <a:avLst/>
-          </a:prstGeom>
-          <a:noFill/>
-          <a:ln/>
-        </p:spPr>
-        <p:txBody>
-          <a:bodyPr wrap="square" lIns="0" tIns="0" rIns="0" bIns="0" rtlCol="0" anchor="ctr"/>
-          <a:lstStyle/>
-          <a:p>
-            <a:pPr algn="l" indent="0" marL="0">
-              <a:buNone/>
-            </a:pPr>
-            <a:r>
-              <a:rPr lang="en-US" sz="1500" i="1" dirty="0">
-                <a:solidFill>
-                  <a:srgbClr val="5F6478"/>
-                </a:solidFill>
-                <a:latin typeface="Calibri" pitchFamily="34" charset="0"/>
-                <a:ea typeface="Calibri" pitchFamily="34" charset="-122"/>
-                <a:cs typeface="Calibri" pitchFamily="34" charset="-120"/>
-              </a:rPr>
-              <a:t>Event history: solo eventi di gestione, 90 giorni. Le letture dei file in S3 (data event) solo con un trail.</a:t>
+              <a:t>RDS: la chiave si sceglie alla creazione. Per cambiarla: snapshot → copia cifrata → database nuovo.</a:t>
             </a:r>
             <a:endParaRPr lang="en-US" sz="1500" dirty="0"/>
           </a:p>
@@ -7049,7 +5698,7 @@
                 <a:ea typeface="Calibri" pitchFamily="34" charset="-122"/>
                 <a:cs typeface="Calibri" pitchFamily="34" charset="-120"/>
               </a:rPr>
-              <a:t>CloudTrail per davvero: un trail</a:t>
+              <a:t>Nel database con IAM, senza password</a:t>
             </a:r>
             <a:endParaRPr lang="en-US" sz="3200" dirty="0"/>
           </a:p>
@@ -7094,1276 +5743,491 @@
           </a:p>
         </p:txBody>
       </p:sp>
-      <p:graphicFrame>
-        <p:nvGraphicFramePr>
-          <p:cNvPr id="7" name="Table 0"/>
-          <p:cNvGraphicFramePr>
-            <a:graphicFrameLocks noGrp="1"/>
-          </p:cNvGraphicFramePr>
-          <p:nvPr>
-            <p:extLst>
-              <p:ext uri="{D42A27DB-BD31-4B8C-83A1-F6EECF244321}">
-                <p14:modId xmlns:p14="http://schemas.microsoft.com/office/powerpoint/2010/main" val="1579011935"/>
-              </p:ext>
-            </p:extLst>
-          </p:nvPr>
-        </p:nvGraphicFramePr>
-        <p:xfrm>
-          <a:off x="548640" y="1325880"/>
-          <a:ext cx="11094415" cy="914400"/>
-        </p:xfrm>
-        <a:graphic>
-          <a:graphicData uri="http://schemas.openxmlformats.org/drawingml/2006/table">
-            <a:tbl>
-              <a:tblPr/>
-              <a:tblGrid>
-                <a:gridCol w="3657600"/>
-                <a:gridCol w="3474720"/>
-                <a:gridCol w="3959352"/>
-              </a:tblGrid>
-              <a:tr h="457200">
-                <a:tc>
-                  <a:txBody>
-                    <a:bodyPr/>
-                    <a:lstStyle/>
-                    <a:p>
-                      <a:pPr indent="0" marL="0">
-                        <a:buNone/>
-                      </a:pPr>
-                      <a:endParaRPr lang="en-US" sz="1600" dirty="0">
-                        <a:latin typeface="Calibri" charset="0"/>
-                        <a:ea typeface="Calibri" charset="0"/>
-                        <a:cs typeface="Calibri" charset="0"/>
-                      </a:endParaRPr>
-                    </a:p>
-                  </a:txBody>
-                  <a:tcPr marL="73152" marR="73152" marT="73152" marB="73152" anchor="ctr">
-                    <a:lnL w="9525" cap="flat" cmpd="sng" algn="ctr">
-                      <a:solidFill>
-                        <a:srgbClr val="D9D6EC"/>
-                      </a:solidFill>
-                      <a:prstDash val="solid"/>
-                      <a:round/>
-                      <a:headEnd type="none" w="med" len="med"/>
-                      <a:tailEnd type="none" w="med" len="med"/>
-                    </a:lnL>
-                    <a:lnR w="9525" cap="flat" cmpd="sng" algn="ctr">
-                      <a:solidFill>
-                        <a:srgbClr val="D9D6EC"/>
-                      </a:solidFill>
-                      <a:prstDash val="solid"/>
-                      <a:round/>
-                      <a:headEnd type="none" w="med" len="med"/>
-                      <a:tailEnd type="none" w="med" len="med"/>
-                    </a:lnR>
-                    <a:lnT w="9525" cap="flat" cmpd="sng" algn="ctr">
-                      <a:solidFill>
-                        <a:srgbClr val="D9D6EC"/>
-                      </a:solidFill>
-                      <a:prstDash val="solid"/>
-                      <a:round/>
-                      <a:headEnd type="none" w="med" len="med"/>
-                      <a:tailEnd type="none" w="med" len="med"/>
-                    </a:lnT>
-                    <a:lnB w="9525" cap="flat" cmpd="sng" algn="ctr">
-                      <a:solidFill>
-                        <a:srgbClr val="D9D6EC"/>
-                      </a:solidFill>
-                      <a:prstDash val="solid"/>
-                      <a:round/>
-                      <a:headEnd type="none" w="med" len="med"/>
-                      <a:tailEnd type="none" w="med" len="med"/>
-                    </a:lnB>
-                    <a:solidFill>
-                      <a:srgbClr val="5B3FD0"/>
-                    </a:solidFill>
-                  </a:tcPr>
-                </a:tc>
-                <a:tc>
-                  <a:txBody>
-                    <a:bodyPr/>
-                    <a:lstStyle/>
-                    <a:p>
-                      <a:pPr indent="0" marL="0">
-                        <a:buNone/>
-                      </a:pPr>
-                      <a:r>
-                        <a:rPr lang="en-US" sz="1600" b="1" dirty="0">
-                          <a:solidFill>
-                            <a:srgbClr val="FFFFFF"/>
-                          </a:solidFill>
-                          <a:latin typeface="Calibri" pitchFamily="34" charset="0"/>
-                          <a:ea typeface="Calibri" pitchFamily="34" charset="-122"/>
-                          <a:cs typeface="Calibri" pitchFamily="34" charset="-120"/>
-                        </a:rPr>
-                        <a:t>Event history</a:t>
-                      </a:r>
-                      <a:endParaRPr lang="en-US" sz="1600" dirty="0">
-                        <a:latin typeface="Calibri" charset="0"/>
-                        <a:ea typeface="Calibri" charset="0"/>
-                        <a:cs typeface="Calibri" charset="0"/>
-                      </a:endParaRPr>
-                    </a:p>
-                  </a:txBody>
-                  <a:tcPr marL="73152" marR="73152" marT="73152" marB="73152" anchor="ctr">
-                    <a:lnL w="9525" cap="flat" cmpd="sng" algn="ctr">
-                      <a:solidFill>
-                        <a:srgbClr val="D9D6EC"/>
-                      </a:solidFill>
-                      <a:prstDash val="solid"/>
-                      <a:round/>
-                      <a:headEnd type="none" w="med" len="med"/>
-                      <a:tailEnd type="none" w="med" len="med"/>
-                    </a:lnL>
-                    <a:lnR w="9525" cap="flat" cmpd="sng" algn="ctr">
-                      <a:solidFill>
-                        <a:srgbClr val="D9D6EC"/>
-                      </a:solidFill>
-                      <a:prstDash val="solid"/>
-                      <a:round/>
-                      <a:headEnd type="none" w="med" len="med"/>
-                      <a:tailEnd type="none" w="med" len="med"/>
-                    </a:lnR>
-                    <a:lnT w="9525" cap="flat" cmpd="sng" algn="ctr">
-                      <a:solidFill>
-                        <a:srgbClr val="D9D6EC"/>
-                      </a:solidFill>
-                      <a:prstDash val="solid"/>
-                      <a:round/>
-                      <a:headEnd type="none" w="med" len="med"/>
-                      <a:tailEnd type="none" w="med" len="med"/>
-                    </a:lnT>
-                    <a:lnB w="9525" cap="flat" cmpd="sng" algn="ctr">
-                      <a:solidFill>
-                        <a:srgbClr val="D9D6EC"/>
-                      </a:solidFill>
-                      <a:prstDash val="solid"/>
-                      <a:round/>
-                      <a:headEnd type="none" w="med" len="med"/>
-                      <a:tailEnd type="none" w="med" len="med"/>
-                    </a:lnB>
-                    <a:solidFill>
-                      <a:srgbClr val="5B3FD0"/>
-                    </a:solidFill>
-                  </a:tcPr>
-                </a:tc>
-                <a:tc>
-                  <a:txBody>
-                    <a:bodyPr/>
-                    <a:lstStyle/>
-                    <a:p>
-                      <a:pPr indent="0" marL="0">
-                        <a:buNone/>
-                      </a:pPr>
-                      <a:r>
-                        <a:rPr lang="en-US" sz="1600" b="1" dirty="0">
-                          <a:solidFill>
-                            <a:srgbClr val="FFFFFF"/>
-                          </a:solidFill>
-                          <a:latin typeface="Calibri" pitchFamily="34" charset="0"/>
-                          <a:ea typeface="Calibri" pitchFamily="34" charset="-122"/>
-                          <a:cs typeface="Calibri" pitchFamily="34" charset="-120"/>
-                        </a:rPr>
-                        <a:t>Trail</a:t>
-                      </a:r>
-                      <a:endParaRPr lang="en-US" sz="1600" dirty="0">
-                        <a:latin typeface="Calibri" charset="0"/>
-                        <a:ea typeface="Calibri" charset="0"/>
-                        <a:cs typeface="Calibri" charset="0"/>
-                      </a:endParaRPr>
-                    </a:p>
-                  </a:txBody>
-                  <a:tcPr marL="73152" marR="73152" marT="73152" marB="73152" anchor="ctr">
-                    <a:lnL w="9525" cap="flat" cmpd="sng" algn="ctr">
-                      <a:solidFill>
-                        <a:srgbClr val="D9D6EC"/>
-                      </a:solidFill>
-                      <a:prstDash val="solid"/>
-                      <a:round/>
-                      <a:headEnd type="none" w="med" len="med"/>
-                      <a:tailEnd type="none" w="med" len="med"/>
-                    </a:lnL>
-                    <a:lnR w="9525" cap="flat" cmpd="sng" algn="ctr">
-                      <a:solidFill>
-                        <a:srgbClr val="D9D6EC"/>
-                      </a:solidFill>
-                      <a:prstDash val="solid"/>
-                      <a:round/>
-                      <a:headEnd type="none" w="med" len="med"/>
-                      <a:tailEnd type="none" w="med" len="med"/>
-                    </a:lnR>
-                    <a:lnT w="9525" cap="flat" cmpd="sng" algn="ctr">
-                      <a:solidFill>
-                        <a:srgbClr val="D9D6EC"/>
-                      </a:solidFill>
-                      <a:prstDash val="solid"/>
-                      <a:round/>
-                      <a:headEnd type="none" w="med" len="med"/>
-                      <a:tailEnd type="none" w="med" len="med"/>
-                    </a:lnT>
-                    <a:lnB w="9525" cap="flat" cmpd="sng" algn="ctr">
-                      <a:solidFill>
-                        <a:srgbClr val="D9D6EC"/>
-                      </a:solidFill>
-                      <a:prstDash val="solid"/>
-                      <a:round/>
-                      <a:headEnd type="none" w="med" len="med"/>
-                      <a:tailEnd type="none" w="med" len="med"/>
-                    </a:lnB>
-                    <a:solidFill>
-                      <a:srgbClr val="5B3FD0"/>
-                    </a:solidFill>
-                  </a:tcPr>
-                </a:tc>
-              </a:tr>
-              <a:tr h="457200">
-                <a:tc>
-                  <a:txBody>
-                    <a:bodyPr/>
-                    <a:lstStyle/>
-                    <a:p>
-                      <a:pPr indent="0" marL="0">
-                        <a:buNone/>
-                      </a:pPr>
-                      <a:r>
-                        <a:rPr lang="en-US" sz="1600" b="1" dirty="0">
-                          <a:solidFill>
-                            <a:srgbClr val="22253A"/>
-                          </a:solidFill>
-                          <a:latin typeface="Calibri" pitchFamily="34" charset="0"/>
-                          <a:ea typeface="Calibri" pitchFamily="34" charset="-122"/>
-                          <a:cs typeface="Calibri" pitchFamily="34" charset="-120"/>
-                        </a:rPr>
-                        <a:t>Quanto tempo</a:t>
-                      </a:r>
-                      <a:endParaRPr lang="en-US" sz="1600" dirty="0">
-                        <a:latin typeface="Calibri" charset="0"/>
-                        <a:ea typeface="Calibri" charset="0"/>
-                        <a:cs typeface="Calibri" charset="0"/>
-                      </a:endParaRPr>
-                    </a:p>
-                  </a:txBody>
-                  <a:tcPr marL="73152" marR="73152" marT="73152" marB="73152" anchor="ctr">
-                    <a:lnL w="9525" cap="flat" cmpd="sng" algn="ctr">
-                      <a:solidFill>
-                        <a:srgbClr val="D9D6EC"/>
-                      </a:solidFill>
-                      <a:prstDash val="solid"/>
-                      <a:round/>
-                      <a:headEnd type="none" w="med" len="med"/>
-                      <a:tailEnd type="none" w="med" len="med"/>
-                    </a:lnL>
-                    <a:lnR w="9525" cap="flat" cmpd="sng" algn="ctr">
-                      <a:solidFill>
-                        <a:srgbClr val="D9D6EC"/>
-                      </a:solidFill>
-                      <a:prstDash val="solid"/>
-                      <a:round/>
-                      <a:headEnd type="none" w="med" len="med"/>
-                      <a:tailEnd type="none" w="med" len="med"/>
-                    </a:lnR>
-                    <a:lnT w="9525" cap="flat" cmpd="sng" algn="ctr">
-                      <a:solidFill>
-                        <a:srgbClr val="D9D6EC"/>
-                      </a:solidFill>
-                      <a:prstDash val="solid"/>
-                      <a:round/>
-                      <a:headEnd type="none" w="med" len="med"/>
-                      <a:tailEnd type="none" w="med" len="med"/>
-                    </a:lnT>
-                    <a:lnB w="9525" cap="flat" cmpd="sng" algn="ctr">
-                      <a:solidFill>
-                        <a:srgbClr val="D9D6EC"/>
-                      </a:solidFill>
-                      <a:prstDash val="solid"/>
-                      <a:round/>
-                      <a:headEnd type="none" w="med" len="med"/>
-                      <a:tailEnd type="none" w="med" len="med"/>
-                    </a:lnB>
-                    <a:solidFill>
-                      <a:srgbClr val="FFFFFF"/>
-                    </a:solidFill>
-                  </a:tcPr>
-                </a:tc>
-                <a:tc>
-                  <a:txBody>
-                    <a:bodyPr/>
-                    <a:lstStyle/>
-                    <a:p>
-                      <a:pPr indent="0" marL="0">
-                        <a:buNone/>
-                      </a:pPr>
-                      <a:r>
-                        <a:rPr lang="en-US" sz="1600" dirty="0">
-                          <a:solidFill>
-                            <a:srgbClr val="22253A"/>
-                          </a:solidFill>
-                          <a:latin typeface="Calibri" pitchFamily="34" charset="0"/>
-                          <a:ea typeface="Calibri" pitchFamily="34" charset="-122"/>
-                          <a:cs typeface="Calibri" pitchFamily="34" charset="-120"/>
-                        </a:rPr>
-                        <a:t>90 giorni</a:t>
-                      </a:r>
-                      <a:endParaRPr lang="en-US" sz="1600" dirty="0">
-                        <a:latin typeface="Calibri" charset="0"/>
-                        <a:ea typeface="Calibri" charset="0"/>
-                        <a:cs typeface="Calibri" charset="0"/>
-                      </a:endParaRPr>
-                    </a:p>
-                  </a:txBody>
-                  <a:tcPr marL="73152" marR="73152" marT="73152" marB="73152" anchor="ctr">
-                    <a:lnL w="9525" cap="flat" cmpd="sng" algn="ctr">
-                      <a:solidFill>
-                        <a:srgbClr val="D9D6EC"/>
-                      </a:solidFill>
-                      <a:prstDash val="solid"/>
-                      <a:round/>
-                      <a:headEnd type="none" w="med" len="med"/>
-                      <a:tailEnd type="none" w="med" len="med"/>
-                    </a:lnL>
-                    <a:lnR w="9525" cap="flat" cmpd="sng" algn="ctr">
-                      <a:solidFill>
-                        <a:srgbClr val="D9D6EC"/>
-                      </a:solidFill>
-                      <a:prstDash val="solid"/>
-                      <a:round/>
-                      <a:headEnd type="none" w="med" len="med"/>
-                      <a:tailEnd type="none" w="med" len="med"/>
-                    </a:lnR>
-                    <a:lnT w="9525" cap="flat" cmpd="sng" algn="ctr">
-                      <a:solidFill>
-                        <a:srgbClr val="D9D6EC"/>
-                      </a:solidFill>
-                      <a:prstDash val="solid"/>
-                      <a:round/>
-                      <a:headEnd type="none" w="med" len="med"/>
-                      <a:tailEnd type="none" w="med" len="med"/>
-                    </a:lnT>
-                    <a:lnB w="9525" cap="flat" cmpd="sng" algn="ctr">
-                      <a:solidFill>
-                        <a:srgbClr val="D9D6EC"/>
-                      </a:solidFill>
-                      <a:prstDash val="solid"/>
-                      <a:round/>
-                      <a:headEnd type="none" w="med" len="med"/>
-                      <a:tailEnd type="none" w="med" len="med"/>
-                    </a:lnB>
-                    <a:solidFill>
-                      <a:srgbClr val="FFFFFF"/>
-                    </a:solidFill>
-                  </a:tcPr>
-                </a:tc>
-                <a:tc>
-                  <a:txBody>
-                    <a:bodyPr/>
-                    <a:lstStyle/>
-                    <a:p>
-                      <a:pPr indent="0" marL="0">
-                        <a:buNone/>
-                      </a:pPr>
-                      <a:r>
-                        <a:rPr lang="en-US" sz="1600" b="1" dirty="0">
-                          <a:solidFill>
-                            <a:srgbClr val="22253A"/>
-                          </a:solidFill>
-                          <a:latin typeface="Calibri" pitchFamily="34" charset="0"/>
-                          <a:ea typeface="Calibri" pitchFamily="34" charset="-122"/>
-                          <a:cs typeface="Calibri" pitchFamily="34" charset="-120"/>
-                        </a:rPr>
-                        <a:t>quanto vuoi</a:t>
-                      </a:r>
-                      <a:endParaRPr lang="en-US" sz="1600" dirty="0">
-                        <a:latin typeface="Calibri" charset="0"/>
-                        <a:ea typeface="Calibri" charset="0"/>
-                        <a:cs typeface="Calibri" charset="0"/>
-                      </a:endParaRPr>
-                    </a:p>
-                  </a:txBody>
-                  <a:tcPr marL="73152" marR="73152" marT="73152" marB="73152" anchor="ctr">
-                    <a:lnL w="9525" cap="flat" cmpd="sng" algn="ctr">
-                      <a:solidFill>
-                        <a:srgbClr val="D9D6EC"/>
-                      </a:solidFill>
-                      <a:prstDash val="solid"/>
-                      <a:round/>
-                      <a:headEnd type="none" w="med" len="med"/>
-                      <a:tailEnd type="none" w="med" len="med"/>
-                    </a:lnL>
-                    <a:lnR w="9525" cap="flat" cmpd="sng" algn="ctr">
-                      <a:solidFill>
-                        <a:srgbClr val="D9D6EC"/>
-                      </a:solidFill>
-                      <a:prstDash val="solid"/>
-                      <a:round/>
-                      <a:headEnd type="none" w="med" len="med"/>
-                      <a:tailEnd type="none" w="med" len="med"/>
-                    </a:lnR>
-                    <a:lnT w="9525" cap="flat" cmpd="sng" algn="ctr">
-                      <a:solidFill>
-                        <a:srgbClr val="D9D6EC"/>
-                      </a:solidFill>
-                      <a:prstDash val="solid"/>
-                      <a:round/>
-                      <a:headEnd type="none" w="med" len="med"/>
-                      <a:tailEnd type="none" w="med" len="med"/>
-                    </a:lnT>
-                    <a:lnB w="9525" cap="flat" cmpd="sng" algn="ctr">
-                      <a:solidFill>
-                        <a:srgbClr val="D9D6EC"/>
-                      </a:solidFill>
-                      <a:prstDash val="solid"/>
-                      <a:round/>
-                      <a:headEnd type="none" w="med" len="med"/>
-                      <a:tailEnd type="none" w="med" len="med"/>
-                    </a:lnB>
-                    <a:solidFill>
-                      <a:srgbClr val="FFFFFF"/>
-                    </a:solidFill>
-                  </a:tcPr>
-                </a:tc>
-              </a:tr>
-              <a:tr h="457200">
-                <a:tc>
-                  <a:txBody>
-                    <a:bodyPr/>
-                    <a:lstStyle/>
-                    <a:p>
-                      <a:pPr indent="0" marL="0">
-                        <a:buNone/>
-                      </a:pPr>
-                      <a:r>
-                        <a:rPr lang="en-US" sz="1600" b="1" dirty="0">
-                          <a:solidFill>
-                            <a:srgbClr val="22253A"/>
-                          </a:solidFill>
-                          <a:latin typeface="Calibri" pitchFamily="34" charset="0"/>
-                          <a:ea typeface="Calibri" pitchFamily="34" charset="-122"/>
-                          <a:cs typeface="Calibri" pitchFamily="34" charset="-120"/>
-                        </a:rPr>
-                        <a:t>Eventi di gestione</a:t>
-                      </a:r>
-                      <a:endParaRPr lang="en-US" sz="1600" dirty="0">
-                        <a:latin typeface="Calibri" charset="0"/>
-                        <a:ea typeface="Calibri" charset="0"/>
-                        <a:cs typeface="Calibri" charset="0"/>
-                      </a:endParaRPr>
-                    </a:p>
-                  </a:txBody>
-                  <a:tcPr marL="73152" marR="73152" marT="73152" marB="73152" anchor="ctr">
-                    <a:lnL w="9525" cap="flat" cmpd="sng" algn="ctr">
-                      <a:solidFill>
-                        <a:srgbClr val="D9D6EC"/>
-                      </a:solidFill>
-                      <a:prstDash val="solid"/>
-                      <a:round/>
-                      <a:headEnd type="none" w="med" len="med"/>
-                      <a:tailEnd type="none" w="med" len="med"/>
-                    </a:lnL>
-                    <a:lnR w="9525" cap="flat" cmpd="sng" algn="ctr">
-                      <a:solidFill>
-                        <a:srgbClr val="D9D6EC"/>
-                      </a:solidFill>
-                      <a:prstDash val="solid"/>
-                      <a:round/>
-                      <a:headEnd type="none" w="med" len="med"/>
-                      <a:tailEnd type="none" w="med" len="med"/>
-                    </a:lnR>
-                    <a:lnT w="9525" cap="flat" cmpd="sng" algn="ctr">
-                      <a:solidFill>
-                        <a:srgbClr val="D9D6EC"/>
-                      </a:solidFill>
-                      <a:prstDash val="solid"/>
-                      <a:round/>
-                      <a:headEnd type="none" w="med" len="med"/>
-                      <a:tailEnd type="none" w="med" len="med"/>
-                    </a:lnT>
-                    <a:lnB w="9525" cap="flat" cmpd="sng" algn="ctr">
-                      <a:solidFill>
-                        <a:srgbClr val="D9D6EC"/>
-                      </a:solidFill>
-                      <a:prstDash val="solid"/>
-                      <a:round/>
-                      <a:headEnd type="none" w="med" len="med"/>
-                      <a:tailEnd type="none" w="med" len="med"/>
-                    </a:lnB>
-                    <a:solidFill>
-                      <a:srgbClr val="F7F6FD"/>
-                    </a:solidFill>
-                  </a:tcPr>
-                </a:tc>
-                <a:tc>
-                  <a:txBody>
-                    <a:bodyPr/>
-                    <a:lstStyle/>
-                    <a:p>
-                      <a:pPr indent="0" marL="0">
-                        <a:buNone/>
-                      </a:pPr>
-                      <a:r>
-                        <a:rPr lang="en-US" sz="1600" dirty="0">
-                          <a:solidFill>
-                            <a:srgbClr val="22253A"/>
-                          </a:solidFill>
-                          <a:latin typeface="Calibri" pitchFamily="34" charset="0"/>
-                          <a:ea typeface="Calibri" pitchFamily="34" charset="-122"/>
-                          <a:cs typeface="Calibri" pitchFamily="34" charset="-120"/>
-                        </a:rPr>
-                        <a:t>sì</a:t>
-                      </a:r>
-                      <a:endParaRPr lang="en-US" sz="1600" dirty="0">
-                        <a:latin typeface="Calibri" charset="0"/>
-                        <a:ea typeface="Calibri" charset="0"/>
-                        <a:cs typeface="Calibri" charset="0"/>
-                      </a:endParaRPr>
-                    </a:p>
-                  </a:txBody>
-                  <a:tcPr marL="73152" marR="73152" marT="73152" marB="73152" anchor="ctr">
-                    <a:lnL w="9525" cap="flat" cmpd="sng" algn="ctr">
-                      <a:solidFill>
-                        <a:srgbClr val="D9D6EC"/>
-                      </a:solidFill>
-                      <a:prstDash val="solid"/>
-                      <a:round/>
-                      <a:headEnd type="none" w="med" len="med"/>
-                      <a:tailEnd type="none" w="med" len="med"/>
-                    </a:lnL>
-                    <a:lnR w="9525" cap="flat" cmpd="sng" algn="ctr">
-                      <a:solidFill>
-                        <a:srgbClr val="D9D6EC"/>
-                      </a:solidFill>
-                      <a:prstDash val="solid"/>
-                      <a:round/>
-                      <a:headEnd type="none" w="med" len="med"/>
-                      <a:tailEnd type="none" w="med" len="med"/>
-                    </a:lnR>
-                    <a:lnT w="9525" cap="flat" cmpd="sng" algn="ctr">
-                      <a:solidFill>
-                        <a:srgbClr val="D9D6EC"/>
-                      </a:solidFill>
-                      <a:prstDash val="solid"/>
-                      <a:round/>
-                      <a:headEnd type="none" w="med" len="med"/>
-                      <a:tailEnd type="none" w="med" len="med"/>
-                    </a:lnT>
-                    <a:lnB w="9525" cap="flat" cmpd="sng" algn="ctr">
-                      <a:solidFill>
-                        <a:srgbClr val="D9D6EC"/>
-                      </a:solidFill>
-                      <a:prstDash val="solid"/>
-                      <a:round/>
-                      <a:headEnd type="none" w="med" len="med"/>
-                      <a:tailEnd type="none" w="med" len="med"/>
-                    </a:lnB>
-                    <a:solidFill>
-                      <a:srgbClr val="F7F6FD"/>
-                    </a:solidFill>
-                  </a:tcPr>
-                </a:tc>
-                <a:tc>
-                  <a:txBody>
-                    <a:bodyPr/>
-                    <a:lstStyle/>
-                    <a:p>
-                      <a:pPr indent="0" marL="0">
-                        <a:buNone/>
-                      </a:pPr>
-                      <a:r>
-                        <a:rPr lang="en-US" sz="1600" dirty="0">
-                          <a:solidFill>
-                            <a:srgbClr val="22253A"/>
-                          </a:solidFill>
-                          <a:latin typeface="Calibri" pitchFamily="34" charset="0"/>
-                          <a:ea typeface="Calibri" pitchFamily="34" charset="-122"/>
-                          <a:cs typeface="Calibri" pitchFamily="34" charset="-120"/>
-                        </a:rPr>
-                        <a:t>sì</a:t>
-                      </a:r>
-                      <a:endParaRPr lang="en-US" sz="1600" dirty="0">
-                        <a:latin typeface="Calibri" charset="0"/>
-                        <a:ea typeface="Calibri" charset="0"/>
-                        <a:cs typeface="Calibri" charset="0"/>
-                      </a:endParaRPr>
-                    </a:p>
-                  </a:txBody>
-                  <a:tcPr marL="73152" marR="73152" marT="73152" marB="73152" anchor="ctr">
-                    <a:lnL w="9525" cap="flat" cmpd="sng" algn="ctr">
-                      <a:solidFill>
-                        <a:srgbClr val="D9D6EC"/>
-                      </a:solidFill>
-                      <a:prstDash val="solid"/>
-                      <a:round/>
-                      <a:headEnd type="none" w="med" len="med"/>
-                      <a:tailEnd type="none" w="med" len="med"/>
-                    </a:lnL>
-                    <a:lnR w="9525" cap="flat" cmpd="sng" algn="ctr">
-                      <a:solidFill>
-                        <a:srgbClr val="D9D6EC"/>
-                      </a:solidFill>
-                      <a:prstDash val="solid"/>
-                      <a:round/>
-                      <a:headEnd type="none" w="med" len="med"/>
-                      <a:tailEnd type="none" w="med" len="med"/>
-                    </a:lnR>
-                    <a:lnT w="9525" cap="flat" cmpd="sng" algn="ctr">
-                      <a:solidFill>
-                        <a:srgbClr val="D9D6EC"/>
-                      </a:solidFill>
-                      <a:prstDash val="solid"/>
-                      <a:round/>
-                      <a:headEnd type="none" w="med" len="med"/>
-                      <a:tailEnd type="none" w="med" len="med"/>
-                    </a:lnT>
-                    <a:lnB w="9525" cap="flat" cmpd="sng" algn="ctr">
-                      <a:solidFill>
-                        <a:srgbClr val="D9D6EC"/>
-                      </a:solidFill>
-                      <a:prstDash val="solid"/>
-                      <a:round/>
-                      <a:headEnd type="none" w="med" len="med"/>
-                      <a:tailEnd type="none" w="med" len="med"/>
-                    </a:lnB>
-                    <a:solidFill>
-                      <a:srgbClr val="F7F6FD"/>
-                    </a:solidFill>
-                  </a:tcPr>
-                </a:tc>
-              </a:tr>
-              <a:tr h="457200">
-                <a:tc>
-                  <a:txBody>
-                    <a:bodyPr/>
-                    <a:lstStyle/>
-                    <a:p>
-                      <a:pPr indent="0" marL="0">
-                        <a:buNone/>
-                      </a:pPr>
-                      <a:r>
-                        <a:rPr lang="en-US" sz="1600" b="1" dirty="0">
-                          <a:solidFill>
-                            <a:srgbClr val="22253A"/>
-                          </a:solidFill>
-                          <a:latin typeface="Calibri" pitchFamily="34" charset="0"/>
-                          <a:ea typeface="Calibri" pitchFamily="34" charset="-122"/>
-                          <a:cs typeface="Calibri" pitchFamily="34" charset="-120"/>
-                        </a:rPr>
-                        <a:t>Data event (file in S3…)</a:t>
-                      </a:r>
-                      <a:endParaRPr lang="en-US" sz="1600" dirty="0">
-                        <a:latin typeface="Calibri" charset="0"/>
-                        <a:ea typeface="Calibri" charset="0"/>
-                        <a:cs typeface="Calibri" charset="0"/>
-                      </a:endParaRPr>
-                    </a:p>
-                  </a:txBody>
-                  <a:tcPr marL="73152" marR="73152" marT="73152" marB="73152" anchor="ctr">
-                    <a:lnL w="9525" cap="flat" cmpd="sng" algn="ctr">
-                      <a:solidFill>
-                        <a:srgbClr val="D9D6EC"/>
-                      </a:solidFill>
-                      <a:prstDash val="solid"/>
-                      <a:round/>
-                      <a:headEnd type="none" w="med" len="med"/>
-                      <a:tailEnd type="none" w="med" len="med"/>
-                    </a:lnL>
-                    <a:lnR w="9525" cap="flat" cmpd="sng" algn="ctr">
-                      <a:solidFill>
-                        <a:srgbClr val="D9D6EC"/>
-                      </a:solidFill>
-                      <a:prstDash val="solid"/>
-                      <a:round/>
-                      <a:headEnd type="none" w="med" len="med"/>
-                      <a:tailEnd type="none" w="med" len="med"/>
-                    </a:lnR>
-                    <a:lnT w="9525" cap="flat" cmpd="sng" algn="ctr">
-                      <a:solidFill>
-                        <a:srgbClr val="D9D6EC"/>
-                      </a:solidFill>
-                      <a:prstDash val="solid"/>
-                      <a:round/>
-                      <a:headEnd type="none" w="med" len="med"/>
-                      <a:tailEnd type="none" w="med" len="med"/>
-                    </a:lnT>
-                    <a:lnB w="9525" cap="flat" cmpd="sng" algn="ctr">
-                      <a:solidFill>
-                        <a:srgbClr val="D9D6EC"/>
-                      </a:solidFill>
-                      <a:prstDash val="solid"/>
-                      <a:round/>
-                      <a:headEnd type="none" w="med" len="med"/>
-                      <a:tailEnd type="none" w="med" len="med"/>
-                    </a:lnB>
-                    <a:solidFill>
-                      <a:srgbClr val="FFFFFF"/>
-                    </a:solidFill>
-                  </a:tcPr>
-                </a:tc>
-                <a:tc>
-                  <a:txBody>
-                    <a:bodyPr/>
-                    <a:lstStyle/>
-                    <a:p>
-                      <a:pPr indent="0" marL="0">
-                        <a:buNone/>
-                      </a:pPr>
-                      <a:r>
-                        <a:rPr lang="en-US" sz="1600" dirty="0">
-                          <a:solidFill>
-                            <a:srgbClr val="22253A"/>
-                          </a:solidFill>
-                          <a:latin typeface="Calibri" pitchFamily="34" charset="0"/>
-                          <a:ea typeface="Calibri" pitchFamily="34" charset="-122"/>
-                          <a:cs typeface="Calibri" pitchFamily="34" charset="-120"/>
-                        </a:rPr>
-                        <a:t>no</a:t>
-                      </a:r>
-                      <a:endParaRPr lang="en-US" sz="1600" dirty="0">
-                        <a:latin typeface="Calibri" charset="0"/>
-                        <a:ea typeface="Calibri" charset="0"/>
-                        <a:cs typeface="Calibri" charset="0"/>
-                      </a:endParaRPr>
-                    </a:p>
-                  </a:txBody>
-                  <a:tcPr marL="73152" marR="73152" marT="73152" marB="73152" anchor="ctr">
-                    <a:lnL w="9525" cap="flat" cmpd="sng" algn="ctr">
-                      <a:solidFill>
-                        <a:srgbClr val="D9D6EC"/>
-                      </a:solidFill>
-                      <a:prstDash val="solid"/>
-                      <a:round/>
-                      <a:headEnd type="none" w="med" len="med"/>
-                      <a:tailEnd type="none" w="med" len="med"/>
-                    </a:lnL>
-                    <a:lnR w="9525" cap="flat" cmpd="sng" algn="ctr">
-                      <a:solidFill>
-                        <a:srgbClr val="D9D6EC"/>
-                      </a:solidFill>
-                      <a:prstDash val="solid"/>
-                      <a:round/>
-                      <a:headEnd type="none" w="med" len="med"/>
-                      <a:tailEnd type="none" w="med" len="med"/>
-                    </a:lnR>
-                    <a:lnT w="9525" cap="flat" cmpd="sng" algn="ctr">
-                      <a:solidFill>
-                        <a:srgbClr val="D9D6EC"/>
-                      </a:solidFill>
-                      <a:prstDash val="solid"/>
-                      <a:round/>
-                      <a:headEnd type="none" w="med" len="med"/>
-                      <a:tailEnd type="none" w="med" len="med"/>
-                    </a:lnT>
-                    <a:lnB w="9525" cap="flat" cmpd="sng" algn="ctr">
-                      <a:solidFill>
-                        <a:srgbClr val="D9D6EC"/>
-                      </a:solidFill>
-                      <a:prstDash val="solid"/>
-                      <a:round/>
-                      <a:headEnd type="none" w="med" len="med"/>
-                      <a:tailEnd type="none" w="med" len="med"/>
-                    </a:lnB>
-                    <a:solidFill>
-                      <a:srgbClr val="FFFFFF"/>
-                    </a:solidFill>
-                  </a:tcPr>
-                </a:tc>
-                <a:tc>
-                  <a:txBody>
-                    <a:bodyPr/>
-                    <a:lstStyle/>
-                    <a:p>
-                      <a:pPr indent="0" marL="0">
-                        <a:buNone/>
-                      </a:pPr>
-                      <a:r>
-                        <a:rPr lang="en-US" sz="1600" b="1" dirty="0">
-                          <a:solidFill>
-                            <a:srgbClr val="22253A"/>
-                          </a:solidFill>
-                          <a:latin typeface="Calibri" pitchFamily="34" charset="0"/>
-                          <a:ea typeface="Calibri" pitchFamily="34" charset="-122"/>
-                          <a:cs typeface="Calibri" pitchFamily="34" charset="-120"/>
-                        </a:rPr>
-                        <a:t>sì, dove li scegli</a:t>
-                      </a:r>
-                      <a:endParaRPr lang="en-US" sz="1600" dirty="0">
-                        <a:latin typeface="Calibri" charset="0"/>
-                        <a:ea typeface="Calibri" charset="0"/>
-                        <a:cs typeface="Calibri" charset="0"/>
-                      </a:endParaRPr>
-                    </a:p>
-                  </a:txBody>
-                  <a:tcPr marL="73152" marR="73152" marT="73152" marB="73152" anchor="ctr">
-                    <a:lnL w="9525" cap="flat" cmpd="sng" algn="ctr">
-                      <a:solidFill>
-                        <a:srgbClr val="D9D6EC"/>
-                      </a:solidFill>
-                      <a:prstDash val="solid"/>
-                      <a:round/>
-                      <a:headEnd type="none" w="med" len="med"/>
-                      <a:tailEnd type="none" w="med" len="med"/>
-                    </a:lnL>
-                    <a:lnR w="9525" cap="flat" cmpd="sng" algn="ctr">
-                      <a:solidFill>
-                        <a:srgbClr val="D9D6EC"/>
-                      </a:solidFill>
-                      <a:prstDash val="solid"/>
-                      <a:round/>
-                      <a:headEnd type="none" w="med" len="med"/>
-                      <a:tailEnd type="none" w="med" len="med"/>
-                    </a:lnR>
-                    <a:lnT w="9525" cap="flat" cmpd="sng" algn="ctr">
-                      <a:solidFill>
-                        <a:srgbClr val="D9D6EC"/>
-                      </a:solidFill>
-                      <a:prstDash val="solid"/>
-                      <a:round/>
-                      <a:headEnd type="none" w="med" len="med"/>
-                      <a:tailEnd type="none" w="med" len="med"/>
-                    </a:lnT>
-                    <a:lnB w="9525" cap="flat" cmpd="sng" algn="ctr">
-                      <a:solidFill>
-                        <a:srgbClr val="D9D6EC"/>
-                      </a:solidFill>
-                      <a:prstDash val="solid"/>
-                      <a:round/>
-                      <a:headEnd type="none" w="med" len="med"/>
-                      <a:tailEnd type="none" w="med" len="med"/>
-                    </a:lnB>
-                    <a:solidFill>
-                      <a:srgbClr val="FFFFFF"/>
-                    </a:solidFill>
-                  </a:tcPr>
-                </a:tc>
-              </a:tr>
-              <a:tr h="457200">
-                <a:tc>
-                  <a:txBody>
-                    <a:bodyPr/>
-                    <a:lstStyle/>
-                    <a:p>
-                      <a:pPr indent="0" marL="0">
-                        <a:buNone/>
-                      </a:pPr>
-                      <a:r>
-                        <a:rPr lang="en-US" sz="1600" b="1" dirty="0">
-                          <a:solidFill>
-                            <a:srgbClr val="22253A"/>
-                          </a:solidFill>
-                          <a:latin typeface="Calibri" pitchFamily="34" charset="0"/>
-                          <a:ea typeface="Calibri" pitchFamily="34" charset="-122"/>
-                          <a:cs typeface="Calibri" pitchFamily="34" charset="-120"/>
-                        </a:rPr>
-                        <a:t>Tutte le regioni</a:t>
-                      </a:r>
-                      <a:endParaRPr lang="en-US" sz="1600" dirty="0">
-                        <a:latin typeface="Calibri" charset="0"/>
-                        <a:ea typeface="Calibri" charset="0"/>
-                        <a:cs typeface="Calibri" charset="0"/>
-                      </a:endParaRPr>
-                    </a:p>
-                  </a:txBody>
-                  <a:tcPr marL="73152" marR="73152" marT="73152" marB="73152" anchor="ctr">
-                    <a:lnL w="9525" cap="flat" cmpd="sng" algn="ctr">
-                      <a:solidFill>
-                        <a:srgbClr val="D9D6EC"/>
-                      </a:solidFill>
-                      <a:prstDash val="solid"/>
-                      <a:round/>
-                      <a:headEnd type="none" w="med" len="med"/>
-                      <a:tailEnd type="none" w="med" len="med"/>
-                    </a:lnL>
-                    <a:lnR w="9525" cap="flat" cmpd="sng" algn="ctr">
-                      <a:solidFill>
-                        <a:srgbClr val="D9D6EC"/>
-                      </a:solidFill>
-                      <a:prstDash val="solid"/>
-                      <a:round/>
-                      <a:headEnd type="none" w="med" len="med"/>
-                      <a:tailEnd type="none" w="med" len="med"/>
-                    </a:lnR>
-                    <a:lnT w="9525" cap="flat" cmpd="sng" algn="ctr">
-                      <a:solidFill>
-                        <a:srgbClr val="D9D6EC"/>
-                      </a:solidFill>
-                      <a:prstDash val="solid"/>
-                      <a:round/>
-                      <a:headEnd type="none" w="med" len="med"/>
-                      <a:tailEnd type="none" w="med" len="med"/>
-                    </a:lnT>
-                    <a:lnB w="9525" cap="flat" cmpd="sng" algn="ctr">
-                      <a:solidFill>
-                        <a:srgbClr val="D9D6EC"/>
-                      </a:solidFill>
-                      <a:prstDash val="solid"/>
-                      <a:round/>
-                      <a:headEnd type="none" w="med" len="med"/>
-                      <a:tailEnd type="none" w="med" len="med"/>
-                    </a:lnB>
-                    <a:solidFill>
-                      <a:srgbClr val="F7F6FD"/>
-                    </a:solidFill>
-                  </a:tcPr>
-                </a:tc>
-                <a:tc>
-                  <a:txBody>
-                    <a:bodyPr/>
-                    <a:lstStyle/>
-                    <a:p>
-                      <a:pPr indent="0" marL="0">
-                        <a:buNone/>
-                      </a:pPr>
-                      <a:r>
-                        <a:rPr lang="en-US" sz="1600" dirty="0">
-                          <a:solidFill>
-                            <a:srgbClr val="22253A"/>
-                          </a:solidFill>
-                          <a:latin typeface="Calibri" pitchFamily="34" charset="0"/>
-                          <a:ea typeface="Calibri" pitchFamily="34" charset="-122"/>
-                          <a:cs typeface="Calibri" pitchFamily="34" charset="-120"/>
-                        </a:rPr>
-                        <a:t>una alla volta, in console</a:t>
-                      </a:r>
-                      <a:endParaRPr lang="en-US" sz="1600" dirty="0">
-                        <a:latin typeface="Calibri" charset="0"/>
-                        <a:ea typeface="Calibri" charset="0"/>
-                        <a:cs typeface="Calibri" charset="0"/>
-                      </a:endParaRPr>
-                    </a:p>
-                  </a:txBody>
-                  <a:tcPr marL="73152" marR="73152" marT="73152" marB="73152" anchor="ctr">
-                    <a:lnL w="9525" cap="flat" cmpd="sng" algn="ctr">
-                      <a:solidFill>
-                        <a:srgbClr val="D9D6EC"/>
-                      </a:solidFill>
-                      <a:prstDash val="solid"/>
-                      <a:round/>
-                      <a:headEnd type="none" w="med" len="med"/>
-                      <a:tailEnd type="none" w="med" len="med"/>
-                    </a:lnL>
-                    <a:lnR w="9525" cap="flat" cmpd="sng" algn="ctr">
-                      <a:solidFill>
-                        <a:srgbClr val="D9D6EC"/>
-                      </a:solidFill>
-                      <a:prstDash val="solid"/>
-                      <a:round/>
-                      <a:headEnd type="none" w="med" len="med"/>
-                      <a:tailEnd type="none" w="med" len="med"/>
-                    </a:lnR>
-                    <a:lnT w="9525" cap="flat" cmpd="sng" algn="ctr">
-                      <a:solidFill>
-                        <a:srgbClr val="D9D6EC"/>
-                      </a:solidFill>
-                      <a:prstDash val="solid"/>
-                      <a:round/>
-                      <a:headEnd type="none" w="med" len="med"/>
-                      <a:tailEnd type="none" w="med" len="med"/>
-                    </a:lnT>
-                    <a:lnB w="9525" cap="flat" cmpd="sng" algn="ctr">
-                      <a:solidFill>
-                        <a:srgbClr val="D9D6EC"/>
-                      </a:solidFill>
-                      <a:prstDash val="solid"/>
-                      <a:round/>
-                      <a:headEnd type="none" w="med" len="med"/>
-                      <a:tailEnd type="none" w="med" len="med"/>
-                    </a:lnB>
-                    <a:solidFill>
-                      <a:srgbClr val="F7F6FD"/>
-                    </a:solidFill>
-                  </a:tcPr>
-                </a:tc>
-                <a:tc>
-                  <a:txBody>
-                    <a:bodyPr/>
-                    <a:lstStyle/>
-                    <a:p>
-                      <a:pPr indent="0" marL="0">
-                        <a:buNone/>
-                      </a:pPr>
-                      <a:r>
-                        <a:rPr lang="en-US" sz="1600" b="1" dirty="0">
-                          <a:solidFill>
-                            <a:srgbClr val="22253A"/>
-                          </a:solidFill>
-                          <a:latin typeface="Calibri" pitchFamily="34" charset="0"/>
-                          <a:ea typeface="Calibri" pitchFamily="34" charset="-122"/>
-                          <a:cs typeface="Calibri" pitchFamily="34" charset="-120"/>
-                        </a:rPr>
-                        <a:t>sì, in un bucket</a:t>
-                      </a:r>
-                      <a:endParaRPr lang="en-US" sz="1600" dirty="0">
-                        <a:latin typeface="Calibri" charset="0"/>
-                        <a:ea typeface="Calibri" charset="0"/>
-                        <a:cs typeface="Calibri" charset="0"/>
-                      </a:endParaRPr>
-                    </a:p>
-                  </a:txBody>
-                  <a:tcPr marL="73152" marR="73152" marT="73152" marB="73152" anchor="ctr">
-                    <a:lnL w="9525" cap="flat" cmpd="sng" algn="ctr">
-                      <a:solidFill>
-                        <a:srgbClr val="D9D6EC"/>
-                      </a:solidFill>
-                      <a:prstDash val="solid"/>
-                      <a:round/>
-                      <a:headEnd type="none" w="med" len="med"/>
-                      <a:tailEnd type="none" w="med" len="med"/>
-                    </a:lnL>
-                    <a:lnR w="9525" cap="flat" cmpd="sng" algn="ctr">
-                      <a:solidFill>
-                        <a:srgbClr val="D9D6EC"/>
-                      </a:solidFill>
-                      <a:prstDash val="solid"/>
-                      <a:round/>
-                      <a:headEnd type="none" w="med" len="med"/>
-                      <a:tailEnd type="none" w="med" len="med"/>
-                    </a:lnR>
-                    <a:lnT w="9525" cap="flat" cmpd="sng" algn="ctr">
-                      <a:solidFill>
-                        <a:srgbClr val="D9D6EC"/>
-                      </a:solidFill>
-                      <a:prstDash val="solid"/>
-                      <a:round/>
-                      <a:headEnd type="none" w="med" len="med"/>
-                      <a:tailEnd type="none" w="med" len="med"/>
-                    </a:lnT>
-                    <a:lnB w="9525" cap="flat" cmpd="sng" algn="ctr">
-                      <a:solidFill>
-                        <a:srgbClr val="D9D6EC"/>
-                      </a:solidFill>
-                      <a:prstDash val="solid"/>
-                      <a:round/>
-                      <a:headEnd type="none" w="med" len="med"/>
-                      <a:tailEnd type="none" w="med" len="med"/>
-                    </a:lnB>
-                    <a:solidFill>
-                      <a:srgbClr val="F7F6FD"/>
-                    </a:solidFill>
-                  </a:tcPr>
-                </a:tc>
-              </a:tr>
-              <a:tr h="457200">
-                <a:tc>
-                  <a:txBody>
-                    <a:bodyPr/>
-                    <a:lstStyle/>
-                    <a:p>
-                      <a:pPr indent="0" marL="0">
-                        <a:buNone/>
-                      </a:pPr>
-                      <a:r>
-                        <a:rPr lang="en-US" sz="1600" b="1" dirty="0">
-                          <a:solidFill>
-                            <a:srgbClr val="22253A"/>
-                          </a:solidFill>
-                          <a:latin typeface="Calibri" pitchFamily="34" charset="0"/>
-                          <a:ea typeface="Calibri" pitchFamily="34" charset="-122"/>
-                          <a:cs typeface="Calibri" pitchFamily="34" charset="-120"/>
-                        </a:rPr>
-                        <a:t>Firme anti-manomissione</a:t>
-                      </a:r>
-                      <a:endParaRPr lang="en-US" sz="1600" dirty="0">
-                        <a:latin typeface="Calibri" charset="0"/>
-                        <a:ea typeface="Calibri" charset="0"/>
-                        <a:cs typeface="Calibri" charset="0"/>
-                      </a:endParaRPr>
-                    </a:p>
-                  </a:txBody>
-                  <a:tcPr marL="73152" marR="73152" marT="73152" marB="73152" anchor="ctr">
-                    <a:lnL w="9525" cap="flat" cmpd="sng" algn="ctr">
-                      <a:solidFill>
-                        <a:srgbClr val="D9D6EC"/>
-                      </a:solidFill>
-                      <a:prstDash val="solid"/>
-                      <a:round/>
-                      <a:headEnd type="none" w="med" len="med"/>
-                      <a:tailEnd type="none" w="med" len="med"/>
-                    </a:lnL>
-                    <a:lnR w="9525" cap="flat" cmpd="sng" algn="ctr">
-                      <a:solidFill>
-                        <a:srgbClr val="D9D6EC"/>
-                      </a:solidFill>
-                      <a:prstDash val="solid"/>
-                      <a:round/>
-                      <a:headEnd type="none" w="med" len="med"/>
-                      <a:tailEnd type="none" w="med" len="med"/>
-                    </a:lnR>
-                    <a:lnT w="9525" cap="flat" cmpd="sng" algn="ctr">
-                      <a:solidFill>
-                        <a:srgbClr val="D9D6EC"/>
-                      </a:solidFill>
-                      <a:prstDash val="solid"/>
-                      <a:round/>
-                      <a:headEnd type="none" w="med" len="med"/>
-                      <a:tailEnd type="none" w="med" len="med"/>
-                    </a:lnT>
-                    <a:lnB w="9525" cap="flat" cmpd="sng" algn="ctr">
-                      <a:solidFill>
-                        <a:srgbClr val="D9D6EC"/>
-                      </a:solidFill>
-                      <a:prstDash val="solid"/>
-                      <a:round/>
-                      <a:headEnd type="none" w="med" len="med"/>
-                      <a:tailEnd type="none" w="med" len="med"/>
-                    </a:lnB>
-                    <a:solidFill>
-                      <a:srgbClr val="FFFFFF"/>
-                    </a:solidFill>
-                  </a:tcPr>
-                </a:tc>
-                <a:tc>
-                  <a:txBody>
-                    <a:bodyPr/>
-                    <a:lstStyle/>
-                    <a:p>
-                      <a:pPr indent="0" marL="0">
-                        <a:buNone/>
-                      </a:pPr>
-                      <a:r>
-                        <a:rPr lang="en-US" sz="1600" dirty="0">
-                          <a:solidFill>
-                            <a:srgbClr val="22253A"/>
-                          </a:solidFill>
-                          <a:latin typeface="Calibri" pitchFamily="34" charset="0"/>
-                          <a:ea typeface="Calibri" pitchFamily="34" charset="-122"/>
-                          <a:cs typeface="Calibri" pitchFamily="34" charset="-120"/>
-                        </a:rPr>
-                        <a:t>–</a:t>
-                      </a:r>
-                      <a:endParaRPr lang="en-US" sz="1600" dirty="0">
-                        <a:latin typeface="Calibri" charset="0"/>
-                        <a:ea typeface="Calibri" charset="0"/>
-                        <a:cs typeface="Calibri" charset="0"/>
-                      </a:endParaRPr>
-                    </a:p>
-                  </a:txBody>
-                  <a:tcPr marL="73152" marR="73152" marT="73152" marB="73152" anchor="ctr">
-                    <a:lnL w="9525" cap="flat" cmpd="sng" algn="ctr">
-                      <a:solidFill>
-                        <a:srgbClr val="D9D6EC"/>
-                      </a:solidFill>
-                      <a:prstDash val="solid"/>
-                      <a:round/>
-                      <a:headEnd type="none" w="med" len="med"/>
-                      <a:tailEnd type="none" w="med" len="med"/>
-                    </a:lnL>
-                    <a:lnR w="9525" cap="flat" cmpd="sng" algn="ctr">
-                      <a:solidFill>
-                        <a:srgbClr val="D9D6EC"/>
-                      </a:solidFill>
-                      <a:prstDash val="solid"/>
-                      <a:round/>
-                      <a:headEnd type="none" w="med" len="med"/>
-                      <a:tailEnd type="none" w="med" len="med"/>
-                    </a:lnR>
-                    <a:lnT w="9525" cap="flat" cmpd="sng" algn="ctr">
-                      <a:solidFill>
-                        <a:srgbClr val="D9D6EC"/>
-                      </a:solidFill>
-                      <a:prstDash val="solid"/>
-                      <a:round/>
-                      <a:headEnd type="none" w="med" len="med"/>
-                      <a:tailEnd type="none" w="med" len="med"/>
-                    </a:lnT>
-                    <a:lnB w="9525" cap="flat" cmpd="sng" algn="ctr">
-                      <a:solidFill>
-                        <a:srgbClr val="D9D6EC"/>
-                      </a:solidFill>
-                      <a:prstDash val="solid"/>
-                      <a:round/>
-                      <a:headEnd type="none" w="med" len="med"/>
-                      <a:tailEnd type="none" w="med" len="med"/>
-                    </a:lnB>
-                    <a:solidFill>
-                      <a:srgbClr val="FFFFFF"/>
-                    </a:solidFill>
-                  </a:tcPr>
-                </a:tc>
-                <a:tc>
-                  <a:txBody>
-                    <a:bodyPr/>
-                    <a:lstStyle/>
-                    <a:p>
-                      <a:pPr indent="0" marL="0">
-                        <a:buNone/>
-                      </a:pPr>
-                      <a:r>
-                        <a:rPr lang="en-US" sz="1600" b="1" dirty="0">
-                          <a:solidFill>
-                            <a:srgbClr val="22253A"/>
-                          </a:solidFill>
-                          <a:latin typeface="Calibri" pitchFamily="34" charset="0"/>
-                          <a:ea typeface="Calibri" pitchFamily="34" charset="-122"/>
-                          <a:cs typeface="Calibri" pitchFamily="34" charset="-120"/>
-                        </a:rPr>
-                        <a:t>log file validation</a:t>
-                      </a:r>
-                      <a:endParaRPr lang="en-US" sz="1600" dirty="0">
-                        <a:latin typeface="Calibri" charset="0"/>
-                        <a:ea typeface="Calibri" charset="0"/>
-                        <a:cs typeface="Calibri" charset="0"/>
-                      </a:endParaRPr>
-                    </a:p>
-                  </a:txBody>
-                  <a:tcPr marL="73152" marR="73152" marT="73152" marB="73152" anchor="ctr">
-                    <a:lnL w="9525" cap="flat" cmpd="sng" algn="ctr">
-                      <a:solidFill>
-                        <a:srgbClr val="D9D6EC"/>
-                      </a:solidFill>
-                      <a:prstDash val="solid"/>
-                      <a:round/>
-                      <a:headEnd type="none" w="med" len="med"/>
-                      <a:tailEnd type="none" w="med" len="med"/>
-                    </a:lnL>
-                    <a:lnR w="9525" cap="flat" cmpd="sng" algn="ctr">
-                      <a:solidFill>
-                        <a:srgbClr val="D9D6EC"/>
-                      </a:solidFill>
-                      <a:prstDash val="solid"/>
-                      <a:round/>
-                      <a:headEnd type="none" w="med" len="med"/>
-                      <a:tailEnd type="none" w="med" len="med"/>
-                    </a:lnR>
-                    <a:lnT w="9525" cap="flat" cmpd="sng" algn="ctr">
-                      <a:solidFill>
-                        <a:srgbClr val="D9D6EC"/>
-                      </a:solidFill>
-                      <a:prstDash val="solid"/>
-                      <a:round/>
-                      <a:headEnd type="none" w="med" len="med"/>
-                      <a:tailEnd type="none" w="med" len="med"/>
-                    </a:lnT>
-                    <a:lnB w="9525" cap="flat" cmpd="sng" algn="ctr">
-                      <a:solidFill>
-                        <a:srgbClr val="D9D6EC"/>
-                      </a:solidFill>
-                      <a:prstDash val="solid"/>
-                      <a:round/>
-                      <a:headEnd type="none" w="med" len="med"/>
-                      <a:tailEnd type="none" w="med" len="med"/>
-                    </a:lnB>
-                    <a:solidFill>
-                      <a:srgbClr val="FFFFFF"/>
-                    </a:solidFill>
-                  </a:tcPr>
-                </a:tc>
-              </a:tr>
-            </a:tbl>
-          </a:graphicData>
-        </a:graphic>
-      </p:graphicFrame>
-      <p:sp>
-        <p:nvSpPr>
-          <p:cNvPr id="6" name="Shape 2"/>
+      <p:sp>
+        <p:nvSpPr>
+          <p:cNvPr id="5" name="Shape 2"/>
           <p:cNvSpPr/>
           <p:nvPr/>
         </p:nvSpPr>
         <p:spPr>
           <a:xfrm>
-            <a:off x="548640" y="4206240"/>
-            <a:ext cx="11094415" cy="2148840"/>
+            <a:off x="548640" y="1371600"/>
+            <a:ext cx="3566160" cy="2103120"/>
           </a:xfrm>
           <a:prstGeom prst="roundRect">
             <a:avLst>
-              <a:gd name="adj" fmla="val 3404"/>
+              <a:gd name="adj" fmla="val 5217"/>
+            </a:avLst>
+          </a:prstGeom>
+          <a:solidFill>
+            <a:srgbClr val="EEEAFB"/>
+          </a:solidFill>
+          <a:ln w="12700">
+            <a:solidFill>
+              <a:srgbClr val="EEEAFB"/>
+            </a:solidFill>
+            <a:prstDash val="solid"/>
+          </a:ln>
+        </p:spPr>
+      </p:sp>
+      <p:sp>
+        <p:nvSpPr>
+          <p:cNvPr id="6" name="Shape 3"/>
+          <p:cNvSpPr/>
+          <p:nvPr/>
+        </p:nvSpPr>
+        <p:spPr>
+          <a:xfrm>
+            <a:off x="777240" y="1600200"/>
+            <a:ext cx="548640" cy="548640"/>
+          </a:xfrm>
+          <a:prstGeom prst="ellipse">
+            <a:avLst/>
+          </a:prstGeom>
+          <a:solidFill>
+            <a:srgbClr val="5B3FD0"/>
+          </a:solidFill>
+          <a:ln w="12700">
+            <a:solidFill>
+              <a:srgbClr val="5B3FD0"/>
+            </a:solidFill>
+            <a:prstDash val="solid"/>
+          </a:ln>
+        </p:spPr>
+      </p:sp>
+      <p:pic>
+        <p:nvPicPr>
+          <p:cNvPr id="7" name="Image 0" descr="preencoded.png">    </p:cNvPr>
+          <p:cNvPicPr>
+            <a:picLocks noChangeAspect="1"/>
+          </p:cNvPicPr>
+          <p:nvPr/>
+        </p:nvPicPr>
+        <p:blipFill>
+          <a:blip r:embed="rId1"/>
+          <a:stretch>
+            <a:fillRect/>
+          </a:stretch>
+        </p:blipFill>
+        <p:spPr>
+          <a:xfrm>
+            <a:off x="914400" y="1737360"/>
+            <a:ext cx="274320" cy="274320"/>
+          </a:xfrm>
+          <a:prstGeom prst="rect">
+            <a:avLst/>
+          </a:prstGeom>
+        </p:spPr>
+      </p:pic>
+      <p:sp>
+        <p:nvSpPr>
+          <p:cNvPr id="8" name="Text 4"/>
+          <p:cNvSpPr txBox="1"/>
+          <p:nvPr/>
+        </p:nvSpPr>
+        <p:spPr>
+          <a:xfrm>
+            <a:off x="1508760" y="1600200"/>
+            <a:ext cx="2377440" cy="548640"/>
+          </a:xfrm>
+          <a:prstGeom prst="rect">
+            <a:avLst/>
+          </a:prstGeom>
+          <a:noFill/>
+          <a:ln/>
+        </p:spPr>
+        <p:txBody>
+          <a:bodyPr wrap="square" lIns="0" tIns="0" rIns="0" bIns="0" rtlCol="0" anchor="ctr"/>
+          <a:lstStyle/>
+          <a:p>
+            <a:pPr indent="0" marL="0">
+              <a:buNone/>
+            </a:pPr>
+            <a:r>
+              <a:rPr lang="en-US" sz="1800" b="1" dirty="0">
+                <a:solidFill>
+                  <a:srgbClr val="22253A"/>
+                </a:solidFill>
+                <a:latin typeface="Calibri" pitchFamily="34" charset="0"/>
+                <a:ea typeface="Calibri" pitchFamily="34" charset="-122"/>
+                <a:cs typeface="Calibri" pitchFamily="34" charset="-120"/>
+              </a:rPr>
+              <a:t>1. Sul database</a:t>
+            </a:r>
+            <a:endParaRPr lang="en-US" sz="1800" dirty="0"/>
+          </a:p>
+        </p:txBody>
+      </p:sp>
+      <p:sp>
+        <p:nvSpPr>
+          <p:cNvPr id="9" name="Text 5"/>
+          <p:cNvSpPr txBox="1"/>
+          <p:nvPr/>
+        </p:nvSpPr>
+        <p:spPr>
+          <a:xfrm>
+            <a:off x="777240" y="2286000"/>
+            <a:ext cx="3108960" cy="1005840"/>
+          </a:xfrm>
+          <a:prstGeom prst="rect">
+            <a:avLst/>
+          </a:prstGeom>
+          <a:noFill/>
+          <a:ln/>
+        </p:spPr>
+        <p:txBody>
+          <a:bodyPr wrap="square" lIns="0" tIns="0" rIns="0" bIns="0" rtlCol="0" anchor="t"/>
+          <a:lstStyle/>
+          <a:p>
+            <a:pPr indent="0" marL="0">
+              <a:spcAft>
+                <a:spcPts val="600"/>
+              </a:spcAft>
+              <a:buNone/>
+            </a:pPr>
+            <a:r>
+              <a:rPr lang="en-US" sz="1400" dirty="0">
+                <a:solidFill>
+                  <a:srgbClr val="22253A"/>
+                </a:solidFill>
+                <a:latin typeface="Calibri" pitchFamily="34" charset="0"/>
+                <a:ea typeface="Calibri" pitchFamily="34" charset="-122"/>
+                <a:cs typeface="Calibri" pitchFamily="34" charset="-120"/>
+              </a:rPr>
+              <a:t>iam_database_authentication_enabled = true</a:t>
+            </a:r>
+            <a:endParaRPr lang="en-US" sz="1400" dirty="0"/>
+          </a:p>
+        </p:txBody>
+      </p:sp>
+      <p:sp>
+        <p:nvSpPr>
+          <p:cNvPr id="10" name="Shape 6"/>
+          <p:cNvSpPr/>
+          <p:nvPr/>
+        </p:nvSpPr>
+        <p:spPr>
+          <a:xfrm>
+            <a:off x="4297680" y="1371600"/>
+            <a:ext cx="3566160" cy="2103120"/>
+          </a:xfrm>
+          <a:prstGeom prst="roundRect">
+            <a:avLst>
+              <a:gd name="adj" fmla="val 5217"/>
+            </a:avLst>
+          </a:prstGeom>
+          <a:solidFill>
+            <a:srgbClr val="EEEAFB"/>
+          </a:solidFill>
+          <a:ln w="12700">
+            <a:solidFill>
+              <a:srgbClr val="EEEAFB"/>
+            </a:solidFill>
+            <a:prstDash val="solid"/>
+          </a:ln>
+        </p:spPr>
+      </p:sp>
+      <p:sp>
+        <p:nvSpPr>
+          <p:cNvPr id="11" name="Shape 7"/>
+          <p:cNvSpPr/>
+          <p:nvPr/>
+        </p:nvSpPr>
+        <p:spPr>
+          <a:xfrm>
+            <a:off x="4526280" y="1600200"/>
+            <a:ext cx="548640" cy="548640"/>
+          </a:xfrm>
+          <a:prstGeom prst="ellipse">
+            <a:avLst/>
+          </a:prstGeom>
+          <a:solidFill>
+            <a:srgbClr val="5B3FD0"/>
+          </a:solidFill>
+          <a:ln w="12700">
+            <a:solidFill>
+              <a:srgbClr val="5B3FD0"/>
+            </a:solidFill>
+            <a:prstDash val="solid"/>
+          </a:ln>
+        </p:spPr>
+      </p:sp>
+      <p:pic>
+        <p:nvPicPr>
+          <p:cNvPr id="12" name="Image 1" descr="preencoded.png">    </p:cNvPr>
+          <p:cNvPicPr>
+            <a:picLocks noChangeAspect="1"/>
+          </p:cNvPicPr>
+          <p:nvPr/>
+        </p:nvPicPr>
+        <p:blipFill>
+          <a:blip r:embed="rId2"/>
+          <a:stretch>
+            <a:fillRect/>
+          </a:stretch>
+        </p:blipFill>
+        <p:spPr>
+          <a:xfrm>
+            <a:off x="4663440" y="1737360"/>
+            <a:ext cx="274320" cy="274320"/>
+          </a:xfrm>
+          <a:prstGeom prst="rect">
+            <a:avLst/>
+          </a:prstGeom>
+        </p:spPr>
+      </p:pic>
+      <p:sp>
+        <p:nvSpPr>
+          <p:cNvPr id="13" name="Text 8"/>
+          <p:cNvSpPr txBox="1"/>
+          <p:nvPr/>
+        </p:nvSpPr>
+        <p:spPr>
+          <a:xfrm>
+            <a:off x="5257800" y="1600200"/>
+            <a:ext cx="2377440" cy="548640"/>
+          </a:xfrm>
+          <a:prstGeom prst="rect">
+            <a:avLst/>
+          </a:prstGeom>
+          <a:noFill/>
+          <a:ln/>
+        </p:spPr>
+        <p:txBody>
+          <a:bodyPr wrap="square" lIns="0" tIns="0" rIns="0" bIns="0" rtlCol="0" anchor="ctr"/>
+          <a:lstStyle/>
+          <a:p>
+            <a:pPr indent="0" marL="0">
+              <a:buNone/>
+            </a:pPr>
+            <a:r>
+              <a:rPr lang="en-US" sz="1800" b="1" dirty="0">
+                <a:solidFill>
+                  <a:srgbClr val="22253A"/>
+                </a:solidFill>
+                <a:latin typeface="Calibri" pitchFamily="34" charset="0"/>
+                <a:ea typeface="Calibri" pitchFamily="34" charset="-122"/>
+                <a:cs typeface="Calibri" pitchFamily="34" charset="-120"/>
+              </a:rPr>
+              <a:t>2. Nel database</a:t>
+            </a:r>
+            <a:endParaRPr lang="en-US" sz="1800" dirty="0"/>
+          </a:p>
+        </p:txBody>
+      </p:sp>
+      <p:sp>
+        <p:nvSpPr>
+          <p:cNvPr id="14" name="Text 9"/>
+          <p:cNvSpPr txBox="1"/>
+          <p:nvPr/>
+        </p:nvSpPr>
+        <p:spPr>
+          <a:xfrm>
+            <a:off x="4526280" y="2286000"/>
+            <a:ext cx="3108960" cy="1005840"/>
+          </a:xfrm>
+          <a:prstGeom prst="rect">
+            <a:avLst/>
+          </a:prstGeom>
+          <a:noFill/>
+          <a:ln/>
+        </p:spPr>
+        <p:txBody>
+          <a:bodyPr wrap="square" lIns="0" tIns="0" rIns="0" bIns="0" rtlCol="0" anchor="t"/>
+          <a:lstStyle/>
+          <a:p>
+            <a:pPr indent="0" marL="0">
+              <a:spcAft>
+                <a:spcPts val="600"/>
+              </a:spcAft>
+              <a:buNone/>
+            </a:pPr>
+            <a:r>
+              <a:rPr lang="en-US" sz="1400" dirty="0">
+                <a:solidFill>
+                  <a:srgbClr val="22253A"/>
+                </a:solidFill>
+                <a:latin typeface="Calibri" pitchFamily="34" charset="0"/>
+                <a:ea typeface="Calibri" pitchFamily="34" charset="-122"/>
+                <a:cs typeface="Calibri" pitchFamily="34" charset="-120"/>
+              </a:rPr>
+              <a:t>CREATE USER mario; GRANT rds_iam TO mario;</a:t>
+            </a:r>
+            <a:endParaRPr lang="en-US" sz="1400" dirty="0"/>
+          </a:p>
+        </p:txBody>
+      </p:sp>
+      <p:sp>
+        <p:nvSpPr>
+          <p:cNvPr id="15" name="Shape 10"/>
+          <p:cNvSpPr/>
+          <p:nvPr/>
+        </p:nvSpPr>
+        <p:spPr>
+          <a:xfrm>
+            <a:off x="8046720" y="1371600"/>
+            <a:ext cx="3566160" cy="2103120"/>
+          </a:xfrm>
+          <a:prstGeom prst="roundRect">
+            <a:avLst>
+              <a:gd name="adj" fmla="val 5217"/>
+            </a:avLst>
+          </a:prstGeom>
+          <a:solidFill>
+            <a:srgbClr val="EEEAFB"/>
+          </a:solidFill>
+          <a:ln w="12700">
+            <a:solidFill>
+              <a:srgbClr val="EEEAFB"/>
+            </a:solidFill>
+            <a:prstDash val="solid"/>
+          </a:ln>
+        </p:spPr>
+      </p:sp>
+      <p:sp>
+        <p:nvSpPr>
+          <p:cNvPr id="16" name="Shape 11"/>
+          <p:cNvSpPr/>
+          <p:nvPr/>
+        </p:nvSpPr>
+        <p:spPr>
+          <a:xfrm>
+            <a:off x="8275320" y="1600200"/>
+            <a:ext cx="548640" cy="548640"/>
+          </a:xfrm>
+          <a:prstGeom prst="ellipse">
+            <a:avLst/>
+          </a:prstGeom>
+          <a:solidFill>
+            <a:srgbClr val="5B3FD0"/>
+          </a:solidFill>
+          <a:ln w="12700">
+            <a:solidFill>
+              <a:srgbClr val="5B3FD0"/>
+            </a:solidFill>
+            <a:prstDash val="solid"/>
+          </a:ln>
+        </p:spPr>
+      </p:sp>
+      <p:pic>
+        <p:nvPicPr>
+          <p:cNvPr id="17" name="Image 2" descr="preencoded.png">    </p:cNvPr>
+          <p:cNvPicPr>
+            <a:picLocks noChangeAspect="1"/>
+          </p:cNvPicPr>
+          <p:nvPr/>
+        </p:nvPicPr>
+        <p:blipFill>
+          <a:blip r:embed="rId3"/>
+          <a:stretch>
+            <a:fillRect/>
+          </a:stretch>
+        </p:blipFill>
+        <p:spPr>
+          <a:xfrm>
+            <a:off x="8412480" y="1737360"/>
+            <a:ext cx="274320" cy="274320"/>
+          </a:xfrm>
+          <a:prstGeom prst="rect">
+            <a:avLst/>
+          </a:prstGeom>
+        </p:spPr>
+      </p:pic>
+      <p:sp>
+        <p:nvSpPr>
+          <p:cNvPr id="18" name="Text 12"/>
+          <p:cNvSpPr txBox="1"/>
+          <p:nvPr/>
+        </p:nvSpPr>
+        <p:spPr>
+          <a:xfrm>
+            <a:off x="9006840" y="1600200"/>
+            <a:ext cx="2377440" cy="548640"/>
+          </a:xfrm>
+          <a:prstGeom prst="rect">
+            <a:avLst/>
+          </a:prstGeom>
+          <a:noFill/>
+          <a:ln/>
+        </p:spPr>
+        <p:txBody>
+          <a:bodyPr wrap="square" lIns="0" tIns="0" rIns="0" bIns="0" rtlCol="0" anchor="ctr"/>
+          <a:lstStyle/>
+          <a:p>
+            <a:pPr indent="0" marL="0">
+              <a:buNone/>
+            </a:pPr>
+            <a:r>
+              <a:rPr lang="en-US" sz="1800" b="1" dirty="0">
+                <a:solidFill>
+                  <a:srgbClr val="22253A"/>
+                </a:solidFill>
+                <a:latin typeface="Calibri" pitchFamily="34" charset="0"/>
+                <a:ea typeface="Calibri" pitchFamily="34" charset="-122"/>
+                <a:cs typeface="Calibri" pitchFamily="34" charset="-120"/>
+              </a:rPr>
+              <a:t>3. In IAM</a:t>
+            </a:r>
+            <a:endParaRPr lang="en-US" sz="1800" dirty="0"/>
+          </a:p>
+        </p:txBody>
+      </p:sp>
+      <p:sp>
+        <p:nvSpPr>
+          <p:cNvPr id="19" name="Text 13"/>
+          <p:cNvSpPr txBox="1"/>
+          <p:nvPr/>
+        </p:nvSpPr>
+        <p:spPr>
+          <a:xfrm>
+            <a:off x="8275320" y="2286000"/>
+            <a:ext cx="3108960" cy="1005840"/>
+          </a:xfrm>
+          <a:prstGeom prst="rect">
+            <a:avLst/>
+          </a:prstGeom>
+          <a:noFill/>
+          <a:ln/>
+        </p:spPr>
+        <p:txBody>
+          <a:bodyPr wrap="square" lIns="0" tIns="0" rIns="0" bIns="0" rtlCol="0" anchor="t"/>
+          <a:lstStyle/>
+          <a:p>
+            <a:pPr indent="0" marL="0">
+              <a:spcAft>
+                <a:spcPts val="600"/>
+              </a:spcAft>
+              <a:buNone/>
+            </a:pPr>
+            <a:r>
+              <a:rPr lang="en-US" sz="1400" dirty="0">
+                <a:solidFill>
+                  <a:srgbClr val="22253A"/>
+                </a:solidFill>
+                <a:latin typeface="Calibri" pitchFamily="34" charset="0"/>
+                <a:ea typeface="Calibri" pitchFamily="34" charset="-122"/>
+                <a:cs typeface="Calibri" pitchFamily="34" charset="-120"/>
+              </a:rPr>
+              <a:t>rds-db:connect su quell'utente</a:t>
+            </a:r>
+            <a:endParaRPr lang="en-US" sz="1400" dirty="0"/>
+          </a:p>
+        </p:txBody>
+      </p:sp>
+      <p:sp>
+        <p:nvSpPr>
+          <p:cNvPr id="20" name="Shape 14"/>
+          <p:cNvSpPr/>
+          <p:nvPr/>
+        </p:nvSpPr>
+        <p:spPr>
+          <a:xfrm>
+            <a:off x="548640" y="3703320"/>
+            <a:ext cx="11094415" cy="1463040"/>
+          </a:xfrm>
+          <a:prstGeom prst="roundRect">
+            <a:avLst>
+              <a:gd name="adj" fmla="val 5000"/>
             </a:avLst>
           </a:prstGeom>
           <a:solidFill>
@@ -8379,13 +6243,13 @@
       </p:sp>
       <p:sp>
         <p:nvSpPr>
-          <p:cNvPr id="7" name="Text 3"/>
+          <p:cNvPr id="21" name="Text 15"/>
           <p:cNvSpPr txBox="1"/>
           <p:nvPr/>
         </p:nvSpPr>
         <p:spPr>
           <a:xfrm>
-            <a:off x="731520" y="4279392"/>
+            <a:off x="731520" y="3776472"/>
             <a:ext cx="10728655" cy="274320"/>
           </a:xfrm>
           <a:prstGeom prst="rect">
@@ -8410,7 +6274,7 @@
                 <a:ea typeface="Calibri" pitchFamily="34" charset="-122"/>
                 <a:cs typeface="Calibri" pitchFamily="34" charset="-120"/>
               </a:rPr>
-              <a:t>audit.tf (in breve)</a:t>
+              <a:t>dal tuo computer, con il login SSO</a:t>
             </a:r>
             <a:endParaRPr lang="en-US" sz="1300" dirty="0"/>
           </a:p>
@@ -8418,14 +6282,14 @@
       </p:sp>
       <p:sp>
         <p:nvSpPr>
-          <p:cNvPr id="8" name="Text 4"/>
+          <p:cNvPr id="22" name="Text 16"/>
           <p:cNvSpPr txBox="1"/>
           <p:nvPr/>
         </p:nvSpPr>
         <p:spPr>
           <a:xfrm>
-            <a:off x="731520" y="4617720"/>
-            <a:ext cx="10728655" cy="1600200"/>
+            <a:off x="731520" y="4114800"/>
+            <a:ext cx="10728655" cy="914400"/>
           </a:xfrm>
           <a:prstGeom prst="rect">
             <a:avLst/>
@@ -8449,7 +6313,7 @@
                 <a:ea typeface="Courier New" pitchFamily="34" charset="-122"/>
                 <a:cs typeface="Courier New" pitchFamily="34" charset="-120"/>
               </a:rPr>
-              <a:t>event_selector {</a:t>
+              <a:t>export PGPASSWORD=$(aws rds generate-db-auth-token \</a:t>
             </a:r>
             <a:endParaRPr lang="en-US" sz="1600" dirty="0"/>
           </a:p>
@@ -8466,7 +6330,7 @@
                 <a:ea typeface="Courier New" pitchFamily="34" charset="-122"/>
                 <a:cs typeface="Courier New" pitchFamily="34" charset="-120"/>
               </a:rPr>
-              <a:t>  include_management_events = true</a:t>
+              <a:t>  --hostname "$(terraform output -raw db_address)" --port 5432 --username mario)</a:t>
             </a:r>
             <a:endParaRPr lang="en-US" sz="1600" dirty="0"/>
           </a:p>
@@ -8483,77 +6347,75 @@
                 <a:ea typeface="Courier New" pitchFamily="34" charset="-122"/>
                 <a:cs typeface="Courier New" pitchFamily="34" charset="-120"/>
               </a:rPr>
-              <a:t>  data_resource {</a:t>
+              <a:t>psql "host=… dbname=app user=mario sslmode=verify-full …"</a:t>
             </a:r>
             <a:endParaRPr lang="en-US" sz="1600" dirty="0"/>
           </a:p>
-          <a:p>
-            <a:pPr indent="0" marL="0">
+        </p:txBody>
+      </p:sp>
+      <p:sp>
+        <p:nvSpPr>
+          <p:cNvPr id="23" name="Shape 17"/>
+          <p:cNvSpPr/>
+          <p:nvPr/>
+        </p:nvSpPr>
+        <p:spPr>
+          <a:xfrm>
+            <a:off x="548640" y="5349240"/>
+            <a:ext cx="11094415" cy="777240"/>
+          </a:xfrm>
+          <a:prstGeom prst="roundRect">
+            <a:avLst>
+              <a:gd name="adj" fmla="val 11765"/>
+            </a:avLst>
+          </a:prstGeom>
+          <a:solidFill>
+            <a:srgbClr val="E5F4EC"/>
+          </a:solidFill>
+          <a:ln w="12700">
+            <a:solidFill>
+              <a:srgbClr val="E5F4EC"/>
+            </a:solidFill>
+            <a:prstDash val="solid"/>
+          </a:ln>
+        </p:spPr>
+      </p:sp>
+      <p:sp>
+        <p:nvSpPr>
+          <p:cNvPr id="24" name="Text 18"/>
+          <p:cNvSpPr txBox="1"/>
+          <p:nvPr/>
+        </p:nvSpPr>
+        <p:spPr>
+          <a:xfrm>
+            <a:off x="822960" y="5349240"/>
+            <a:ext cx="10545775" cy="777240"/>
+          </a:xfrm>
+          <a:prstGeom prst="rect">
+            <a:avLst/>
+          </a:prstGeom>
+          <a:noFill/>
+          <a:ln/>
+        </p:spPr>
+        <p:txBody>
+          <a:bodyPr wrap="square" lIns="0" tIns="0" rIns="0" bIns="0" rtlCol="0" anchor="ctr"/>
+          <a:lstStyle/>
+          <a:p>
+            <a:pPr algn="l" indent="0" marL="0">
               <a:buNone/>
             </a:pPr>
             <a:r>
-              <a:rPr lang="en-US" sz="1600" dirty="0">
-                <a:solidFill>
-                  <a:srgbClr val="E6E6F0"/>
-                </a:solidFill>
-                <a:latin typeface="Courier New" pitchFamily="34" charset="0"/>
-                <a:ea typeface="Courier New" pitchFamily="34" charset="-122"/>
-                <a:cs typeface="Courier New" pitchFamily="34" charset="-120"/>
-              </a:rPr>
-              <a:t>    type   = "AWS::S3::Object"</a:t>
-            </a:r>
-            <a:endParaRPr lang="en-US" sz="1600" dirty="0"/>
-          </a:p>
-          <a:p>
-            <a:pPr indent="0" marL="0">
-              <a:buNone/>
-            </a:pPr>
-            <a:r>
-              <a:rPr lang="en-US" sz="1600" dirty="0">
-                <a:solidFill>
-                  <a:srgbClr val="E6E6F0"/>
-                </a:solidFill>
-                <a:latin typeface="Courier New" pitchFamily="34" charset="0"/>
-                <a:ea typeface="Courier New" pitchFamily="34" charset="-122"/>
-                <a:cs typeface="Courier New" pitchFamily="34" charset="-120"/>
-              </a:rPr>
-              <a:t>    values = ["${aws_s3_bucket.artifacts.arn}/"]</a:t>
-            </a:r>
-            <a:endParaRPr lang="en-US" sz="1600" dirty="0"/>
-          </a:p>
-          <a:p>
-            <a:pPr indent="0" marL="0">
-              <a:buNone/>
-            </a:pPr>
-            <a:r>
-              <a:rPr lang="en-US" sz="1600" dirty="0">
-                <a:solidFill>
-                  <a:srgbClr val="E6E6F0"/>
-                </a:solidFill>
-                <a:latin typeface="Courier New" pitchFamily="34" charset="0"/>
-                <a:ea typeface="Courier New" pitchFamily="34" charset="-122"/>
-                <a:cs typeface="Courier New" pitchFamily="34" charset="-120"/>
-              </a:rPr>
-              <a:t>  }</a:t>
-            </a:r>
-            <a:endParaRPr lang="en-US" sz="1600" dirty="0"/>
-          </a:p>
-          <a:p>
-            <a:pPr indent="0" marL="0">
-              <a:buNone/>
-            </a:pPr>
-            <a:r>
-              <a:rPr lang="en-US" sz="1600" dirty="0">
-                <a:solidFill>
-                  <a:srgbClr val="E6E6F0"/>
-                </a:solidFill>
-                <a:latin typeface="Courier New" pitchFamily="34" charset="0"/>
-                <a:ea typeface="Courier New" pitchFamily="34" charset="-122"/>
-                <a:cs typeface="Courier New" pitchFamily="34" charset="-120"/>
-              </a:rPr>
-              <a:t>}</a:t>
-            </a:r>
-            <a:endParaRPr lang="en-US" sz="1600" dirty="0"/>
+              <a:rPr lang="en-US" sz="1800" b="1" dirty="0">
+                <a:solidFill>
+                  <a:srgbClr val="22253A"/>
+                </a:solidFill>
+                <a:latin typeface="Calibri" pitchFamily="34" charset="0"/>
+                <a:ea typeface="Calibri" pitchFamily="34" charset="-122"/>
+                <a:cs typeface="Calibri" pitchFamily="34" charset="-120"/>
+              </a:rPr>
+              <a:t>Ogni persona con il suo nome, nessuna password, un token che scade in 15 minuti.</a:t>
+            </a:r>
+            <a:endParaRPr lang="en-US" sz="1800" dirty="0"/>
           </a:p>
         </p:txBody>
       </p:sp>
@@ -8670,7 +6532,7 @@
                 <a:ea typeface="Calibri" pitchFamily="34" charset="-122"/>
                 <a:cs typeface="Calibri" pitchFamily="34" charset="-120"/>
               </a:rPr>
-              <a:t>Una chiave KMS tua</a:t>
+              <a:t>Chi si è collegato al database martedì alle 15?</a:t>
             </a:r>
             <a:endParaRPr lang="en-US" sz="3200" dirty="0"/>
           </a:p>
@@ -8715,1610 +6577,9 @@
           </a:p>
         </p:txBody>
       </p:sp>
-      <p:sp>
-        <p:nvSpPr>
-          <p:cNvPr id="5" name="Shape 2"/>
-          <p:cNvSpPr/>
-          <p:nvPr/>
-        </p:nvSpPr>
-        <p:spPr>
-          <a:xfrm>
-            <a:off x="548640" y="1371600"/>
-            <a:ext cx="5440680" cy="2377440"/>
-          </a:xfrm>
-          <a:prstGeom prst="roundRect">
-            <a:avLst>
-              <a:gd name="adj" fmla="val 4615"/>
-            </a:avLst>
-          </a:prstGeom>
-          <a:solidFill>
-            <a:srgbClr val="EEEAFB"/>
-          </a:solidFill>
-          <a:ln w="12700">
-            <a:solidFill>
-              <a:srgbClr val="EEEAFB"/>
-            </a:solidFill>
-            <a:prstDash val="solid"/>
-          </a:ln>
-        </p:spPr>
-      </p:sp>
-      <p:sp>
-        <p:nvSpPr>
-          <p:cNvPr id="6" name="Shape 3"/>
-          <p:cNvSpPr/>
-          <p:nvPr/>
-        </p:nvSpPr>
-        <p:spPr>
-          <a:xfrm>
-            <a:off x="777240" y="1600200"/>
-            <a:ext cx="548640" cy="548640"/>
-          </a:xfrm>
-          <a:prstGeom prst="ellipse">
-            <a:avLst/>
-          </a:prstGeom>
-          <a:solidFill>
-            <a:srgbClr val="5B3FD0"/>
-          </a:solidFill>
-          <a:ln w="12700">
-            <a:solidFill>
-              <a:srgbClr val="5B3FD0"/>
-            </a:solidFill>
-            <a:prstDash val="solid"/>
-          </a:ln>
-        </p:spPr>
-      </p:sp>
-      <p:pic>
-        <p:nvPicPr>
-          <p:cNvPr id="7" name="Image 0" descr="preencoded.png">    </p:cNvPr>
-          <p:cNvPicPr>
-            <a:picLocks noChangeAspect="1"/>
-          </p:cNvPicPr>
-          <p:nvPr/>
-        </p:nvPicPr>
-        <p:blipFill>
-          <a:blip r:embed="rId1"/>
-          <a:stretch>
-            <a:fillRect/>
-          </a:stretch>
-        </p:blipFill>
-        <p:spPr>
-          <a:xfrm>
-            <a:off x="914400" y="1737360"/>
-            <a:ext cx="274320" cy="274320"/>
-          </a:xfrm>
-          <a:prstGeom prst="rect">
-            <a:avLst/>
-          </a:prstGeom>
-        </p:spPr>
-      </p:pic>
-      <p:sp>
-        <p:nvSpPr>
-          <p:cNvPr id="8" name="Text 4"/>
-          <p:cNvSpPr txBox="1"/>
-          <p:nvPr/>
-        </p:nvSpPr>
-        <p:spPr>
-          <a:xfrm>
-            <a:off x="1508760" y="1600200"/>
-            <a:ext cx="4251960" cy="548640"/>
-          </a:xfrm>
-          <a:prstGeom prst="rect">
-            <a:avLst/>
-          </a:prstGeom>
-          <a:noFill/>
-          <a:ln/>
-        </p:spPr>
-        <p:txBody>
-          <a:bodyPr wrap="square" lIns="0" tIns="0" rIns="0" bIns="0" rtlCol="0" anchor="ctr"/>
-          <a:lstStyle/>
-          <a:p>
-            <a:pPr indent="0" marL="0">
-              <a:buNone/>
-            </a:pPr>
-            <a:r>
-              <a:rPr lang="en-US" sz="1800" b="1" dirty="0">
-                <a:solidFill>
-                  <a:srgbClr val="22253A"/>
-                </a:solidFill>
-                <a:latin typeface="Calibri" pitchFamily="34" charset="0"/>
-                <a:ea typeface="Calibri" pitchFamily="34" charset="-122"/>
-                <a:cs typeface="Calibri" pitchFamily="34" charset="-120"/>
-              </a:rPr>
-              <a:t>Quando serve</a:t>
-            </a:r>
-            <a:endParaRPr lang="en-US" sz="1800" dirty="0"/>
-          </a:p>
-        </p:txBody>
-      </p:sp>
-      <p:sp>
-        <p:nvSpPr>
-          <p:cNvPr id="9" name="Text 5"/>
-          <p:cNvSpPr txBox="1"/>
-          <p:nvPr/>
-        </p:nvSpPr>
-        <p:spPr>
-          <a:xfrm>
-            <a:off x="777240" y="2286000"/>
-            <a:ext cx="4983480" cy="1280160"/>
-          </a:xfrm>
-          <a:prstGeom prst="rect">
-            <a:avLst/>
-          </a:prstGeom>
-          <a:noFill/>
-          <a:ln/>
-        </p:spPr>
-        <p:txBody>
-          <a:bodyPr wrap="square" lIns="0" tIns="0" rIns="0" bIns="0" rtlCol="0" anchor="t"/>
-          <a:lstStyle/>
-          <a:p>
-            <a:pPr marL="342900" indent="-342900">
-              <a:spcAft>
-                <a:spcPts val="600"/>
-              </a:spcAft>
-              <a:buSzPct val="100000"/>
-              <a:buChar char="•"/>
-            </a:pPr>
-            <a:r>
-              <a:rPr lang="en-US" sz="1500" dirty="0">
-                <a:solidFill>
-                  <a:srgbClr val="22253A"/>
-                </a:solidFill>
-                <a:latin typeface="Calibri" pitchFamily="34" charset="0"/>
-                <a:ea typeface="Calibri" pitchFamily="34" charset="-122"/>
-                <a:cs typeface="Calibri" pitchFamily="34" charset="-120"/>
-              </a:rPr>
-              <a:t>decidere chi la usa (key policy)</a:t>
-            </a:r>
-            <a:endParaRPr lang="en-US" sz="1500" dirty="0"/>
-          </a:p>
-          <a:p>
-            <a:pPr marL="342900" indent="-342900">
-              <a:spcAft>
-                <a:spcPts val="600"/>
-              </a:spcAft>
-              <a:buSzPct val="100000"/>
-              <a:buChar char="•"/>
-            </a:pPr>
-            <a:r>
-              <a:rPr lang="en-US" sz="1500" dirty="0">
-                <a:solidFill>
-                  <a:srgbClr val="22253A"/>
-                </a:solidFill>
-                <a:latin typeface="Calibri" pitchFamily="34" charset="0"/>
-                <a:ea typeface="Calibri" pitchFamily="34" charset="-122"/>
-                <a:cs typeface="Calibri" pitchFamily="34" charset="-120"/>
-              </a:rPr>
-              <a:t>condividere snapshot con un altro account</a:t>
-            </a:r>
-            <a:endParaRPr lang="en-US" sz="1500" dirty="0"/>
-          </a:p>
-          <a:p>
-            <a:pPr marL="342900" indent="-342900">
-              <a:spcAft>
-                <a:spcPts val="600"/>
-              </a:spcAft>
-              <a:buSzPct val="100000"/>
-              <a:buChar char="•"/>
-            </a:pPr>
-            <a:r>
-              <a:rPr lang="en-US" sz="1500" dirty="0">
-                <a:solidFill>
-                  <a:srgbClr val="22253A"/>
-                </a:solidFill>
-                <a:latin typeface="Calibri" pitchFamily="34" charset="0"/>
-                <a:ea typeface="Calibri" pitchFamily="34" charset="-122"/>
-                <a:cs typeface="Calibri" pitchFamily="34" charset="-120"/>
-              </a:rPr>
-              <a:t>SNS cifrato con gli allarmi (lezione 10)</a:t>
-            </a:r>
-            <a:endParaRPr lang="en-US" sz="1500" dirty="0"/>
-          </a:p>
-        </p:txBody>
-      </p:sp>
-      <p:sp>
-        <p:nvSpPr>
-          <p:cNvPr id="10" name="Shape 6"/>
-          <p:cNvSpPr/>
-          <p:nvPr/>
-        </p:nvSpPr>
-        <p:spPr>
-          <a:xfrm>
-            <a:off x="6172200" y="1371600"/>
-            <a:ext cx="5468112" cy="2377440"/>
-          </a:xfrm>
-          <a:prstGeom prst="roundRect">
-            <a:avLst>
-              <a:gd name="adj" fmla="val 4615"/>
-            </a:avLst>
-          </a:prstGeom>
-          <a:solidFill>
-            <a:srgbClr val="FDF0E3"/>
-          </a:solidFill>
-          <a:ln w="12700">
-            <a:solidFill>
-              <a:srgbClr val="FDF0E3"/>
-            </a:solidFill>
-            <a:prstDash val="solid"/>
-          </a:ln>
-        </p:spPr>
-      </p:sp>
-      <p:sp>
-        <p:nvSpPr>
-          <p:cNvPr id="11" name="Shape 7"/>
-          <p:cNvSpPr/>
-          <p:nvPr/>
-        </p:nvSpPr>
-        <p:spPr>
-          <a:xfrm>
-            <a:off x="6400800" y="1600200"/>
-            <a:ext cx="548640" cy="548640"/>
-          </a:xfrm>
-          <a:prstGeom prst="ellipse">
-            <a:avLst/>
-          </a:prstGeom>
-          <a:solidFill>
-            <a:srgbClr val="F28C28"/>
-          </a:solidFill>
-          <a:ln w="12700">
-            <a:solidFill>
-              <a:srgbClr val="F28C28"/>
-            </a:solidFill>
-            <a:prstDash val="solid"/>
-          </a:ln>
-        </p:spPr>
-      </p:sp>
-      <p:pic>
-        <p:nvPicPr>
-          <p:cNvPr id="12" name="Image 1" descr="preencoded.png">    </p:cNvPr>
-          <p:cNvPicPr>
-            <a:picLocks noChangeAspect="1"/>
-          </p:cNvPicPr>
-          <p:nvPr/>
-        </p:nvPicPr>
-        <p:blipFill>
-          <a:blip r:embed="rId2"/>
-          <a:stretch>
-            <a:fillRect/>
-          </a:stretch>
-        </p:blipFill>
-        <p:spPr>
-          <a:xfrm>
-            <a:off x="6537960" y="1737360"/>
-            <a:ext cx="274320" cy="274320"/>
-          </a:xfrm>
-          <a:prstGeom prst="rect">
-            <a:avLst/>
-          </a:prstGeom>
-        </p:spPr>
-      </p:pic>
-      <p:sp>
-        <p:nvSpPr>
-          <p:cNvPr id="13" name="Text 8"/>
-          <p:cNvSpPr txBox="1"/>
-          <p:nvPr/>
-        </p:nvSpPr>
-        <p:spPr>
-          <a:xfrm>
-            <a:off x="7132320" y="1600200"/>
-            <a:ext cx="4279392" cy="548640"/>
-          </a:xfrm>
-          <a:prstGeom prst="rect">
-            <a:avLst/>
-          </a:prstGeom>
-          <a:noFill/>
-          <a:ln/>
-        </p:spPr>
-        <p:txBody>
-          <a:bodyPr wrap="square" lIns="0" tIns="0" rIns="0" bIns="0" rtlCol="0" anchor="ctr"/>
-          <a:lstStyle/>
-          <a:p>
-            <a:pPr indent="0" marL="0">
-              <a:buNone/>
-            </a:pPr>
-            <a:r>
-              <a:rPr lang="en-US" sz="1800" b="1" dirty="0">
-                <a:solidFill>
-                  <a:srgbClr val="22253A"/>
-                </a:solidFill>
-                <a:latin typeface="Calibri" pitchFamily="34" charset="0"/>
-                <a:ea typeface="Calibri" pitchFamily="34" charset="-122"/>
-                <a:cs typeface="Calibri" pitchFamily="34" charset="-120"/>
-              </a:rPr>
-              <a:t>La key policy, sempre così</a:t>
-            </a:r>
-            <a:endParaRPr lang="en-US" sz="1800" dirty="0"/>
-          </a:p>
-        </p:txBody>
-      </p:sp>
-      <p:sp>
-        <p:nvSpPr>
-          <p:cNvPr id="14" name="Text 9"/>
-          <p:cNvSpPr txBox="1"/>
-          <p:nvPr/>
-        </p:nvSpPr>
-        <p:spPr>
-          <a:xfrm>
-            <a:off x="6400800" y="2286000"/>
-            <a:ext cx="5010912" cy="1280160"/>
-          </a:xfrm>
-          <a:prstGeom prst="rect">
-            <a:avLst/>
-          </a:prstGeom>
-          <a:noFill/>
-          <a:ln/>
-        </p:spPr>
-        <p:txBody>
-          <a:bodyPr wrap="square" lIns="0" tIns="0" rIns="0" bIns="0" rtlCol="0" anchor="t"/>
-          <a:lstStyle/>
-          <a:p>
-            <a:pPr marL="342900" indent="-342900">
-              <a:spcAft>
-                <a:spcPts val="600"/>
-              </a:spcAft>
-              <a:buSzPct val="100000"/>
-              <a:buChar char="•"/>
-            </a:pPr>
-            <a:r>
-              <a:rPr lang="en-US" sz="1500" dirty="0">
-                <a:solidFill>
-                  <a:srgbClr val="22253A"/>
-                </a:solidFill>
-                <a:latin typeface="Calibri" pitchFamily="34" charset="0"/>
-                <a:ea typeface="Calibri" pitchFamily="34" charset="-122"/>
-                <a:cs typeface="Calibri" pitchFamily="34" charset="-120"/>
-              </a:rPr>
-              <a:t>1. l'account (root) può tutto → decide IAM</a:t>
-            </a:r>
-            <a:endParaRPr lang="en-US" sz="1500" dirty="0"/>
-          </a:p>
-          <a:p>
-            <a:pPr marL="342900" indent="-342900">
-              <a:spcAft>
-                <a:spcPts val="600"/>
-              </a:spcAft>
-              <a:buSzPct val="100000"/>
-              <a:buChar char="•"/>
-            </a:pPr>
-            <a:r>
-              <a:rPr lang="en-US" sz="1500" dirty="0">
-                <a:solidFill>
-                  <a:srgbClr val="22253A"/>
-                </a:solidFill>
-                <a:latin typeface="Calibri" pitchFamily="34" charset="0"/>
-                <a:ea typeface="Calibri" pitchFamily="34" charset="-122"/>
-                <a:cs typeface="Calibri" pitchFamily="34" charset="-120"/>
-              </a:rPr>
-              <a:t>2. i servizi che la usano (CloudWatch, Auto Scaling)</a:t>
-            </a:r>
-            <a:endParaRPr lang="en-US" sz="1500" dirty="0"/>
-          </a:p>
-          <a:p>
-            <a:pPr marL="342900" indent="-342900">
-              <a:spcAft>
-                <a:spcPts val="600"/>
-              </a:spcAft>
-              <a:buSzPct val="100000"/>
-              <a:buChar char="•"/>
-            </a:pPr>
-            <a:r>
-              <a:rPr lang="en-US" sz="1500" dirty="0">
-                <a:solidFill>
-                  <a:srgbClr val="22253A"/>
-                </a:solidFill>
-                <a:latin typeface="Calibri" pitchFamily="34" charset="0"/>
-                <a:ea typeface="Calibri" pitchFamily="34" charset="-122"/>
-                <a:cs typeface="Calibri" pitchFamily="34" charset="-120"/>
-              </a:rPr>
-              <a:t>senza la 1, nemmeno l'admin la usa</a:t>
-            </a:r>
-            <a:endParaRPr lang="en-US" sz="1500" dirty="0"/>
-          </a:p>
-        </p:txBody>
-      </p:sp>
-      <p:sp>
-        <p:nvSpPr>
-          <p:cNvPr id="15" name="Shape 10"/>
-          <p:cNvSpPr/>
-          <p:nvPr/>
-        </p:nvSpPr>
-        <p:spPr>
-          <a:xfrm>
-            <a:off x="548640" y="3977640"/>
-            <a:ext cx="11094415" cy="1463040"/>
-          </a:xfrm>
-          <a:prstGeom prst="roundRect">
-            <a:avLst>
-              <a:gd name="adj" fmla="val 5000"/>
-            </a:avLst>
-          </a:prstGeom>
-          <a:solidFill>
-            <a:srgbClr val="1E1E2E"/>
-          </a:solidFill>
-          <a:ln w="12700">
-            <a:solidFill>
-              <a:srgbClr val="1E1E2E"/>
-            </a:solidFill>
-            <a:prstDash val="solid"/>
-          </a:ln>
-        </p:spPr>
-      </p:sp>
-      <p:sp>
-        <p:nvSpPr>
-          <p:cNvPr id="16" name="Text 11"/>
-          <p:cNvSpPr txBox="1"/>
-          <p:nvPr/>
-        </p:nvSpPr>
-        <p:spPr>
-          <a:xfrm>
-            <a:off x="731520" y="4050792"/>
-            <a:ext cx="10728655" cy="274320"/>
-          </a:xfrm>
-          <a:prstGeom prst="rect">
-            <a:avLst/>
-          </a:prstGeom>
-          <a:noFill/>
-          <a:ln/>
-        </p:spPr>
-        <p:txBody>
-          <a:bodyPr wrap="square" lIns="0" tIns="0" rIns="0" bIns="0" rtlCol="0" anchor="t"/>
-          <a:lstStyle/>
-          <a:p>
-            <a:pPr indent="0" marL="0">
-              <a:buNone/>
-            </a:pPr>
-            <a:r>
-              <a:rPr lang="en-US" sz="1300" b="1" dirty="0">
-                <a:solidFill>
-                  <a:srgbClr val="F2B880"/>
-                </a:solidFill>
-                <a:latin typeface="Calibri" pitchFamily="34" charset="0"/>
-                <a:ea typeface="Calibri" pitchFamily="34" charset="-122"/>
-                <a:cs typeface="Calibri" pitchFamily="34" charset="-120"/>
-              </a:rPr>
-              <a:t>monitoring.tf</a:t>
-            </a:r>
-            <a:endParaRPr lang="en-US" sz="1300" dirty="0"/>
-          </a:p>
-        </p:txBody>
-      </p:sp>
-      <p:sp>
-        <p:nvSpPr>
-          <p:cNvPr id="17" name="Text 12"/>
-          <p:cNvSpPr txBox="1"/>
-          <p:nvPr/>
-        </p:nvSpPr>
-        <p:spPr>
-          <a:xfrm>
-            <a:off x="731520" y="4389120"/>
-            <a:ext cx="10728655" cy="914400"/>
-          </a:xfrm>
-          <a:prstGeom prst="rect">
-            <a:avLst/>
-          </a:prstGeom>
-          <a:noFill/>
-          <a:ln/>
-        </p:spPr>
-        <p:txBody>
-          <a:bodyPr wrap="square" lIns="0" tIns="0" rIns="0" bIns="0" rtlCol="0" anchor="t"/>
-          <a:lstStyle/>
-          <a:p>
-            <a:pPr indent="0" marL="0">
-              <a:buNone/>
-            </a:pPr>
-            <a:r>
-              <a:rPr lang="en-US" sz="1600" dirty="0">
-                <a:solidFill>
-                  <a:srgbClr val="E6E6F0"/>
-                </a:solidFill>
-                <a:latin typeface="Courier New" pitchFamily="34" charset="0"/>
-                <a:ea typeface="Courier New" pitchFamily="34" charset="-122"/>
-                <a:cs typeface="Courier New" pitchFamily="34" charset="-120"/>
-              </a:rPr>
-              <a:t>resource "aws_sns_topic" "alerts" {</a:t>
-            </a:r>
-            <a:endParaRPr lang="en-US" sz="1600" dirty="0"/>
-          </a:p>
-          <a:p>
-            <a:pPr indent="0" marL="0">
-              <a:buNone/>
-            </a:pPr>
-            <a:r>
-              <a:rPr lang="en-US" sz="1600" dirty="0">
-                <a:solidFill>
-                  <a:srgbClr val="E6E6F0"/>
-                </a:solidFill>
-                <a:latin typeface="Courier New" pitchFamily="34" charset="0"/>
-                <a:ea typeface="Courier New" pitchFamily="34" charset="-122"/>
-                <a:cs typeface="Courier New" pitchFamily="34" charset="-120"/>
-              </a:rPr>
-              <a:t>  name              = "${var.project}-alerts"</a:t>
-            </a:r>
-            <a:endParaRPr lang="en-US" sz="1600" dirty="0"/>
-          </a:p>
-          <a:p>
-            <a:pPr indent="0" marL="0">
-              <a:buNone/>
-            </a:pPr>
-            <a:r>
-              <a:rPr lang="en-US" sz="1600" dirty="0">
-                <a:solidFill>
-                  <a:srgbClr val="E6E6F0"/>
-                </a:solidFill>
-                <a:latin typeface="Courier New" pitchFamily="34" charset="0"/>
-                <a:ea typeface="Courier New" pitchFamily="34" charset="-122"/>
-                <a:cs typeface="Courier New" pitchFamily="34" charset="-120"/>
-              </a:rPr>
-              <a:t>  kms_master_key_id = aws_kms_alias.alerts.name     </a:t>
-            </a:r>
-            <a:pPr indent="0" marL="0">
-              <a:buNone/>
-            </a:pPr>
-            <a:r>
-              <a:rPr lang="en-US" sz="1600" dirty="0">
-                <a:solidFill>
-                  <a:srgbClr val="8FD694"/>
-                </a:solidFill>
-                <a:latin typeface="Courier New" pitchFamily="34" charset="0"/>
-                <a:ea typeface="Courier New" pitchFamily="34" charset="-122"/>
-                <a:cs typeface="Courier New" pitchFamily="34" charset="-120"/>
-              </a:rPr>
-              <a:t># la chiave nostra</a:t>
-            </a:r>
-            <a:endParaRPr lang="en-US" sz="1600" dirty="0"/>
-          </a:p>
-          <a:p>
-            <a:pPr indent="0" marL="0">
-              <a:buNone/>
-            </a:pPr>
-            <a:r>
-              <a:rPr lang="en-US" sz="1600" dirty="0">
-                <a:solidFill>
-                  <a:srgbClr val="E6E6F0"/>
-                </a:solidFill>
-                <a:latin typeface="Courier New" pitchFamily="34" charset="0"/>
-                <a:ea typeface="Courier New" pitchFamily="34" charset="-122"/>
-                <a:cs typeface="Courier New" pitchFamily="34" charset="-120"/>
-              </a:rPr>
-              <a:t>}</a:t>
-            </a:r>
-            <a:endParaRPr lang="en-US" sz="1600" dirty="0"/>
-          </a:p>
-        </p:txBody>
-      </p:sp>
-      <p:sp>
-        <p:nvSpPr>
-          <p:cNvPr id="18" name="Text 13"/>
-          <p:cNvSpPr txBox="1"/>
-          <p:nvPr/>
-        </p:nvSpPr>
-        <p:spPr>
-          <a:xfrm>
-            <a:off x="548640" y="5577840"/>
-            <a:ext cx="11094415" cy="548640"/>
-          </a:xfrm>
-          <a:prstGeom prst="rect">
-            <a:avLst/>
-          </a:prstGeom>
-          <a:noFill/>
-          <a:ln/>
-        </p:spPr>
-        <p:txBody>
-          <a:bodyPr wrap="square" lIns="0" tIns="0" rIns="0" bIns="0" rtlCol="0" anchor="ctr"/>
-          <a:lstStyle/>
-          <a:p>
-            <a:pPr algn="l" indent="0" marL="0">
-              <a:buNone/>
-            </a:pPr>
-            <a:r>
-              <a:rPr lang="en-US" sz="1500" i="1" dirty="0">
-                <a:solidFill>
-                  <a:srgbClr val="5F6478"/>
-                </a:solidFill>
-                <a:latin typeface="Calibri" pitchFamily="34" charset="0"/>
-                <a:ea typeface="Calibri" pitchFamily="34" charset="-122"/>
-                <a:cs typeface="Calibri" pitchFamily="34" charset="-120"/>
-              </a:rPr>
-              <a:t>RDS: la chiave si sceglie alla creazione. Per cambiarla: snapshot → copia cifrata → database nuovo.</a:t>
-            </a:r>
-            <a:endParaRPr lang="en-US" sz="1500" dirty="0"/>
-          </a:p>
-        </p:txBody>
-      </p:sp>
-      <p:sp>
-        <p:nvSpPr>
-          <p:cNvPr id="25" name="Slide Number Placeholder 0"/>
-          <p:cNvSpPr>
-            <a:spLocks noGrp="1"/>
-          </p:cNvSpPr>
-          <p:nvPr>
-            <p:ph type="sldNum" sz="quarter" idx="4294967295"/>
-          </p:nvPr>
-        </p:nvSpPr>
-        <p:spPr>
-          <a:xfrm>
-            <a:off x="11155680" y="6400800"/>
-            <a:ext cx="548640" cy="274320"/>
-          </a:xfrm>
-          <a:prstGeom prst="rect">
-            <a:avLst/>
-          </a:prstGeom>
-          <a:extLst>
-            <a:ext uri="{C572A759-6A51-4108-AA02-DFA0A04FC94B}">
-              <ma14:wrappingTextBoxFlag xmlns:ma14="http://schemas.microsoft.com/office/mac/drawingml/2011/main" val="0"/>
-            </a:ext>
-          </a:extLst>
-        </p:spPr>
-        <p:txBody>
-          <a:bodyPr/>
-          <a:lstStyle>
-            <a:lvl1pPr>
-              <a:defRPr sz="1000">
-                <a:solidFill>
-                  <a:srgbClr val="5F6478"/>
-                </a:solidFill>
-                <a:latin typeface="Calibri"/>
-                <a:ea typeface="Calibri"/>
-                <a:cs typeface="Calibri"/>
-              </a:defRPr>
-            </a:lvl1pPr>
-          </a:lstStyle>
-          <a:p>
-            <a:pPr algn="r"/>
-            <a:fld id="{F7021451-1387-4CA6-816F-3879F97B5CBC}" type="slidenum">
-              <a:rPr b="0" lang="en-US"/>
-              <a:t>7</a:t>
-            </a:fld>
-            <a:endParaRPr lang="en-US"/>
-          </a:p>
-        </p:txBody>
-      </p:sp>
-    </p:spTree>
-  </p:cSld>
-  <p:clrMapOvr>
-    <a:masterClrMapping/>
-  </p:clrMapOvr>
-</p:sld>
-</file>
-
-<file path=ppt/slides/slide8.xml><?xml version="1.0" encoding="utf-8"?>
-<p:sld xmlns:a="http://schemas.openxmlformats.org/drawingml/2006/main" xmlns:r="http://schemas.openxmlformats.org/officeDocument/2006/relationships" xmlns:p="http://schemas.openxmlformats.org/presentationml/2006/main">
-  <p:cSld name="Slide 8">
-    <p:bg>
-      <p:bgPr>
-        <a:solidFill>
-          <a:srgbClr val="FFFFFF"/>
-        </a:solidFill>
-      </p:bgPr>
-    </p:bg>
-    <p:spTree>
-      <p:nvGrpSpPr>
-        <p:cNvPr id="1" name=""/>
-        <p:cNvGrpSpPr/>
-        <p:nvPr/>
-      </p:nvGrpSpPr>
-      <p:grpSpPr>
-        <a:xfrm>
-          <a:off x="0" y="0"/>
-          <a:ext cx="0" cy="0"/>
-          <a:chOff x="0" y="0"/>
-          <a:chExt cx="0" cy="0"/>
-        </a:xfrm>
-      </p:grpSpPr>
-      <p:sp>
-        <p:nvSpPr>
-          <p:cNvPr id="2" name="Text 0"/>
-          <p:cNvSpPr txBox="1"/>
-          <p:nvPr/>
-        </p:nvSpPr>
-        <p:spPr>
-          <a:xfrm>
-            <a:off x="548640" y="365760"/>
-            <a:ext cx="11094415" cy="777240"/>
-          </a:xfrm>
-          <a:prstGeom prst="rect">
-            <a:avLst/>
-          </a:prstGeom>
-          <a:noFill/>
-          <a:ln/>
-        </p:spPr>
-        <p:txBody>
-          <a:bodyPr wrap="square" lIns="0" tIns="0" rIns="0" bIns="0" rtlCol="0" anchor="ctr"/>
-          <a:lstStyle/>
-          <a:p>
-            <a:pPr indent="0" marL="0">
-              <a:buNone/>
-            </a:pPr>
-            <a:r>
-              <a:rPr lang="en-US" sz="3200" b="1" dirty="0">
-                <a:solidFill>
-                  <a:srgbClr val="22253A"/>
-                </a:solidFill>
-                <a:latin typeface="Calibri" pitchFamily="34" charset="0"/>
-                <a:ea typeface="Calibri" pitchFamily="34" charset="-122"/>
-                <a:cs typeface="Calibri" pitchFamily="34" charset="-120"/>
-              </a:rPr>
-              <a:t>Nel database con IAM, senza password</a:t>
-            </a:r>
-            <a:endParaRPr lang="en-US" sz="3200" dirty="0"/>
-          </a:p>
-        </p:txBody>
-      </p:sp>
-      <p:sp>
-        <p:nvSpPr>
-          <p:cNvPr id="3" name="Text 1"/>
-          <p:cNvSpPr txBox="1"/>
-          <p:nvPr/>
-        </p:nvSpPr>
-        <p:spPr>
-          <a:xfrm>
-            <a:off x="548640" y="6400800"/>
-            <a:ext cx="7315200" cy="274320"/>
-          </a:xfrm>
-          <a:prstGeom prst="rect">
-            <a:avLst/>
-          </a:prstGeom>
-          <a:noFill/>
-          <a:ln/>
-        </p:spPr>
-        <p:txBody>
-          <a:bodyPr wrap="square" lIns="0" tIns="0" rIns="0" bIns="0" rtlCol="0" anchor="ctr"/>
-          <a:lstStyle/>
-          <a:p>
-            <a:pPr indent="0" marL="0">
-              <a:buNone/>
-            </a:pPr>
-            <a:r>
-              <a:rPr lang="en-US" sz="1000" dirty="0">
-                <a:solidFill>
-                  <a:srgbClr val="5F6478"/>
-                </a:solidFill>
-                <a:latin typeface="Calibri" pitchFamily="34" charset="0"/>
-                <a:ea typeface="Calibri" pitchFamily="34" charset="-122"/>
-                <a:cs typeface="Calibri" pitchFamily="34" charset="-120"/>
-              </a:rPr>
-              <a:t>Appendice A · IAM avanzato e audit</a:t>
-            </a:r>
-            <a:endParaRPr lang="en-US" sz="1000" dirty="0"/>
-          </a:p>
-        </p:txBody>
-      </p:sp>
-      <p:sp>
-        <p:nvSpPr>
-          <p:cNvPr id="5" name="Shape 2"/>
-          <p:cNvSpPr/>
-          <p:nvPr/>
-        </p:nvSpPr>
-        <p:spPr>
-          <a:xfrm>
-            <a:off x="548640" y="1371600"/>
-            <a:ext cx="3566160" cy="2103120"/>
-          </a:xfrm>
-          <a:prstGeom prst="roundRect">
-            <a:avLst>
-              <a:gd name="adj" fmla="val 5217"/>
-            </a:avLst>
-          </a:prstGeom>
-          <a:solidFill>
-            <a:srgbClr val="EEEAFB"/>
-          </a:solidFill>
-          <a:ln w="12700">
-            <a:solidFill>
-              <a:srgbClr val="EEEAFB"/>
-            </a:solidFill>
-            <a:prstDash val="solid"/>
-          </a:ln>
-        </p:spPr>
-      </p:sp>
-      <p:sp>
-        <p:nvSpPr>
-          <p:cNvPr id="6" name="Shape 3"/>
-          <p:cNvSpPr/>
-          <p:nvPr/>
-        </p:nvSpPr>
-        <p:spPr>
-          <a:xfrm>
-            <a:off x="777240" y="1600200"/>
-            <a:ext cx="548640" cy="548640"/>
-          </a:xfrm>
-          <a:prstGeom prst="ellipse">
-            <a:avLst/>
-          </a:prstGeom>
-          <a:solidFill>
-            <a:srgbClr val="5B3FD0"/>
-          </a:solidFill>
-          <a:ln w="12700">
-            <a:solidFill>
-              <a:srgbClr val="5B3FD0"/>
-            </a:solidFill>
-            <a:prstDash val="solid"/>
-          </a:ln>
-        </p:spPr>
-      </p:sp>
-      <p:pic>
-        <p:nvPicPr>
-          <p:cNvPr id="7" name="Image 0" descr="preencoded.png">    </p:cNvPr>
-          <p:cNvPicPr>
-            <a:picLocks noChangeAspect="1"/>
-          </p:cNvPicPr>
-          <p:nvPr/>
-        </p:nvPicPr>
-        <p:blipFill>
-          <a:blip r:embed="rId1"/>
-          <a:stretch>
-            <a:fillRect/>
-          </a:stretch>
-        </p:blipFill>
-        <p:spPr>
-          <a:xfrm>
-            <a:off x="914400" y="1737360"/>
-            <a:ext cx="274320" cy="274320"/>
-          </a:xfrm>
-          <a:prstGeom prst="rect">
-            <a:avLst/>
-          </a:prstGeom>
-        </p:spPr>
-      </p:pic>
-      <p:sp>
-        <p:nvSpPr>
-          <p:cNvPr id="8" name="Text 4"/>
-          <p:cNvSpPr txBox="1"/>
-          <p:nvPr/>
-        </p:nvSpPr>
-        <p:spPr>
-          <a:xfrm>
-            <a:off x="1508760" y="1600200"/>
-            <a:ext cx="2377440" cy="548640"/>
-          </a:xfrm>
-          <a:prstGeom prst="rect">
-            <a:avLst/>
-          </a:prstGeom>
-          <a:noFill/>
-          <a:ln/>
-        </p:spPr>
-        <p:txBody>
-          <a:bodyPr wrap="square" lIns="0" tIns="0" rIns="0" bIns="0" rtlCol="0" anchor="ctr"/>
-          <a:lstStyle/>
-          <a:p>
-            <a:pPr indent="0" marL="0">
-              <a:buNone/>
-            </a:pPr>
-            <a:r>
-              <a:rPr lang="en-US" sz="1800" b="1" dirty="0">
-                <a:solidFill>
-                  <a:srgbClr val="22253A"/>
-                </a:solidFill>
-                <a:latin typeface="Calibri" pitchFamily="34" charset="0"/>
-                <a:ea typeface="Calibri" pitchFamily="34" charset="-122"/>
-                <a:cs typeface="Calibri" pitchFamily="34" charset="-120"/>
-              </a:rPr>
-              <a:t>1. Sul database</a:t>
-            </a:r>
-            <a:endParaRPr lang="en-US" sz="1800" dirty="0"/>
-          </a:p>
-        </p:txBody>
-      </p:sp>
-      <p:sp>
-        <p:nvSpPr>
-          <p:cNvPr id="9" name="Text 5"/>
-          <p:cNvSpPr txBox="1"/>
-          <p:nvPr/>
-        </p:nvSpPr>
-        <p:spPr>
-          <a:xfrm>
-            <a:off x="777240" y="2286000"/>
-            <a:ext cx="3108960" cy="1005840"/>
-          </a:xfrm>
-          <a:prstGeom prst="rect">
-            <a:avLst/>
-          </a:prstGeom>
-          <a:noFill/>
-          <a:ln/>
-        </p:spPr>
-        <p:txBody>
-          <a:bodyPr wrap="square" lIns="0" tIns="0" rIns="0" bIns="0" rtlCol="0" anchor="t"/>
-          <a:lstStyle/>
-          <a:p>
-            <a:pPr indent="0" marL="0">
-              <a:spcAft>
-                <a:spcPts val="600"/>
-              </a:spcAft>
-              <a:buNone/>
-            </a:pPr>
-            <a:r>
-              <a:rPr lang="en-US" sz="1400" dirty="0">
-                <a:solidFill>
-                  <a:srgbClr val="22253A"/>
-                </a:solidFill>
-                <a:latin typeface="Calibri" pitchFamily="34" charset="0"/>
-                <a:ea typeface="Calibri" pitchFamily="34" charset="-122"/>
-                <a:cs typeface="Calibri" pitchFamily="34" charset="-120"/>
-              </a:rPr>
-              <a:t>iam_database_authentication_enabled = true</a:t>
-            </a:r>
-            <a:endParaRPr lang="en-US" sz="1400" dirty="0"/>
-          </a:p>
-        </p:txBody>
-      </p:sp>
-      <p:sp>
-        <p:nvSpPr>
-          <p:cNvPr id="10" name="Shape 6"/>
-          <p:cNvSpPr/>
-          <p:nvPr/>
-        </p:nvSpPr>
-        <p:spPr>
-          <a:xfrm>
-            <a:off x="4297680" y="1371600"/>
-            <a:ext cx="3566160" cy="2103120"/>
-          </a:xfrm>
-          <a:prstGeom prst="roundRect">
-            <a:avLst>
-              <a:gd name="adj" fmla="val 5217"/>
-            </a:avLst>
-          </a:prstGeom>
-          <a:solidFill>
-            <a:srgbClr val="EEEAFB"/>
-          </a:solidFill>
-          <a:ln w="12700">
-            <a:solidFill>
-              <a:srgbClr val="EEEAFB"/>
-            </a:solidFill>
-            <a:prstDash val="solid"/>
-          </a:ln>
-        </p:spPr>
-      </p:sp>
-      <p:sp>
-        <p:nvSpPr>
-          <p:cNvPr id="11" name="Shape 7"/>
-          <p:cNvSpPr/>
-          <p:nvPr/>
-        </p:nvSpPr>
-        <p:spPr>
-          <a:xfrm>
-            <a:off x="4526280" y="1600200"/>
-            <a:ext cx="548640" cy="548640"/>
-          </a:xfrm>
-          <a:prstGeom prst="ellipse">
-            <a:avLst/>
-          </a:prstGeom>
-          <a:solidFill>
-            <a:srgbClr val="5B3FD0"/>
-          </a:solidFill>
-          <a:ln w="12700">
-            <a:solidFill>
-              <a:srgbClr val="5B3FD0"/>
-            </a:solidFill>
-            <a:prstDash val="solid"/>
-          </a:ln>
-        </p:spPr>
-      </p:sp>
-      <p:pic>
-        <p:nvPicPr>
-          <p:cNvPr id="12" name="Image 1" descr="preencoded.png">    </p:cNvPr>
-          <p:cNvPicPr>
-            <a:picLocks noChangeAspect="1"/>
-          </p:cNvPicPr>
-          <p:nvPr/>
-        </p:nvPicPr>
-        <p:blipFill>
-          <a:blip r:embed="rId2"/>
-          <a:stretch>
-            <a:fillRect/>
-          </a:stretch>
-        </p:blipFill>
-        <p:spPr>
-          <a:xfrm>
-            <a:off x="4663440" y="1737360"/>
-            <a:ext cx="274320" cy="274320"/>
-          </a:xfrm>
-          <a:prstGeom prst="rect">
-            <a:avLst/>
-          </a:prstGeom>
-        </p:spPr>
-      </p:pic>
-      <p:sp>
-        <p:nvSpPr>
-          <p:cNvPr id="13" name="Text 8"/>
-          <p:cNvSpPr txBox="1"/>
-          <p:nvPr/>
-        </p:nvSpPr>
-        <p:spPr>
-          <a:xfrm>
-            <a:off x="5257800" y="1600200"/>
-            <a:ext cx="2377440" cy="548640"/>
-          </a:xfrm>
-          <a:prstGeom prst="rect">
-            <a:avLst/>
-          </a:prstGeom>
-          <a:noFill/>
-          <a:ln/>
-        </p:spPr>
-        <p:txBody>
-          <a:bodyPr wrap="square" lIns="0" tIns="0" rIns="0" bIns="0" rtlCol="0" anchor="ctr"/>
-          <a:lstStyle/>
-          <a:p>
-            <a:pPr indent="0" marL="0">
-              <a:buNone/>
-            </a:pPr>
-            <a:r>
-              <a:rPr lang="en-US" sz="1800" b="1" dirty="0">
-                <a:solidFill>
-                  <a:srgbClr val="22253A"/>
-                </a:solidFill>
-                <a:latin typeface="Calibri" pitchFamily="34" charset="0"/>
-                <a:ea typeface="Calibri" pitchFamily="34" charset="-122"/>
-                <a:cs typeface="Calibri" pitchFamily="34" charset="-120"/>
-              </a:rPr>
-              <a:t>2. Nel database</a:t>
-            </a:r>
-            <a:endParaRPr lang="en-US" sz="1800" dirty="0"/>
-          </a:p>
-        </p:txBody>
-      </p:sp>
-      <p:sp>
-        <p:nvSpPr>
-          <p:cNvPr id="14" name="Text 9"/>
-          <p:cNvSpPr txBox="1"/>
-          <p:nvPr/>
-        </p:nvSpPr>
-        <p:spPr>
-          <a:xfrm>
-            <a:off x="4526280" y="2286000"/>
-            <a:ext cx="3108960" cy="1005840"/>
-          </a:xfrm>
-          <a:prstGeom prst="rect">
-            <a:avLst/>
-          </a:prstGeom>
-          <a:noFill/>
-          <a:ln/>
-        </p:spPr>
-        <p:txBody>
-          <a:bodyPr wrap="square" lIns="0" tIns="0" rIns="0" bIns="0" rtlCol="0" anchor="t"/>
-          <a:lstStyle/>
-          <a:p>
-            <a:pPr indent="0" marL="0">
-              <a:spcAft>
-                <a:spcPts val="600"/>
-              </a:spcAft>
-              <a:buNone/>
-            </a:pPr>
-            <a:r>
-              <a:rPr lang="en-US" sz="1400" dirty="0">
-                <a:solidFill>
-                  <a:srgbClr val="22253A"/>
-                </a:solidFill>
-                <a:latin typeface="Calibri" pitchFamily="34" charset="0"/>
-                <a:ea typeface="Calibri" pitchFamily="34" charset="-122"/>
-                <a:cs typeface="Calibri" pitchFamily="34" charset="-120"/>
-              </a:rPr>
-              <a:t>CREATE USER mario; GRANT rds_iam TO mario;</a:t>
-            </a:r>
-            <a:endParaRPr lang="en-US" sz="1400" dirty="0"/>
-          </a:p>
-        </p:txBody>
-      </p:sp>
-      <p:sp>
-        <p:nvSpPr>
-          <p:cNvPr id="15" name="Shape 10"/>
-          <p:cNvSpPr/>
-          <p:nvPr/>
-        </p:nvSpPr>
-        <p:spPr>
-          <a:xfrm>
-            <a:off x="8046720" y="1371600"/>
-            <a:ext cx="3566160" cy="2103120"/>
-          </a:xfrm>
-          <a:prstGeom prst="roundRect">
-            <a:avLst>
-              <a:gd name="adj" fmla="val 5217"/>
-            </a:avLst>
-          </a:prstGeom>
-          <a:solidFill>
-            <a:srgbClr val="EEEAFB"/>
-          </a:solidFill>
-          <a:ln w="12700">
-            <a:solidFill>
-              <a:srgbClr val="EEEAFB"/>
-            </a:solidFill>
-            <a:prstDash val="solid"/>
-          </a:ln>
-        </p:spPr>
-      </p:sp>
-      <p:sp>
-        <p:nvSpPr>
-          <p:cNvPr id="16" name="Shape 11"/>
-          <p:cNvSpPr/>
-          <p:nvPr/>
-        </p:nvSpPr>
-        <p:spPr>
-          <a:xfrm>
-            <a:off x="8275320" y="1600200"/>
-            <a:ext cx="548640" cy="548640"/>
-          </a:xfrm>
-          <a:prstGeom prst="ellipse">
-            <a:avLst/>
-          </a:prstGeom>
-          <a:solidFill>
-            <a:srgbClr val="5B3FD0"/>
-          </a:solidFill>
-          <a:ln w="12700">
-            <a:solidFill>
-              <a:srgbClr val="5B3FD0"/>
-            </a:solidFill>
-            <a:prstDash val="solid"/>
-          </a:ln>
-        </p:spPr>
-      </p:sp>
-      <p:pic>
-        <p:nvPicPr>
-          <p:cNvPr id="17" name="Image 2" descr="preencoded.png">    </p:cNvPr>
-          <p:cNvPicPr>
-            <a:picLocks noChangeAspect="1"/>
-          </p:cNvPicPr>
-          <p:nvPr/>
-        </p:nvPicPr>
-        <p:blipFill>
-          <a:blip r:embed="rId3"/>
-          <a:stretch>
-            <a:fillRect/>
-          </a:stretch>
-        </p:blipFill>
-        <p:spPr>
-          <a:xfrm>
-            <a:off x="8412480" y="1737360"/>
-            <a:ext cx="274320" cy="274320"/>
-          </a:xfrm>
-          <a:prstGeom prst="rect">
-            <a:avLst/>
-          </a:prstGeom>
-        </p:spPr>
-      </p:pic>
-      <p:sp>
-        <p:nvSpPr>
-          <p:cNvPr id="18" name="Text 12"/>
-          <p:cNvSpPr txBox="1"/>
-          <p:nvPr/>
-        </p:nvSpPr>
-        <p:spPr>
-          <a:xfrm>
-            <a:off x="9006840" y="1600200"/>
-            <a:ext cx="2377440" cy="548640"/>
-          </a:xfrm>
-          <a:prstGeom prst="rect">
-            <a:avLst/>
-          </a:prstGeom>
-          <a:noFill/>
-          <a:ln/>
-        </p:spPr>
-        <p:txBody>
-          <a:bodyPr wrap="square" lIns="0" tIns="0" rIns="0" bIns="0" rtlCol="0" anchor="ctr"/>
-          <a:lstStyle/>
-          <a:p>
-            <a:pPr indent="0" marL="0">
-              <a:buNone/>
-            </a:pPr>
-            <a:r>
-              <a:rPr lang="en-US" sz="1800" b="1" dirty="0">
-                <a:solidFill>
-                  <a:srgbClr val="22253A"/>
-                </a:solidFill>
-                <a:latin typeface="Calibri" pitchFamily="34" charset="0"/>
-                <a:ea typeface="Calibri" pitchFamily="34" charset="-122"/>
-                <a:cs typeface="Calibri" pitchFamily="34" charset="-120"/>
-              </a:rPr>
-              <a:t>3. In IAM</a:t>
-            </a:r>
-            <a:endParaRPr lang="en-US" sz="1800" dirty="0"/>
-          </a:p>
-        </p:txBody>
-      </p:sp>
-      <p:sp>
-        <p:nvSpPr>
-          <p:cNvPr id="19" name="Text 13"/>
-          <p:cNvSpPr txBox="1"/>
-          <p:nvPr/>
-        </p:nvSpPr>
-        <p:spPr>
-          <a:xfrm>
-            <a:off x="8275320" y="2286000"/>
-            <a:ext cx="3108960" cy="1005840"/>
-          </a:xfrm>
-          <a:prstGeom prst="rect">
-            <a:avLst/>
-          </a:prstGeom>
-          <a:noFill/>
-          <a:ln/>
-        </p:spPr>
-        <p:txBody>
-          <a:bodyPr wrap="square" lIns="0" tIns="0" rIns="0" bIns="0" rtlCol="0" anchor="t"/>
-          <a:lstStyle/>
-          <a:p>
-            <a:pPr indent="0" marL="0">
-              <a:spcAft>
-                <a:spcPts val="600"/>
-              </a:spcAft>
-              <a:buNone/>
-            </a:pPr>
-            <a:r>
-              <a:rPr lang="en-US" sz="1400" dirty="0">
-                <a:solidFill>
-                  <a:srgbClr val="22253A"/>
-                </a:solidFill>
-                <a:latin typeface="Calibri" pitchFamily="34" charset="0"/>
-                <a:ea typeface="Calibri" pitchFamily="34" charset="-122"/>
-                <a:cs typeface="Calibri" pitchFamily="34" charset="-120"/>
-              </a:rPr>
-              <a:t>rds-db:connect su quell'utente</a:t>
-            </a:r>
-            <a:endParaRPr lang="en-US" sz="1400" dirty="0"/>
-          </a:p>
-        </p:txBody>
-      </p:sp>
-      <p:sp>
-        <p:nvSpPr>
-          <p:cNvPr id="20" name="Shape 14"/>
-          <p:cNvSpPr/>
-          <p:nvPr/>
-        </p:nvSpPr>
-        <p:spPr>
-          <a:xfrm>
-            <a:off x="548640" y="3703320"/>
-            <a:ext cx="11094415" cy="1463040"/>
-          </a:xfrm>
-          <a:prstGeom prst="roundRect">
-            <a:avLst>
-              <a:gd name="adj" fmla="val 5000"/>
-            </a:avLst>
-          </a:prstGeom>
-          <a:solidFill>
-            <a:srgbClr val="1E1E2E"/>
-          </a:solidFill>
-          <a:ln w="12700">
-            <a:solidFill>
-              <a:srgbClr val="1E1E2E"/>
-            </a:solidFill>
-            <a:prstDash val="solid"/>
-          </a:ln>
-        </p:spPr>
-      </p:sp>
-      <p:sp>
-        <p:nvSpPr>
-          <p:cNvPr id="21" name="Text 15"/>
-          <p:cNvSpPr txBox="1"/>
-          <p:nvPr/>
-        </p:nvSpPr>
-        <p:spPr>
-          <a:xfrm>
-            <a:off x="731520" y="3776472"/>
-            <a:ext cx="10728655" cy="274320"/>
-          </a:xfrm>
-          <a:prstGeom prst="rect">
-            <a:avLst/>
-          </a:prstGeom>
-          <a:noFill/>
-          <a:ln/>
-        </p:spPr>
-        <p:txBody>
-          <a:bodyPr wrap="square" lIns="0" tIns="0" rIns="0" bIns="0" rtlCol="0" anchor="t"/>
-          <a:lstStyle/>
-          <a:p>
-            <a:pPr indent="0" marL="0">
-              <a:buNone/>
-            </a:pPr>
-            <a:r>
-              <a:rPr lang="en-US" sz="1300" b="1" dirty="0">
-                <a:solidFill>
-                  <a:srgbClr val="F2B880"/>
-                </a:solidFill>
-                <a:latin typeface="Calibri" pitchFamily="34" charset="0"/>
-                <a:ea typeface="Calibri" pitchFamily="34" charset="-122"/>
-                <a:cs typeface="Calibri" pitchFamily="34" charset="-120"/>
-              </a:rPr>
-              <a:t>dal tuo computer, con il login SSO</a:t>
-            </a:r>
-            <a:endParaRPr lang="en-US" sz="1300" dirty="0"/>
-          </a:p>
-        </p:txBody>
-      </p:sp>
-      <p:sp>
-        <p:nvSpPr>
-          <p:cNvPr id="22" name="Text 16"/>
-          <p:cNvSpPr txBox="1"/>
-          <p:nvPr/>
-        </p:nvSpPr>
-        <p:spPr>
-          <a:xfrm>
-            <a:off x="731520" y="4114800"/>
-            <a:ext cx="10728655" cy="914400"/>
-          </a:xfrm>
-          <a:prstGeom prst="rect">
-            <a:avLst/>
-          </a:prstGeom>
-          <a:noFill/>
-          <a:ln/>
-        </p:spPr>
-        <p:txBody>
-          <a:bodyPr wrap="square" lIns="0" tIns="0" rIns="0" bIns="0" rtlCol="0" anchor="t"/>
-          <a:lstStyle/>
-          <a:p>
-            <a:pPr indent="0" marL="0">
-              <a:buNone/>
-            </a:pPr>
-            <a:r>
-              <a:rPr lang="en-US" sz="1600" dirty="0">
-                <a:solidFill>
-                  <a:srgbClr val="E6E6F0"/>
-                </a:solidFill>
-                <a:latin typeface="Courier New" pitchFamily="34" charset="0"/>
-                <a:ea typeface="Courier New" pitchFamily="34" charset="-122"/>
-                <a:cs typeface="Courier New" pitchFamily="34" charset="-120"/>
-              </a:rPr>
-              <a:t>export PGPASSWORD=$(aws rds generate-db-auth-token \</a:t>
-            </a:r>
-            <a:endParaRPr lang="en-US" sz="1600" dirty="0"/>
-          </a:p>
-          <a:p>
-            <a:pPr indent="0" marL="0">
-              <a:buNone/>
-            </a:pPr>
-            <a:r>
-              <a:rPr lang="en-US" sz="1600" dirty="0">
-                <a:solidFill>
-                  <a:srgbClr val="E6E6F0"/>
-                </a:solidFill>
-                <a:latin typeface="Courier New" pitchFamily="34" charset="0"/>
-                <a:ea typeface="Courier New" pitchFamily="34" charset="-122"/>
-                <a:cs typeface="Courier New" pitchFamily="34" charset="-120"/>
-              </a:rPr>
-              <a:t>  --hostname "$(terraform output -raw db_address)" --port 5432 --username mario)</a:t>
-            </a:r>
-            <a:endParaRPr lang="en-US" sz="1600" dirty="0"/>
-          </a:p>
-          <a:p>
-            <a:pPr indent="0" marL="0">
-              <a:buNone/>
-            </a:pPr>
-            <a:r>
-              <a:rPr lang="en-US" sz="1600" dirty="0">
-                <a:solidFill>
-                  <a:srgbClr val="E6E6F0"/>
-                </a:solidFill>
-                <a:latin typeface="Courier New" pitchFamily="34" charset="0"/>
-                <a:ea typeface="Courier New" pitchFamily="34" charset="-122"/>
-                <a:cs typeface="Courier New" pitchFamily="34" charset="-120"/>
-              </a:rPr>
-              <a:t>psql "host=… dbname=app user=mario sslmode=verify-full …"</a:t>
-            </a:r>
-            <a:endParaRPr lang="en-US" sz="1600" dirty="0"/>
-          </a:p>
-        </p:txBody>
-      </p:sp>
-      <p:sp>
-        <p:nvSpPr>
-          <p:cNvPr id="23" name="Shape 17"/>
-          <p:cNvSpPr/>
-          <p:nvPr/>
-        </p:nvSpPr>
-        <p:spPr>
-          <a:xfrm>
-            <a:off x="548640" y="5349240"/>
-            <a:ext cx="11094415" cy="777240"/>
-          </a:xfrm>
-          <a:prstGeom prst="roundRect">
-            <a:avLst>
-              <a:gd name="adj" fmla="val 11765"/>
-            </a:avLst>
-          </a:prstGeom>
-          <a:solidFill>
-            <a:srgbClr val="E5F4EC"/>
-          </a:solidFill>
-          <a:ln w="12700">
-            <a:solidFill>
-              <a:srgbClr val="E5F4EC"/>
-            </a:solidFill>
-            <a:prstDash val="solid"/>
-          </a:ln>
-        </p:spPr>
-      </p:sp>
-      <p:sp>
-        <p:nvSpPr>
-          <p:cNvPr id="24" name="Text 18"/>
-          <p:cNvSpPr txBox="1"/>
-          <p:nvPr/>
-        </p:nvSpPr>
-        <p:spPr>
-          <a:xfrm>
-            <a:off x="822960" y="5349240"/>
-            <a:ext cx="10545775" cy="777240"/>
-          </a:xfrm>
-          <a:prstGeom prst="rect">
-            <a:avLst/>
-          </a:prstGeom>
-          <a:noFill/>
-          <a:ln/>
-        </p:spPr>
-        <p:txBody>
-          <a:bodyPr wrap="square" lIns="0" tIns="0" rIns="0" bIns="0" rtlCol="0" anchor="ctr"/>
-          <a:lstStyle/>
-          <a:p>
-            <a:pPr algn="l" indent="0" marL="0">
-              <a:buNone/>
-            </a:pPr>
-            <a:r>
-              <a:rPr lang="en-US" sz="1800" b="1" dirty="0">
-                <a:solidFill>
-                  <a:srgbClr val="22253A"/>
-                </a:solidFill>
-                <a:latin typeface="Calibri" pitchFamily="34" charset="0"/>
-                <a:ea typeface="Calibri" pitchFamily="34" charset="-122"/>
-                <a:cs typeface="Calibri" pitchFamily="34" charset="-120"/>
-              </a:rPr>
-              <a:t>Ogni persona con il suo nome, nessuna password, un token che scade in 15 minuti.</a:t>
-            </a:r>
-            <a:endParaRPr lang="en-US" sz="1800" dirty="0"/>
-          </a:p>
-        </p:txBody>
-      </p:sp>
-      <p:sp>
-        <p:nvSpPr>
-          <p:cNvPr id="25" name="Slide Number Placeholder 0"/>
-          <p:cNvSpPr>
-            <a:spLocks noGrp="1"/>
-          </p:cNvSpPr>
-          <p:nvPr>
-            <p:ph type="sldNum" sz="quarter" idx="4294967295"/>
-          </p:nvPr>
-        </p:nvSpPr>
-        <p:spPr>
-          <a:xfrm>
-            <a:off x="11155680" y="6400800"/>
-            <a:ext cx="548640" cy="274320"/>
-          </a:xfrm>
-          <a:prstGeom prst="rect">
-            <a:avLst/>
-          </a:prstGeom>
-          <a:extLst>
-            <a:ext uri="{C572A759-6A51-4108-AA02-DFA0A04FC94B}">
-              <ma14:wrappingTextBoxFlag xmlns:ma14="http://schemas.microsoft.com/office/mac/drawingml/2011/main" val="0"/>
-            </a:ext>
-          </a:extLst>
-        </p:spPr>
-        <p:txBody>
-          <a:bodyPr/>
-          <a:lstStyle>
-            <a:lvl1pPr>
-              <a:defRPr sz="1000">
-                <a:solidFill>
-                  <a:srgbClr val="5F6478"/>
-                </a:solidFill>
-                <a:latin typeface="Calibri"/>
-                <a:ea typeface="Calibri"/>
-                <a:cs typeface="Calibri"/>
-              </a:defRPr>
-            </a:lvl1pPr>
-          </a:lstStyle>
-          <a:p>
-            <a:pPr algn="r"/>
-            <a:fld id="{F7021451-1387-4CA6-816F-3879F97B5CBC}" type="slidenum">
-              <a:rPr b="0" lang="en-US"/>
-              <a:t>8</a:t>
-            </a:fld>
-            <a:endParaRPr lang="en-US"/>
-          </a:p>
-        </p:txBody>
-      </p:sp>
-    </p:spTree>
-  </p:cSld>
-  <p:clrMapOvr>
-    <a:masterClrMapping/>
-  </p:clrMapOvr>
-</p:sld>
-</file>
-
-<file path=ppt/slides/slide9.xml><?xml version="1.0" encoding="utf-8"?>
-<p:sld xmlns:a="http://schemas.openxmlformats.org/drawingml/2006/main" xmlns:r="http://schemas.openxmlformats.org/officeDocument/2006/relationships" xmlns:p="http://schemas.openxmlformats.org/presentationml/2006/main">
-  <p:cSld name="Slide 9">
-    <p:bg>
-      <p:bgPr>
-        <a:solidFill>
-          <a:srgbClr val="FFFFFF"/>
-        </a:solidFill>
-      </p:bgPr>
-    </p:bg>
-    <p:spTree>
-      <p:nvGrpSpPr>
-        <p:cNvPr id="1" name=""/>
-        <p:cNvGrpSpPr/>
-        <p:nvPr/>
-      </p:nvGrpSpPr>
-      <p:grpSpPr>
-        <a:xfrm>
-          <a:off x="0" y="0"/>
-          <a:ext cx="0" cy="0"/>
-          <a:chOff x="0" y="0"/>
-          <a:chExt cx="0" cy="0"/>
-        </a:xfrm>
-      </p:grpSpPr>
-      <p:sp>
-        <p:nvSpPr>
-          <p:cNvPr id="2" name="Text 0"/>
-          <p:cNvSpPr txBox="1"/>
-          <p:nvPr/>
-        </p:nvSpPr>
-        <p:spPr>
-          <a:xfrm>
-            <a:off x="548640" y="365760"/>
-            <a:ext cx="11094415" cy="777240"/>
-          </a:xfrm>
-          <a:prstGeom prst="rect">
-            <a:avLst/>
-          </a:prstGeom>
-          <a:noFill/>
-          <a:ln/>
-        </p:spPr>
-        <p:txBody>
-          <a:bodyPr wrap="square" lIns="0" tIns="0" rIns="0" bIns="0" rtlCol="0" anchor="ctr"/>
-          <a:lstStyle/>
-          <a:p>
-            <a:pPr indent="0" marL="0">
-              <a:buNone/>
-            </a:pPr>
-            <a:r>
-              <a:rPr lang="en-US" sz="3200" b="1" dirty="0">
-                <a:solidFill>
-                  <a:srgbClr val="22253A"/>
-                </a:solidFill>
-                <a:latin typeface="Calibri" pitchFamily="34" charset="0"/>
-                <a:ea typeface="Calibri" pitchFamily="34" charset="-122"/>
-                <a:cs typeface="Calibri" pitchFamily="34" charset="-120"/>
-              </a:rPr>
-              <a:t>Chi si è collegato al database martedì alle 15?</a:t>
-            </a:r>
-            <a:endParaRPr lang="en-US" sz="3200" dirty="0"/>
-          </a:p>
-        </p:txBody>
-      </p:sp>
-      <p:sp>
-        <p:nvSpPr>
-          <p:cNvPr id="3" name="Text 1"/>
-          <p:cNvSpPr txBox="1"/>
-          <p:nvPr/>
-        </p:nvSpPr>
-        <p:spPr>
-          <a:xfrm>
-            <a:off x="548640" y="6400800"/>
-            <a:ext cx="7315200" cy="274320"/>
-          </a:xfrm>
-          <a:prstGeom prst="rect">
-            <a:avLst/>
-          </a:prstGeom>
-          <a:noFill/>
-          <a:ln/>
-        </p:spPr>
-        <p:txBody>
-          <a:bodyPr wrap="square" lIns="0" tIns="0" rIns="0" bIns="0" rtlCol="0" anchor="ctr"/>
-          <a:lstStyle/>
-          <a:p>
-            <a:pPr indent="0" marL="0">
-              <a:buNone/>
-            </a:pPr>
-            <a:r>
-              <a:rPr lang="en-US" sz="1000" dirty="0">
-                <a:solidFill>
-                  <a:srgbClr val="5F6478"/>
-                </a:solidFill>
-                <a:latin typeface="Calibri" pitchFamily="34" charset="0"/>
-                <a:ea typeface="Calibri" pitchFamily="34" charset="-122"/>
-                <a:cs typeface="Calibri" pitchFamily="34" charset="-120"/>
-              </a:rPr>
-              <a:t>Appendice A · IAM avanzato e audit</a:t>
-            </a:r>
-            <a:endParaRPr lang="en-US" sz="1000" dirty="0"/>
-          </a:p>
-        </p:txBody>
-      </p:sp>
       <p:graphicFrame>
         <p:nvGraphicFramePr>
-          <p:cNvPr id="10" name="Table 0"/>
+          <p:cNvPr id="8" name="Table 0"/>
           <p:cNvGraphicFramePr>
             <a:graphicFrameLocks noGrp="1"/>
           </p:cNvGraphicFramePr>
@@ -11255,9 +7516,891 @@
             <a:pPr algn="r"/>
             <a:fld id="{F7021451-1387-4CA6-816F-3879F97B5CBC}" type="slidenum">
               <a:rPr b="0" lang="en-US"/>
-              <a:t>9</a:t>
+              <a:t>7</a:t>
             </a:fld>
             <a:endParaRPr lang="en-US"/>
+          </a:p>
+        </p:txBody>
+      </p:sp>
+    </p:spTree>
+  </p:cSld>
+  <p:clrMapOvr>
+    <a:masterClrMapping/>
+  </p:clrMapOvr>
+</p:sld>
+</file>
+
+<file path=ppt/slides/slide8.xml><?xml version="1.0" encoding="utf-8"?>
+<p:sld xmlns:a="http://schemas.openxmlformats.org/drawingml/2006/main" xmlns:r="http://schemas.openxmlformats.org/officeDocument/2006/relationships" xmlns:p="http://schemas.openxmlformats.org/presentationml/2006/main">
+  <p:cSld name="Slide 8">
+    <p:bg>
+      <p:bgPr>
+        <a:solidFill>
+          <a:srgbClr val="FFFFFF"/>
+        </a:solidFill>
+      </p:bgPr>
+    </p:bg>
+    <p:spTree>
+      <p:nvGrpSpPr>
+        <p:cNvPr id="1" name=""/>
+        <p:cNvGrpSpPr/>
+        <p:nvPr/>
+      </p:nvGrpSpPr>
+      <p:grpSpPr>
+        <a:xfrm>
+          <a:off x="0" y="0"/>
+          <a:ext cx="0" cy="0"/>
+          <a:chOff x="0" y="0"/>
+          <a:chExt cx="0" cy="0"/>
+        </a:xfrm>
+      </p:grpSpPr>
+      <p:sp>
+        <p:nvSpPr>
+          <p:cNvPr id="2" name="Text 0"/>
+          <p:cNvSpPr txBox="1"/>
+          <p:nvPr/>
+        </p:nvSpPr>
+        <p:spPr>
+          <a:xfrm>
+            <a:off x="548640" y="365760"/>
+            <a:ext cx="11094415" cy="777240"/>
+          </a:xfrm>
+          <a:prstGeom prst="rect">
+            <a:avLst/>
+          </a:prstGeom>
+          <a:noFill/>
+          <a:ln/>
+        </p:spPr>
+        <p:txBody>
+          <a:bodyPr wrap="square" lIns="0" tIns="0" rIns="0" bIns="0" rtlCol="0" anchor="ctr"/>
+          <a:lstStyle/>
+          <a:p>
+            <a:pPr indent="0" marL="0">
+              <a:buNone/>
+            </a:pPr>
+            <a:r>
+              <a:rPr lang="en-US" sz="3200" b="1" dirty="0">
+                <a:solidFill>
+                  <a:srgbClr val="22253A"/>
+                </a:solidFill>
+                <a:latin typeface="Calibri" pitchFamily="34" charset="0"/>
+                <a:ea typeface="Calibri" pitchFamily="34" charset="-122"/>
+                <a:cs typeface="Calibri" pitchFamily="34" charset="-120"/>
+              </a:rPr>
+              <a:t>Esercizio</a:t>
+            </a:r>
+            <a:endParaRPr lang="en-US" sz="3200" dirty="0"/>
+          </a:p>
+        </p:txBody>
+      </p:sp>
+      <p:sp>
+        <p:nvSpPr>
+          <p:cNvPr id="3" name="Text 1"/>
+          <p:cNvSpPr txBox="1"/>
+          <p:nvPr/>
+        </p:nvSpPr>
+        <p:spPr>
+          <a:xfrm>
+            <a:off x="548640" y="6400800"/>
+            <a:ext cx="7315200" cy="274320"/>
+          </a:xfrm>
+          <a:prstGeom prst="rect">
+            <a:avLst/>
+          </a:prstGeom>
+          <a:noFill/>
+          <a:ln/>
+        </p:spPr>
+        <p:txBody>
+          <a:bodyPr wrap="square" lIns="0" tIns="0" rIns="0" bIns="0" rtlCol="0" anchor="ctr"/>
+          <a:lstStyle/>
+          <a:p>
+            <a:pPr indent="0" marL="0">
+              <a:buNone/>
+            </a:pPr>
+            <a:r>
+              <a:rPr lang="en-US" sz="1000" dirty="0">
+                <a:solidFill>
+                  <a:srgbClr val="5F6478"/>
+                </a:solidFill>
+                <a:latin typeface="Calibri" pitchFamily="34" charset="0"/>
+                <a:ea typeface="Calibri" pitchFamily="34" charset="-122"/>
+                <a:cs typeface="Calibri" pitchFamily="34" charset="-120"/>
+              </a:rPr>
+              <a:t>Appendice A · IAM avanzato e audit</a:t>
+            </a:r>
+            <a:endParaRPr lang="en-US" sz="1000" dirty="0"/>
+          </a:p>
+        </p:txBody>
+      </p:sp>
+      <p:sp>
+        <p:nvSpPr>
+          <p:cNvPr id="5" name="Shape 2"/>
+          <p:cNvSpPr/>
+          <p:nvPr/>
+        </p:nvSpPr>
+        <p:spPr>
+          <a:xfrm>
+            <a:off x="548640" y="1417320"/>
+            <a:ext cx="594360" cy="594360"/>
+          </a:xfrm>
+          <a:prstGeom prst="ellipse">
+            <a:avLst/>
+          </a:prstGeom>
+          <a:solidFill>
+            <a:srgbClr val="5B3FD0"/>
+          </a:solidFill>
+          <a:ln w="12700">
+            <a:solidFill>
+              <a:srgbClr val="5B3FD0"/>
+            </a:solidFill>
+            <a:prstDash val="solid"/>
+          </a:ln>
+        </p:spPr>
+      </p:sp>
+      <p:sp>
+        <p:nvSpPr>
+          <p:cNvPr id="6" name="Text 3"/>
+          <p:cNvSpPr txBox="1"/>
+          <p:nvPr/>
+        </p:nvSpPr>
+        <p:spPr>
+          <a:xfrm>
+            <a:off x="548640" y="1417320"/>
+            <a:ext cx="594360" cy="594360"/>
+          </a:xfrm>
+          <a:prstGeom prst="rect">
+            <a:avLst/>
+          </a:prstGeom>
+          <a:noFill/>
+          <a:ln/>
+        </p:spPr>
+        <p:txBody>
+          <a:bodyPr wrap="square" lIns="0" tIns="0" rIns="0" bIns="0" rtlCol="0" anchor="ctr"/>
+          <a:lstStyle/>
+          <a:p>
+            <a:pPr algn="ctr" indent="0" marL="0">
+              <a:buNone/>
+            </a:pPr>
+            <a:r>
+              <a:rPr lang="en-US" sz="1800" b="1" dirty="0">
+                <a:solidFill>
+                  <a:srgbClr val="FFFFFF"/>
+                </a:solidFill>
+                <a:latin typeface="Calibri" pitchFamily="34" charset="0"/>
+                <a:ea typeface="Calibri" pitchFamily="34" charset="-122"/>
+                <a:cs typeface="Calibri" pitchFamily="34" charset="-120"/>
+              </a:rPr>
+              <a:t>1</a:t>
+            </a:r>
+            <a:endParaRPr lang="en-US" sz="1800" dirty="0"/>
+          </a:p>
+        </p:txBody>
+      </p:sp>
+      <p:sp>
+        <p:nvSpPr>
+          <p:cNvPr id="7" name="Text 4"/>
+          <p:cNvSpPr txBox="1"/>
+          <p:nvPr/>
+        </p:nvSpPr>
+        <p:spPr>
+          <a:xfrm>
+            <a:off x="1325880" y="1280160"/>
+            <a:ext cx="10225735" cy="868680"/>
+          </a:xfrm>
+          <a:prstGeom prst="rect">
+            <a:avLst/>
+          </a:prstGeom>
+          <a:noFill/>
+          <a:ln/>
+        </p:spPr>
+        <p:txBody>
+          <a:bodyPr wrap="square" lIns="0" tIns="0" rIns="0" bIns="0" rtlCol="0" anchor="ctr"/>
+          <a:lstStyle/>
+          <a:p>
+            <a:pPr indent="0" marL="0">
+              <a:buNone/>
+            </a:pPr>
+            <a:r>
+              <a:rPr lang="en-US" sz="1700" b="1" dirty="0">
+                <a:solidFill>
+                  <a:srgbClr val="22253A"/>
+                </a:solidFill>
+                <a:latin typeface="Calibri" pitchFamily="34" charset="0"/>
+                <a:ea typeface="Calibri" pitchFamily="34" charset="-122"/>
+                <a:cs typeface="Calibri" pitchFamily="34" charset="-120"/>
+              </a:rPr>
+              <a:t>terraform apply</a:t>
+            </a:r>
+            <a:endParaRPr lang="en-US" sz="1700" dirty="0"/>
+          </a:p>
+          <a:p>
+            <a:pPr indent="0" marL="0">
+              <a:buNone/>
+            </a:pPr>
+            <a:r>
+              <a:rPr lang="en-US" sz="1400" dirty="0">
+                <a:solidFill>
+                  <a:srgbClr val="5F6478"/>
+                </a:solidFill>
+                <a:latin typeface="Calibri" pitchFamily="34" charset="0"/>
+                <a:ea typeface="Calibri" pitchFamily="34" charset="-122"/>
+                <a:cs typeface="Calibri" pitchFamily="34" charset="-120"/>
+              </a:rPr>
+              <a:t>chiave e alias; topic e database modificati</a:t>
+            </a:r>
+            <a:endParaRPr lang="en-US" sz="1700" dirty="0"/>
+          </a:p>
+        </p:txBody>
+      </p:sp>
+      <p:sp>
+        <p:nvSpPr>
+          <p:cNvPr id="8" name="Shape 5"/>
+          <p:cNvSpPr/>
+          <p:nvPr/>
+        </p:nvSpPr>
+        <p:spPr>
+          <a:xfrm>
+            <a:off x="548640" y="2221992"/>
+            <a:ext cx="594360" cy="594360"/>
+          </a:xfrm>
+          <a:prstGeom prst="ellipse">
+            <a:avLst/>
+          </a:prstGeom>
+          <a:solidFill>
+            <a:srgbClr val="5B3FD0"/>
+          </a:solidFill>
+          <a:ln w="12700">
+            <a:solidFill>
+              <a:srgbClr val="5B3FD0"/>
+            </a:solidFill>
+            <a:prstDash val="solid"/>
+          </a:ln>
+        </p:spPr>
+      </p:sp>
+      <p:sp>
+        <p:nvSpPr>
+          <p:cNvPr id="9" name="Text 6"/>
+          <p:cNvSpPr txBox="1"/>
+          <p:nvPr/>
+        </p:nvSpPr>
+        <p:spPr>
+          <a:xfrm>
+            <a:off x="548640" y="2221992"/>
+            <a:ext cx="594360" cy="594360"/>
+          </a:xfrm>
+          <a:prstGeom prst="rect">
+            <a:avLst/>
+          </a:prstGeom>
+          <a:noFill/>
+          <a:ln/>
+        </p:spPr>
+        <p:txBody>
+          <a:bodyPr wrap="square" lIns="0" tIns="0" rIns="0" bIns="0" rtlCol="0" anchor="ctr"/>
+          <a:lstStyle/>
+          <a:p>
+            <a:pPr algn="ctr" indent="0" marL="0">
+              <a:buNone/>
+            </a:pPr>
+            <a:r>
+              <a:rPr lang="en-US" sz="1800" b="1" dirty="0">
+                <a:solidFill>
+                  <a:srgbClr val="FFFFFF"/>
+                </a:solidFill>
+                <a:latin typeface="Calibri" pitchFamily="34" charset="0"/>
+                <a:ea typeface="Calibri" pitchFamily="34" charset="-122"/>
+                <a:cs typeface="Calibri" pitchFamily="34" charset="-120"/>
+              </a:rPr>
+              <a:t>2</a:t>
+            </a:r>
+            <a:endParaRPr lang="en-US" sz="1800" dirty="0"/>
+          </a:p>
+        </p:txBody>
+      </p:sp>
+      <p:sp>
+        <p:nvSpPr>
+          <p:cNvPr id="10" name="Text 7"/>
+          <p:cNvSpPr txBox="1"/>
+          <p:nvPr/>
+        </p:nvSpPr>
+        <p:spPr>
+          <a:xfrm>
+            <a:off x="1325880" y="2084832"/>
+            <a:ext cx="10225735" cy="868680"/>
+          </a:xfrm>
+          <a:prstGeom prst="rect">
+            <a:avLst/>
+          </a:prstGeom>
+          <a:noFill/>
+          <a:ln/>
+        </p:spPr>
+        <p:txBody>
+          <a:bodyPr wrap="square" lIns="0" tIns="0" rIns="0" bIns="0" rtlCol="0" anchor="ctr"/>
+          <a:lstStyle/>
+          <a:p>
+            <a:pPr indent="0" marL="0">
+              <a:buNone/>
+            </a:pPr>
+            <a:r>
+              <a:rPr lang="en-US" sz="1700" b="1" dirty="0">
+                <a:solidFill>
+                  <a:srgbClr val="22253A"/>
+                </a:solidFill>
+                <a:latin typeface="Calibri" pitchFamily="34" charset="0"/>
+                <a:ea typeface="Calibri" pitchFamily="34" charset="-122"/>
+                <a:cs typeface="Calibri" pitchFamily="34" charset="-120"/>
+              </a:rPr>
+              <a:t>Allarme forzato, chiave nostra</a:t>
+            </a:r>
+            <a:endParaRPr lang="en-US" sz="1700" dirty="0"/>
+          </a:p>
+          <a:p>
+            <a:pPr indent="0" marL="0">
+              <a:buNone/>
+            </a:pPr>
+            <a:r>
+              <a:rPr lang="en-US" sz="1400" dirty="0">
+                <a:solidFill>
+                  <a:srgbClr val="5F6478"/>
+                </a:solidFill>
+                <a:latin typeface="Calibri" pitchFamily="34" charset="0"/>
+                <a:ea typeface="Calibri" pitchFamily="34" charset="-122"/>
+                <a:cs typeface="Calibri" pitchFamily="34" charset="-120"/>
+              </a:rPr>
+              <a:t>la mail arriva; senza lo statement di CloudWatch, no</a:t>
+            </a:r>
+            <a:endParaRPr lang="en-US" sz="1700" dirty="0"/>
+          </a:p>
+        </p:txBody>
+      </p:sp>
+      <p:sp>
+        <p:nvSpPr>
+          <p:cNvPr id="11" name="Shape 8"/>
+          <p:cNvSpPr/>
+          <p:nvPr/>
+        </p:nvSpPr>
+        <p:spPr>
+          <a:xfrm>
+            <a:off x="548640" y="3026664"/>
+            <a:ext cx="594360" cy="594360"/>
+          </a:xfrm>
+          <a:prstGeom prst="ellipse">
+            <a:avLst/>
+          </a:prstGeom>
+          <a:solidFill>
+            <a:srgbClr val="5B3FD0"/>
+          </a:solidFill>
+          <a:ln w="12700">
+            <a:solidFill>
+              <a:srgbClr val="5B3FD0"/>
+            </a:solidFill>
+            <a:prstDash val="solid"/>
+          </a:ln>
+        </p:spPr>
+      </p:sp>
+      <p:sp>
+        <p:nvSpPr>
+          <p:cNvPr id="12" name="Text 9"/>
+          <p:cNvSpPr txBox="1"/>
+          <p:nvPr/>
+        </p:nvSpPr>
+        <p:spPr>
+          <a:xfrm>
+            <a:off x="548640" y="3026664"/>
+            <a:ext cx="594360" cy="594360"/>
+          </a:xfrm>
+          <a:prstGeom prst="rect">
+            <a:avLst/>
+          </a:prstGeom>
+          <a:noFill/>
+          <a:ln/>
+        </p:spPr>
+        <p:txBody>
+          <a:bodyPr wrap="square" lIns="0" tIns="0" rIns="0" bIns="0" rtlCol="0" anchor="ctr"/>
+          <a:lstStyle/>
+          <a:p>
+            <a:pPr algn="ctr" indent="0" marL="0">
+              <a:buNone/>
+            </a:pPr>
+            <a:r>
+              <a:rPr lang="en-US" sz="1800" b="1" dirty="0">
+                <a:solidFill>
+                  <a:srgbClr val="FFFFFF"/>
+                </a:solidFill>
+                <a:latin typeface="Calibri" pitchFamily="34" charset="0"/>
+                <a:ea typeface="Calibri" pitchFamily="34" charset="-122"/>
+                <a:cs typeface="Calibri" pitchFamily="34" charset="-120"/>
+              </a:rPr>
+              <a:t>3</a:t>
+            </a:r>
+            <a:endParaRPr lang="en-US" sz="1800" dirty="0"/>
+          </a:p>
+        </p:txBody>
+      </p:sp>
+      <p:sp>
+        <p:nvSpPr>
+          <p:cNvPr id="13" name="Text 10"/>
+          <p:cNvSpPr txBox="1"/>
+          <p:nvPr/>
+        </p:nvSpPr>
+        <p:spPr>
+          <a:xfrm>
+            <a:off x="1325880" y="2889504"/>
+            <a:ext cx="10225735" cy="868680"/>
+          </a:xfrm>
+          <a:prstGeom prst="rect">
+            <a:avLst/>
+          </a:prstGeom>
+          <a:noFill/>
+          <a:ln/>
+        </p:spPr>
+        <p:txBody>
+          <a:bodyPr wrap="square" lIns="0" tIns="0" rIns="0" bIns="0" rtlCol="0" anchor="ctr"/>
+          <a:lstStyle/>
+          <a:p>
+            <a:pPr indent="0" marL="0">
+              <a:buNone/>
+            </a:pPr>
+            <a:r>
+              <a:rPr lang="en-US" sz="1700" b="1" dirty="0">
+                <a:solidFill>
+                  <a:srgbClr val="22253A"/>
+                </a:solidFill>
+                <a:latin typeface="Calibri" pitchFamily="34" charset="0"/>
+                <a:ea typeface="Calibri" pitchFamily="34" charset="-122"/>
+                <a:cs typeface="Calibri" pitchFamily="34" charset="-120"/>
+              </a:rPr>
+              <a:t>Il tuo utente nel database</a:t>
+            </a:r>
+            <a:endParaRPr lang="en-US" sz="1700" dirty="0"/>
+          </a:p>
+          <a:p>
+            <a:pPr indent="0" marL="0">
+              <a:buNone/>
+            </a:pPr>
+            <a:r>
+              <a:rPr lang="en-US" sz="1400" dirty="0">
+                <a:solidFill>
+                  <a:srgbClr val="5F6478"/>
+                </a:solidFill>
+                <a:latin typeface="Calibri" pitchFamily="34" charset="0"/>
+                <a:ea typeface="Calibri" pitchFamily="34" charset="-122"/>
+                <a:cs typeface="Calibri" pitchFamily="34" charset="-120"/>
+              </a:rPr>
+              <a:t>CREATE USER mario · token · select current_user → mario</a:t>
+            </a:r>
+            <a:endParaRPr lang="en-US" sz="1700" dirty="0"/>
+          </a:p>
+        </p:txBody>
+      </p:sp>
+      <p:sp>
+        <p:nvSpPr>
+          <p:cNvPr id="25" name="Slide Number Placeholder 0"/>
+          <p:cNvSpPr>
+            <a:spLocks noGrp="1"/>
+          </p:cNvSpPr>
+          <p:nvPr>
+            <p:ph type="sldNum" sz="quarter" idx="4294967295"/>
+          </p:nvPr>
+        </p:nvSpPr>
+        <p:spPr>
+          <a:xfrm>
+            <a:off x="11155680" y="6400800"/>
+            <a:ext cx="548640" cy="274320"/>
+          </a:xfrm>
+          <a:prstGeom prst="rect">
+            <a:avLst/>
+          </a:prstGeom>
+          <a:extLst>
+            <a:ext uri="{C572A759-6A51-4108-AA02-DFA0A04FC94B}">
+              <ma14:wrappingTextBoxFlag xmlns:ma14="http://schemas.microsoft.com/office/mac/drawingml/2011/main" val="0"/>
+            </a:ext>
+          </a:extLst>
+        </p:spPr>
+        <p:txBody>
+          <a:bodyPr/>
+          <a:lstStyle>
+            <a:lvl1pPr>
+              <a:defRPr sz="1000">
+                <a:solidFill>
+                  <a:srgbClr val="5F6478"/>
+                </a:solidFill>
+                <a:latin typeface="Calibri"/>
+                <a:ea typeface="Calibri"/>
+                <a:cs typeface="Calibri"/>
+              </a:defRPr>
+            </a:lvl1pPr>
+          </a:lstStyle>
+          <a:p>
+            <a:pPr algn="r"/>
+            <a:fld id="{F7021451-1387-4CA6-816F-3879F97B5CBC}" type="slidenum">
+              <a:rPr b="0" lang="en-US"/>
+              <a:t>8</a:t>
+            </a:fld>
+            <a:endParaRPr lang="en-US"/>
+          </a:p>
+        </p:txBody>
+      </p:sp>
+    </p:spTree>
+  </p:cSld>
+  <p:clrMapOvr>
+    <a:masterClrMapping/>
+  </p:clrMapOvr>
+</p:sld>
+</file>
+
+<file path=ppt/slides/slide9.xml><?xml version="1.0" encoding="utf-8"?>
+<p:sld xmlns:a="http://schemas.openxmlformats.org/drawingml/2006/main" xmlns:r="http://schemas.openxmlformats.org/officeDocument/2006/relationships" xmlns:p="http://schemas.openxmlformats.org/presentationml/2006/main">
+  <p:cSld name="Slide 9">
+    <p:bg>
+      <p:bgPr>
+        <a:solidFill>
+          <a:srgbClr val="1B1F3B"/>
+        </a:solidFill>
+      </p:bgPr>
+    </p:bg>
+    <p:spTree>
+      <p:nvGrpSpPr>
+        <p:cNvPr id="1" name=""/>
+        <p:cNvGrpSpPr/>
+        <p:nvPr/>
+      </p:nvGrpSpPr>
+      <p:grpSpPr>
+        <a:xfrm>
+          <a:off x="0" y="0"/>
+          <a:ext cx="0" cy="0"/>
+          <a:chOff x="0" y="0"/>
+          <a:chExt cx="0" cy="0"/>
+        </a:xfrm>
+      </p:grpSpPr>
+      <p:sp>
+        <p:nvSpPr>
+          <p:cNvPr id="2" name="Text 0"/>
+          <p:cNvSpPr txBox="1"/>
+          <p:nvPr/>
+        </p:nvSpPr>
+        <p:spPr>
+          <a:xfrm>
+            <a:off x="548640" y="457200"/>
+            <a:ext cx="10972800" cy="822960"/>
+          </a:xfrm>
+          <a:prstGeom prst="rect">
+            <a:avLst/>
+          </a:prstGeom>
+          <a:noFill/>
+          <a:ln/>
+        </p:spPr>
+        <p:txBody>
+          <a:bodyPr wrap="square" lIns="0" tIns="0" rIns="0" bIns="0" rtlCol="0" anchor="ctr"/>
+          <a:lstStyle/>
+          <a:p>
+            <a:pPr indent="0" marL="0">
+              <a:buNone/>
+            </a:pPr>
+            <a:r>
+              <a:rPr lang="en-US" sz="3600" b="1" dirty="0">
+                <a:solidFill>
+                  <a:srgbClr val="FFFFFF"/>
+                </a:solidFill>
+                <a:latin typeface="Calibri" pitchFamily="34" charset="0"/>
+                <a:ea typeface="Calibri" pitchFamily="34" charset="-122"/>
+                <a:cs typeface="Calibri" pitchFamily="34" charset="-120"/>
+              </a:rPr>
+              <a:t>Riepilogo</a:t>
+            </a:r>
+            <a:endParaRPr lang="en-US" sz="3600" dirty="0"/>
+          </a:p>
+        </p:txBody>
+      </p:sp>
+      <p:sp>
+        <p:nvSpPr>
+          <p:cNvPr id="3" name="Text 1"/>
+          <p:cNvSpPr txBox="1"/>
+          <p:nvPr/>
+        </p:nvSpPr>
+        <p:spPr>
+          <a:xfrm>
+            <a:off x="548640" y="1463040"/>
+            <a:ext cx="6949440" cy="4206240"/>
+          </a:xfrm>
+          <a:prstGeom prst="rect">
+            <a:avLst/>
+          </a:prstGeom>
+          <a:noFill/>
+          <a:ln/>
+        </p:spPr>
+        <p:txBody>
+          <a:bodyPr wrap="square" lIns="0" tIns="0" rIns="0" bIns="0" rtlCol="0" anchor="t"/>
+          <a:lstStyle/>
+          <a:p>
+            <a:pPr marL="342900" indent="-342900">
+              <a:spcAft>
+                <a:spcPts val="1000"/>
+              </a:spcAft>
+              <a:buSzPct val="100000"/>
+              <a:buChar char="•"/>
+            </a:pPr>
+            <a:r>
+              <a:rPr lang="en-US" sz="1800" dirty="0">
+                <a:solidFill>
+                  <a:srgbClr val="E4E5F2"/>
+                </a:solidFill>
+                <a:latin typeface="Calibri" pitchFamily="34" charset="0"/>
+                <a:ea typeface="Calibri" pitchFamily="34" charset="-122"/>
+                <a:cs typeface="Calibri" pitchFamily="34" charset="-120"/>
+              </a:rPr>
+              <a:t>Condition key: "solo se…"; con le etichette, ABAC</a:t>
+            </a:r>
+            <a:endParaRPr lang="en-US" sz="1800" dirty="0"/>
+          </a:p>
+          <a:p>
+            <a:pPr marL="342900" indent="-342900">
+              <a:spcAft>
+                <a:spcPts val="1000"/>
+              </a:spcAft>
+              <a:buSzPct val="100000"/>
+              <a:buChar char="•"/>
+            </a:pPr>
+            <a:r>
+              <a:rPr lang="en-US" sz="1800" dirty="0">
+                <a:solidFill>
+                  <a:srgbClr val="E4E5F2"/>
+                </a:solidFill>
+                <a:latin typeface="Calibri" pitchFamily="34" charset="0"/>
+                <a:ea typeface="Calibri" pitchFamily="34" charset="-122"/>
+                <a:cs typeface="Calibri" pitchFamily="34" charset="-120"/>
+              </a:rPr>
+              <a:t>Boundary e SCP: tetti che tolgono, anche all'amministratore</a:t>
+            </a:r>
+            <a:endParaRPr lang="en-US" sz="1800" dirty="0"/>
+          </a:p>
+          <a:p>
+            <a:pPr marL="342900" indent="-342900">
+              <a:spcAft>
+                <a:spcPts val="1000"/>
+              </a:spcAft>
+              <a:buSzPct val="100000"/>
+              <a:buChar char="•"/>
+            </a:pPr>
+            <a:r>
+              <a:rPr lang="en-US" sz="1800" dirty="0">
+                <a:solidFill>
+                  <a:srgbClr val="E4E5F2"/>
+                </a:solidFill>
+                <a:latin typeface="Calibri" pitchFamily="34" charset="0"/>
+                <a:ea typeface="Calibri" pitchFamily="34" charset="-122"/>
+                <a:cs typeface="Calibri" pitchFamily="34" charset="-120"/>
+              </a:rPr>
+              <a:t>Log incrociati: PostgreSQL, Flow Logs, Tailscale, CloudTrail</a:t>
+            </a:r>
+            <a:endParaRPr lang="en-US" sz="1800" dirty="0"/>
+          </a:p>
+          <a:p>
+            <a:pPr marL="342900" indent="-342900">
+              <a:spcAft>
+                <a:spcPts val="1000"/>
+              </a:spcAft>
+              <a:buSzPct val="100000"/>
+              <a:buChar char="•"/>
+            </a:pPr>
+            <a:r>
+              <a:rPr lang="en-US" sz="1800" dirty="0">
+                <a:solidFill>
+                  <a:srgbClr val="E4E5F2"/>
+                </a:solidFill>
+                <a:latin typeface="Calibri" pitchFamily="34" charset="0"/>
+                <a:ea typeface="Calibri" pitchFamily="34" charset="-122"/>
+                <a:cs typeface="Calibri" pitchFamily="34" charset="-120"/>
+              </a:rPr>
+              <a:t>Chiave KMS tua: key policy da root, poi i servizi</a:t>
+            </a:r>
+            <a:endParaRPr lang="en-US" sz="1800" dirty="0"/>
+          </a:p>
+          <a:p>
+            <a:pPr marL="342900" indent="-342900">
+              <a:spcAft>
+                <a:spcPts val="1000"/>
+              </a:spcAft>
+              <a:buSzPct val="100000"/>
+              <a:buChar char="•"/>
+            </a:pPr>
+            <a:r>
+              <a:rPr lang="en-US" sz="1800" dirty="0">
+                <a:solidFill>
+                  <a:srgbClr val="E4E5F2"/>
+                </a:solidFill>
+                <a:latin typeface="Calibri" pitchFamily="34" charset="0"/>
+                <a:ea typeface="Calibri" pitchFamily="34" charset="-122"/>
+                <a:cs typeface="Calibri" pitchFamily="34" charset="-120"/>
+              </a:rPr>
+              <a:t>Database con IAM: ogni persona col suo nome, token di 15 minuti</a:t>
+            </a:r>
+            <a:endParaRPr lang="en-US" sz="1800" dirty="0"/>
+          </a:p>
+        </p:txBody>
+      </p:sp>
+      <p:sp>
+        <p:nvSpPr>
+          <p:cNvPr id="4" name="Shape 2"/>
+          <p:cNvSpPr/>
+          <p:nvPr/>
+        </p:nvSpPr>
+        <p:spPr>
+          <a:xfrm>
+            <a:off x="7955280" y="1463040"/>
+            <a:ext cx="3685032" cy="2103120"/>
+          </a:xfrm>
+          <a:prstGeom prst="roundRect">
+            <a:avLst>
+              <a:gd name="adj" fmla="val 5217"/>
+            </a:avLst>
+          </a:prstGeom>
+          <a:solidFill>
+            <a:srgbClr val="2A2F55"/>
+          </a:solidFill>
+          <a:ln w="12700">
+            <a:solidFill>
+              <a:srgbClr val="2A2F55"/>
+            </a:solidFill>
+            <a:prstDash val="solid"/>
+          </a:ln>
+        </p:spPr>
+      </p:sp>
+      <p:sp>
+        <p:nvSpPr>
+          <p:cNvPr id="5" name="Text 3"/>
+          <p:cNvSpPr txBox="1"/>
+          <p:nvPr/>
+        </p:nvSpPr>
+        <p:spPr>
+          <a:xfrm>
+            <a:off x="8183880" y="1645920"/>
+            <a:ext cx="3291840" cy="1737360"/>
+          </a:xfrm>
+          <a:prstGeom prst="rect">
+            <a:avLst/>
+          </a:prstGeom>
+          <a:noFill/>
+          <a:ln/>
+        </p:spPr>
+        <p:txBody>
+          <a:bodyPr wrap="square" lIns="0" tIns="0" rIns="0" bIns="0" rtlCol="0" anchor="t"/>
+          <a:lstStyle/>
+          <a:p>
+            <a:pPr indent="0" marL="0">
+              <a:buNone/>
+            </a:pPr>
+            <a:r>
+              <a:rPr lang="en-US" sz="1600" b="1" dirty="0">
+                <a:solidFill>
+                  <a:srgbClr val="F28C28"/>
+                </a:solidFill>
+                <a:latin typeface="Calibri" pitchFamily="34" charset="0"/>
+                <a:ea typeface="Calibri" pitchFamily="34" charset="-122"/>
+                <a:cs typeface="Calibri" pitchFamily="34" charset="-120"/>
+              </a:rPr>
+              <a:t>Materiale di studio</a:t>
+            </a:r>
+            <a:endParaRPr lang="en-US" sz="1600" dirty="0"/>
+          </a:p>
+          <a:p>
+            <a:pPr indent="0" marL="0">
+              <a:buNone/>
+            </a:pPr>
+            <a:r>
+              <a:rPr lang="en-US" sz="1400" dirty="0">
+                <a:solidFill>
+                  <a:srgbClr val="FFFFFF"/>
+                </a:solidFill>
+                <a:latin typeface="Courier New" pitchFamily="34" charset="0"/>
+                <a:ea typeface="Courier New" pitchFamily="34" charset="-122"/>
+                <a:cs typeface="Courier New" pitchFamily="34" charset="-120"/>
+              </a:rPr>
+              <a:t>dispense/appendice-a-iam-audit.md</a:t>
+            </a:r>
+            <a:endParaRPr lang="en-US" sz="1600" dirty="0"/>
+          </a:p>
+        </p:txBody>
+      </p:sp>
+      <p:sp>
+        <p:nvSpPr>
+          <p:cNvPr id="6" name="Shape 4"/>
+          <p:cNvSpPr/>
+          <p:nvPr/>
+        </p:nvSpPr>
+        <p:spPr>
+          <a:xfrm>
+            <a:off x="7955280" y="3840480"/>
+            <a:ext cx="3685032" cy="1463040"/>
+          </a:xfrm>
+          <a:prstGeom prst="roundRect">
+            <a:avLst>
+              <a:gd name="adj" fmla="val 7500"/>
+            </a:avLst>
+          </a:prstGeom>
+          <a:solidFill>
+            <a:srgbClr val="5B3FD0"/>
+          </a:solidFill>
+          <a:ln w="12700">
+            <a:solidFill>
+              <a:srgbClr val="5B3FD0"/>
+            </a:solidFill>
+            <a:prstDash val="solid"/>
+          </a:ln>
+        </p:spPr>
+      </p:sp>
+      <p:sp>
+        <p:nvSpPr>
+          <p:cNvPr id="7" name="Text 5"/>
+          <p:cNvSpPr txBox="1"/>
+          <p:nvPr/>
+        </p:nvSpPr>
+        <p:spPr>
+          <a:xfrm>
+            <a:off x="8183880" y="4023360"/>
+            <a:ext cx="3291840" cy="1097280"/>
+          </a:xfrm>
+          <a:prstGeom prst="rect">
+            <a:avLst/>
+          </a:prstGeom>
+          <a:noFill/>
+          <a:ln/>
+        </p:spPr>
+        <p:txBody>
+          <a:bodyPr wrap="square" lIns="0" tIns="0" rIns="0" bIns="0" rtlCol="0" anchor="t"/>
+          <a:lstStyle/>
+          <a:p>
+            <a:pPr indent="0" marL="0">
+              <a:buNone/>
+            </a:pPr>
+            <a:r>
+              <a:rPr lang="en-US" sz="1400" b="1" dirty="0">
+                <a:solidFill>
+                  <a:srgbClr val="D9D2FF"/>
+                </a:solidFill>
+                <a:latin typeface="Calibri" pitchFamily="34" charset="0"/>
+                <a:ea typeface="Calibri" pitchFamily="34" charset="-122"/>
+                <a:cs typeface="Calibri" pitchFamily="34" charset="-120"/>
+              </a:rPr>
+              <a:t>Prossima lezione</a:t>
+            </a:r>
+            <a:endParaRPr lang="en-US" sz="1400" dirty="0"/>
+          </a:p>
+          <a:p>
+            <a:pPr indent="0" marL="0">
+              <a:buNone/>
+            </a:pPr>
+            <a:r>
+              <a:rPr lang="en-US" sz="1800" b="1" dirty="0">
+                <a:solidFill>
+                  <a:srgbClr val="FFFFFF"/>
+                </a:solidFill>
+                <a:latin typeface="Calibri" pitchFamily="34" charset="0"/>
+                <a:ea typeface="Calibri" pitchFamily="34" charset="-122"/>
+                <a:cs typeface="Calibri" pitchFamily="34" charset="-120"/>
+              </a:rPr>
+              <a:t>Fine del corso: buon lavoro!</a:t>
+            </a:r>
+            <a:endParaRPr lang="en-US" sz="1400" dirty="0"/>
           </a:p>
         </p:txBody>
       </p:sp>
